--- a/obrazki/rysunki.pptx
+++ b/obrazki/rysunki.pptx
@@ -5,10 +5,13 @@
     <p:sldMasterId id="2147483648" r:id="rId1"/>
   </p:sldMasterIdLst>
   <p:notesMasterIdLst>
-    <p:notesMasterId r:id="rId3"/>
+    <p:notesMasterId r:id="rId6"/>
   </p:notesMasterIdLst>
   <p:sldIdLst>
     <p:sldId id="256" r:id="rId2"/>
+    <p:sldId id="257" r:id="rId3"/>
+    <p:sldId id="258" r:id="rId4"/>
+    <p:sldId id="259" r:id="rId5"/>
   </p:sldIdLst>
   <p:sldSz cx="12192000" cy="6858000"/>
   <p:notesSz cx="6858000" cy="9144000"/>
@@ -197,7 +200,7 @@
           <a:p>
             <a:fld id="{8F16DF33-2DBE-4DF4-A6F7-8F4EECB055E3}" type="datetimeFigureOut">
               <a:rPr lang="en-US" smtClean="0"/>
-              <a:t>4/13/2026</a:t>
+              <a:t>4/17/2026</a:t>
             </a:fld>
             <a:endParaRPr lang="en-US"/>
           </a:p>
@@ -549,6 +552,198 @@
 </p:notes>
 </file>
 
+<file path=ppt/notesSlides/notesSlide2.xml><?xml version="1.0" encoding="utf-8"?>
+<p:notes xmlns:a="http://schemas.openxmlformats.org/drawingml/2006/main" xmlns:r="http://schemas.openxmlformats.org/officeDocument/2006/relationships" xmlns:p="http://schemas.openxmlformats.org/presentationml/2006/main">
+  <p:cSld>
+    <p:spTree>
+      <p:nvGrpSpPr>
+        <p:cNvPr id="1" name=""/>
+        <p:cNvGrpSpPr/>
+        <p:nvPr/>
+      </p:nvGrpSpPr>
+      <p:grpSpPr>
+        <a:xfrm>
+          <a:off x="0" y="0"/>
+          <a:ext cx="0" cy="0"/>
+          <a:chOff x="0" y="0"/>
+          <a:chExt cx="0" cy="0"/>
+        </a:xfrm>
+      </p:grpSpPr>
+      <p:sp>
+        <p:nvSpPr>
+          <p:cNvPr id="2" name="Symbol zastępczy obrazu slajdu 1"/>
+          <p:cNvSpPr>
+            <a:spLocks noGrp="1" noRot="1" noChangeAspect="1"/>
+          </p:cNvSpPr>
+          <p:nvPr>
+            <p:ph type="sldImg"/>
+          </p:nvPr>
+        </p:nvSpPr>
+        <p:spPr/>
+      </p:sp>
+      <p:sp>
+        <p:nvSpPr>
+          <p:cNvPr id="3" name="Symbol zastępczy notatek 2"/>
+          <p:cNvSpPr>
+            <a:spLocks noGrp="1"/>
+          </p:cNvSpPr>
+          <p:nvPr>
+            <p:ph type="body" idx="1"/>
+          </p:nvPr>
+        </p:nvSpPr>
+        <p:spPr/>
+        <p:txBody>
+          <a:bodyPr/>
+          <a:lstStyle/>
+          <a:p>
+            <a:endParaRPr lang="en-US" dirty="0"/>
+          </a:p>
+        </p:txBody>
+      </p:sp>
+      <p:sp>
+        <p:nvSpPr>
+          <p:cNvPr id="4" name="Symbol zastępczy numeru slajdu 3"/>
+          <p:cNvSpPr>
+            <a:spLocks noGrp="1"/>
+          </p:cNvSpPr>
+          <p:nvPr>
+            <p:ph type="sldNum" sz="quarter" idx="5"/>
+          </p:nvPr>
+        </p:nvSpPr>
+        <p:spPr/>
+        <p:txBody>
+          <a:bodyPr/>
+          <a:lstStyle/>
+          <a:p>
+            <a:fld id="{667BC4DB-F03E-4744-8BB6-43CD09A0624A}" type="slidenum">
+              <a:rPr lang="en-US" smtClean="0"/>
+              <a:t>3</a:t>
+            </a:fld>
+            <a:endParaRPr lang="en-US"/>
+          </a:p>
+        </p:txBody>
+      </p:sp>
+    </p:spTree>
+    <p:extLst>
+      <p:ext uri="{BB962C8B-B14F-4D97-AF65-F5344CB8AC3E}">
+        <p14:creationId xmlns:p14="http://schemas.microsoft.com/office/powerpoint/2010/main" val="1323600969"/>
+      </p:ext>
+    </p:extLst>
+  </p:cSld>
+  <p:clrMapOvr>
+    <a:masterClrMapping/>
+  </p:clrMapOvr>
+</p:notes>
+</file>
+
+<file path=ppt/notesSlides/notesSlide3.xml><?xml version="1.0" encoding="utf-8"?>
+<p:notes xmlns:a="http://schemas.openxmlformats.org/drawingml/2006/main" xmlns:r="http://schemas.openxmlformats.org/officeDocument/2006/relationships" xmlns:p="http://schemas.openxmlformats.org/presentationml/2006/main">
+  <p:cSld>
+    <p:spTree>
+      <p:nvGrpSpPr>
+        <p:cNvPr id="1" name="">
+          <a:extLst>
+            <a:ext uri="{FF2B5EF4-FFF2-40B4-BE49-F238E27FC236}">
+              <a16:creationId xmlns:a16="http://schemas.microsoft.com/office/drawing/2014/main" id="{5D82C2E5-662E-6B32-7FA8-FFB928622194}"/>
+            </a:ext>
+          </a:extLst>
+        </p:cNvPr>
+        <p:cNvGrpSpPr/>
+        <p:nvPr/>
+      </p:nvGrpSpPr>
+      <p:grpSpPr>
+        <a:xfrm>
+          <a:off x="0" y="0"/>
+          <a:ext cx="0" cy="0"/>
+          <a:chOff x="0" y="0"/>
+          <a:chExt cx="0" cy="0"/>
+        </a:xfrm>
+      </p:grpSpPr>
+      <p:sp>
+        <p:nvSpPr>
+          <p:cNvPr id="2" name="Symbol zastępczy obrazu slajdu 1">
+            <a:extLst>
+              <a:ext uri="{FF2B5EF4-FFF2-40B4-BE49-F238E27FC236}">
+                <a16:creationId xmlns:a16="http://schemas.microsoft.com/office/drawing/2014/main" id="{8D56636D-20BF-6CF9-B459-38E57E6493C1}"/>
+              </a:ext>
+            </a:extLst>
+          </p:cNvPr>
+          <p:cNvSpPr>
+            <a:spLocks noGrp="1" noRot="1" noChangeAspect="1"/>
+          </p:cNvSpPr>
+          <p:nvPr>
+            <p:ph type="sldImg"/>
+          </p:nvPr>
+        </p:nvSpPr>
+        <p:spPr/>
+      </p:sp>
+      <p:sp>
+        <p:nvSpPr>
+          <p:cNvPr id="3" name="Symbol zastępczy notatek 2">
+            <a:extLst>
+              <a:ext uri="{FF2B5EF4-FFF2-40B4-BE49-F238E27FC236}">
+                <a16:creationId xmlns:a16="http://schemas.microsoft.com/office/drawing/2014/main" id="{DFE38CD1-8189-5B5A-ACCD-C33003B9AC15}"/>
+              </a:ext>
+            </a:extLst>
+          </p:cNvPr>
+          <p:cNvSpPr>
+            <a:spLocks noGrp="1"/>
+          </p:cNvSpPr>
+          <p:nvPr>
+            <p:ph type="body" idx="1"/>
+          </p:nvPr>
+        </p:nvSpPr>
+        <p:spPr/>
+        <p:txBody>
+          <a:bodyPr/>
+          <a:lstStyle/>
+          <a:p>
+            <a:endParaRPr lang="en-US" dirty="0"/>
+          </a:p>
+        </p:txBody>
+      </p:sp>
+      <p:sp>
+        <p:nvSpPr>
+          <p:cNvPr id="4" name="Symbol zastępczy numeru slajdu 3">
+            <a:extLst>
+              <a:ext uri="{FF2B5EF4-FFF2-40B4-BE49-F238E27FC236}">
+                <a16:creationId xmlns:a16="http://schemas.microsoft.com/office/drawing/2014/main" id="{51EE2E48-91D9-3536-670E-8331596120F9}"/>
+              </a:ext>
+            </a:extLst>
+          </p:cNvPr>
+          <p:cNvSpPr>
+            <a:spLocks noGrp="1"/>
+          </p:cNvSpPr>
+          <p:nvPr>
+            <p:ph type="sldNum" sz="quarter" idx="5"/>
+          </p:nvPr>
+        </p:nvSpPr>
+        <p:spPr/>
+        <p:txBody>
+          <a:bodyPr/>
+          <a:lstStyle/>
+          <a:p>
+            <a:fld id="{667BC4DB-F03E-4744-8BB6-43CD09A0624A}" type="slidenum">
+              <a:rPr lang="en-US" smtClean="0"/>
+              <a:t>4</a:t>
+            </a:fld>
+            <a:endParaRPr lang="en-US"/>
+          </a:p>
+        </p:txBody>
+      </p:sp>
+    </p:spTree>
+    <p:extLst>
+      <p:ext uri="{BB962C8B-B14F-4D97-AF65-F5344CB8AC3E}">
+        <p14:creationId xmlns:p14="http://schemas.microsoft.com/office/powerpoint/2010/main" val="1856480648"/>
+      </p:ext>
+    </p:extLst>
+  </p:cSld>
+  <p:clrMapOvr>
+    <a:masterClrMapping/>
+  </p:clrMapOvr>
+</p:notes>
+</file>
+
 <file path=ppt/slideLayouts/slideLayout1.xml><?xml version="1.0" encoding="utf-8"?>
 <p:sldLayout xmlns:a="http://schemas.openxmlformats.org/drawingml/2006/main" xmlns:r="http://schemas.openxmlformats.org/officeDocument/2006/relationships" xmlns:p="http://schemas.openxmlformats.org/presentationml/2006/main" type="title" preserve="1">
   <p:cSld name="Slajd tytułowy">
@@ -698,7 +893,7 @@
           <a:p>
             <a:fld id="{C0E95A09-29AB-43CF-98BB-398CDC46AB3B}" type="datetimeFigureOut">
               <a:rPr lang="en-US" smtClean="0"/>
-              <a:t>4/13/2026</a:t>
+              <a:t>4/17/2026</a:t>
             </a:fld>
             <a:endParaRPr lang="en-US"/>
           </a:p>
@@ -898,7 +1093,7 @@
           <a:p>
             <a:fld id="{C0E95A09-29AB-43CF-98BB-398CDC46AB3B}" type="datetimeFigureOut">
               <a:rPr lang="en-US" smtClean="0"/>
-              <a:t>4/13/2026</a:t>
+              <a:t>4/17/2026</a:t>
             </a:fld>
             <a:endParaRPr lang="en-US"/>
           </a:p>
@@ -1108,7 +1303,7 @@
           <a:p>
             <a:fld id="{C0E95A09-29AB-43CF-98BB-398CDC46AB3B}" type="datetimeFigureOut">
               <a:rPr lang="en-US" smtClean="0"/>
-              <a:t>4/13/2026</a:t>
+              <a:t>4/17/2026</a:t>
             </a:fld>
             <a:endParaRPr lang="en-US"/>
           </a:p>
@@ -1308,7 +1503,7 @@
           <a:p>
             <a:fld id="{C0E95A09-29AB-43CF-98BB-398CDC46AB3B}" type="datetimeFigureOut">
               <a:rPr lang="en-US" smtClean="0"/>
-              <a:t>4/13/2026</a:t>
+              <a:t>4/17/2026</a:t>
             </a:fld>
             <a:endParaRPr lang="en-US"/>
           </a:p>
@@ -1584,7 +1779,7 @@
           <a:p>
             <a:fld id="{C0E95A09-29AB-43CF-98BB-398CDC46AB3B}" type="datetimeFigureOut">
               <a:rPr lang="en-US" smtClean="0"/>
-              <a:t>4/13/2026</a:t>
+              <a:t>4/17/2026</a:t>
             </a:fld>
             <a:endParaRPr lang="en-US"/>
           </a:p>
@@ -1852,7 +2047,7 @@
           <a:p>
             <a:fld id="{C0E95A09-29AB-43CF-98BB-398CDC46AB3B}" type="datetimeFigureOut">
               <a:rPr lang="en-US" smtClean="0"/>
-              <a:t>4/13/2026</a:t>
+              <a:t>4/17/2026</a:t>
             </a:fld>
             <a:endParaRPr lang="en-US"/>
           </a:p>
@@ -2267,7 +2462,7 @@
           <a:p>
             <a:fld id="{C0E95A09-29AB-43CF-98BB-398CDC46AB3B}" type="datetimeFigureOut">
               <a:rPr lang="en-US" smtClean="0"/>
-              <a:t>4/13/2026</a:t>
+              <a:t>4/17/2026</a:t>
             </a:fld>
             <a:endParaRPr lang="en-US"/>
           </a:p>
@@ -2409,7 +2604,7 @@
           <a:p>
             <a:fld id="{C0E95A09-29AB-43CF-98BB-398CDC46AB3B}" type="datetimeFigureOut">
               <a:rPr lang="en-US" smtClean="0"/>
-              <a:t>4/13/2026</a:t>
+              <a:t>4/17/2026</a:t>
             </a:fld>
             <a:endParaRPr lang="en-US"/>
           </a:p>
@@ -2522,7 +2717,7 @@
           <a:p>
             <a:fld id="{C0E95A09-29AB-43CF-98BB-398CDC46AB3B}" type="datetimeFigureOut">
               <a:rPr lang="en-US" smtClean="0"/>
-              <a:t>4/13/2026</a:t>
+              <a:t>4/17/2026</a:t>
             </a:fld>
             <a:endParaRPr lang="en-US"/>
           </a:p>
@@ -2835,7 +3030,7 @@
           <a:p>
             <a:fld id="{C0E95A09-29AB-43CF-98BB-398CDC46AB3B}" type="datetimeFigureOut">
               <a:rPr lang="en-US" smtClean="0"/>
-              <a:t>4/13/2026</a:t>
+              <a:t>4/17/2026</a:t>
             </a:fld>
             <a:endParaRPr lang="en-US"/>
           </a:p>
@@ -3124,7 +3319,7 @@
           <a:p>
             <a:fld id="{C0E95A09-29AB-43CF-98BB-398CDC46AB3B}" type="datetimeFigureOut">
               <a:rPr lang="en-US" smtClean="0"/>
-              <a:t>4/13/2026</a:t>
+              <a:t>4/17/2026</a:t>
             </a:fld>
             <a:endParaRPr lang="en-US"/>
           </a:p>
@@ -3367,7 +3562,7 @@
           <a:p>
             <a:fld id="{C0E95A09-29AB-43CF-98BB-398CDC46AB3B}" type="datetimeFigureOut">
               <a:rPr lang="en-US" smtClean="0"/>
-              <a:t>4/13/2026</a:t>
+              <a:t>4/17/2026</a:t>
             </a:fld>
             <a:endParaRPr lang="en-US"/>
           </a:p>
@@ -10920,6 +11115,7033 @@
 </p:sld>
 </file>
 
+<file path=ppt/slides/slide2.xml><?xml version="1.0" encoding="utf-8"?>
+<p:sld xmlns:a="http://schemas.openxmlformats.org/drawingml/2006/main" xmlns:r="http://schemas.openxmlformats.org/officeDocument/2006/relationships" xmlns:p="http://schemas.openxmlformats.org/presentationml/2006/main">
+  <p:cSld>
+    <p:spTree>
+      <p:nvGrpSpPr>
+        <p:cNvPr id="1" name=""/>
+        <p:cNvGrpSpPr/>
+        <p:nvPr/>
+      </p:nvGrpSpPr>
+      <p:grpSpPr>
+        <a:xfrm>
+          <a:off x="0" y="0"/>
+          <a:ext cx="0" cy="0"/>
+          <a:chOff x="0" y="0"/>
+          <a:chExt cx="0" cy="0"/>
+        </a:xfrm>
+      </p:grpSpPr>
+      <p:grpSp>
+        <p:nvGrpSpPr>
+          <p:cNvPr id="51" name="Grupa 50">
+            <a:extLst>
+              <a:ext uri="{FF2B5EF4-FFF2-40B4-BE49-F238E27FC236}">
+                <a16:creationId xmlns:a16="http://schemas.microsoft.com/office/drawing/2014/main" id="{6ABEE047-81A6-B6F7-EBBD-CF8CAACBBF69}"/>
+              </a:ext>
+            </a:extLst>
+          </p:cNvPr>
+          <p:cNvGrpSpPr/>
+          <p:nvPr/>
+        </p:nvGrpSpPr>
+        <p:grpSpPr>
+          <a:xfrm>
+            <a:off x="3927418" y="854439"/>
+            <a:ext cx="3747548" cy="4901784"/>
+            <a:chOff x="3927418" y="854439"/>
+            <a:chExt cx="3747548" cy="4901784"/>
+          </a:xfrm>
+        </p:grpSpPr>
+        <p:sp>
+          <p:nvSpPr>
+            <p:cNvPr id="4" name="Prostokąt 3">
+              <a:extLst>
+                <a:ext uri="{FF2B5EF4-FFF2-40B4-BE49-F238E27FC236}">
+                  <a16:creationId xmlns:a16="http://schemas.microsoft.com/office/drawing/2014/main" id="{B30700F3-E506-85DC-1BC8-5DA29EB78590}"/>
+                </a:ext>
+              </a:extLst>
+            </p:cNvPr>
+            <p:cNvSpPr/>
+            <p:nvPr/>
+          </p:nvSpPr>
+          <p:spPr>
+            <a:xfrm>
+              <a:off x="4601980" y="854439"/>
+              <a:ext cx="2398427" cy="4901784"/>
+            </a:xfrm>
+            <a:prstGeom prst="rect">
+              <a:avLst/>
+            </a:prstGeom>
+            <a:solidFill>
+              <a:schemeClr val="accent4">
+                <a:lumMod val="40000"/>
+                <a:lumOff val="60000"/>
+              </a:schemeClr>
+            </a:solidFill>
+          </p:spPr>
+          <p:style>
+            <a:lnRef idx="2">
+              <a:schemeClr val="accent1">
+                <a:shade val="15000"/>
+              </a:schemeClr>
+            </a:lnRef>
+            <a:fillRef idx="1">
+              <a:schemeClr val="accent1"/>
+            </a:fillRef>
+            <a:effectRef idx="0">
+              <a:schemeClr val="accent1"/>
+            </a:effectRef>
+            <a:fontRef idx="minor">
+              <a:schemeClr val="lt1"/>
+            </a:fontRef>
+          </p:style>
+          <p:txBody>
+            <a:bodyPr rtlCol="0" anchor="ctr"/>
+            <a:lstStyle/>
+            <a:p>
+              <a:pPr algn="ctr"/>
+              <a:endParaRPr lang="en-US"/>
+            </a:p>
+          </p:txBody>
+        </p:sp>
+        <p:sp>
+          <p:nvSpPr>
+            <p:cNvPr id="5" name="Prostokąt: zaokrąglone rogi 4">
+              <a:extLst>
+                <a:ext uri="{FF2B5EF4-FFF2-40B4-BE49-F238E27FC236}">
+                  <a16:creationId xmlns:a16="http://schemas.microsoft.com/office/drawing/2014/main" id="{D1FCC42B-9085-E5E8-32D6-4EABD092BAFD}"/>
+                </a:ext>
+              </a:extLst>
+            </p:cNvPr>
+            <p:cNvSpPr/>
+            <p:nvPr/>
+          </p:nvSpPr>
+          <p:spPr>
+            <a:xfrm>
+              <a:off x="3957403" y="989351"/>
+              <a:ext cx="944381" cy="464695"/>
+            </a:xfrm>
+            <a:prstGeom prst="roundRect">
+              <a:avLst/>
+            </a:prstGeom>
+          </p:spPr>
+          <p:style>
+            <a:lnRef idx="1">
+              <a:schemeClr val="accent3"/>
+            </a:lnRef>
+            <a:fillRef idx="3">
+              <a:schemeClr val="accent3"/>
+            </a:fillRef>
+            <a:effectRef idx="2">
+              <a:schemeClr val="accent3"/>
+            </a:effectRef>
+            <a:fontRef idx="minor">
+              <a:schemeClr val="lt1"/>
+            </a:fontRef>
+          </p:style>
+          <p:txBody>
+            <a:bodyPr rtlCol="0" anchor="ctr"/>
+            <a:lstStyle/>
+            <a:p>
+              <a:pPr algn="ctr"/>
+              <a:r>
+                <a:rPr lang="pl-PL" sz="2400" b="1" dirty="0"/>
+                <a:t>A0</a:t>
+              </a:r>
+              <a:endParaRPr lang="en-US" b="1" dirty="0"/>
+            </a:p>
+          </p:txBody>
+        </p:sp>
+        <p:sp>
+          <p:nvSpPr>
+            <p:cNvPr id="6" name="Prostokąt: zaokrąglone rogi 5">
+              <a:extLst>
+                <a:ext uri="{FF2B5EF4-FFF2-40B4-BE49-F238E27FC236}">
+                  <a16:creationId xmlns:a16="http://schemas.microsoft.com/office/drawing/2014/main" id="{1ED664AF-4FE4-0F4D-8133-2915B0D6E751}"/>
+                </a:ext>
+              </a:extLst>
+            </p:cNvPr>
+            <p:cNvSpPr/>
+            <p:nvPr/>
+          </p:nvSpPr>
+          <p:spPr>
+            <a:xfrm>
+              <a:off x="3957403" y="1588958"/>
+              <a:ext cx="944381" cy="464695"/>
+            </a:xfrm>
+            <a:prstGeom prst="roundRect">
+              <a:avLst/>
+            </a:prstGeom>
+          </p:spPr>
+          <p:style>
+            <a:lnRef idx="1">
+              <a:schemeClr val="accent3"/>
+            </a:lnRef>
+            <a:fillRef idx="3">
+              <a:schemeClr val="accent3"/>
+            </a:fillRef>
+            <a:effectRef idx="2">
+              <a:schemeClr val="accent3"/>
+            </a:effectRef>
+            <a:fontRef idx="minor">
+              <a:schemeClr val="lt1"/>
+            </a:fontRef>
+          </p:style>
+          <p:txBody>
+            <a:bodyPr rtlCol="0" anchor="ctr"/>
+            <a:lstStyle/>
+            <a:p>
+              <a:pPr algn="ctr"/>
+              <a:r>
+                <a:rPr lang="pl-PL" sz="2400" b="1" dirty="0"/>
+                <a:t>A1</a:t>
+              </a:r>
+              <a:endParaRPr lang="en-US" sz="2400" b="1" dirty="0"/>
+            </a:p>
+          </p:txBody>
+        </p:sp>
+        <p:sp>
+          <p:nvSpPr>
+            <p:cNvPr id="7" name="Prostokąt: zaokrąglone rogi 6">
+              <a:extLst>
+                <a:ext uri="{FF2B5EF4-FFF2-40B4-BE49-F238E27FC236}">
+                  <a16:creationId xmlns:a16="http://schemas.microsoft.com/office/drawing/2014/main" id="{0CB3BE18-B247-B6F3-53AB-5935C8A5F996}"/>
+                </a:ext>
+              </a:extLst>
+            </p:cNvPr>
+            <p:cNvSpPr/>
+            <p:nvPr/>
+          </p:nvSpPr>
+          <p:spPr>
+            <a:xfrm>
+              <a:off x="3957402" y="2188565"/>
+              <a:ext cx="944381" cy="464695"/>
+            </a:xfrm>
+            <a:prstGeom prst="roundRect">
+              <a:avLst/>
+            </a:prstGeom>
+          </p:spPr>
+          <p:style>
+            <a:lnRef idx="1">
+              <a:schemeClr val="accent3"/>
+            </a:lnRef>
+            <a:fillRef idx="3">
+              <a:schemeClr val="accent3"/>
+            </a:fillRef>
+            <a:effectRef idx="2">
+              <a:schemeClr val="accent3"/>
+            </a:effectRef>
+            <a:fontRef idx="minor">
+              <a:schemeClr val="lt1"/>
+            </a:fontRef>
+          </p:style>
+          <p:txBody>
+            <a:bodyPr rtlCol="0" anchor="ctr"/>
+            <a:lstStyle/>
+            <a:p>
+              <a:pPr algn="ctr"/>
+              <a:r>
+                <a:rPr lang="pl-PL" sz="2400" b="1" dirty="0"/>
+                <a:t>A2</a:t>
+              </a:r>
+              <a:endParaRPr lang="en-US" sz="2400" b="1" dirty="0"/>
+            </a:p>
+          </p:txBody>
+        </p:sp>
+        <p:sp>
+          <p:nvSpPr>
+            <p:cNvPr id="8" name="Prostokąt: zaokrąglone rogi 7">
+              <a:extLst>
+                <a:ext uri="{FF2B5EF4-FFF2-40B4-BE49-F238E27FC236}">
+                  <a16:creationId xmlns:a16="http://schemas.microsoft.com/office/drawing/2014/main" id="{05530A98-DF95-6B6D-F4C8-68C931C32658}"/>
+                </a:ext>
+              </a:extLst>
+            </p:cNvPr>
+            <p:cNvSpPr/>
+            <p:nvPr/>
+          </p:nvSpPr>
+          <p:spPr>
+            <a:xfrm>
+              <a:off x="3957402" y="2765685"/>
+              <a:ext cx="944381" cy="464695"/>
+            </a:xfrm>
+            <a:prstGeom prst="roundRect">
+              <a:avLst/>
+            </a:prstGeom>
+          </p:spPr>
+          <p:style>
+            <a:lnRef idx="1">
+              <a:schemeClr val="accent3"/>
+            </a:lnRef>
+            <a:fillRef idx="3">
+              <a:schemeClr val="accent3"/>
+            </a:fillRef>
+            <a:effectRef idx="2">
+              <a:schemeClr val="accent3"/>
+            </a:effectRef>
+            <a:fontRef idx="minor">
+              <a:schemeClr val="lt1"/>
+            </a:fontRef>
+          </p:style>
+          <p:txBody>
+            <a:bodyPr rtlCol="0" anchor="ctr"/>
+            <a:lstStyle/>
+            <a:p>
+              <a:pPr algn="ctr"/>
+              <a:r>
+                <a:rPr lang="pl-PL" sz="2400" b="1" dirty="0"/>
+                <a:t>P0</a:t>
+              </a:r>
+              <a:endParaRPr lang="en-US" sz="2400" b="1" dirty="0"/>
+            </a:p>
+          </p:txBody>
+        </p:sp>
+        <p:sp>
+          <p:nvSpPr>
+            <p:cNvPr id="9" name="Prostokąt: zaokrąglone rogi 8">
+              <a:extLst>
+                <a:ext uri="{FF2B5EF4-FFF2-40B4-BE49-F238E27FC236}">
+                  <a16:creationId xmlns:a16="http://schemas.microsoft.com/office/drawing/2014/main" id="{139F0390-AEC0-9378-DDB4-59BE0C4607E3}"/>
+                </a:ext>
+              </a:extLst>
+            </p:cNvPr>
+            <p:cNvSpPr/>
+            <p:nvPr/>
+          </p:nvSpPr>
+          <p:spPr>
+            <a:xfrm>
+              <a:off x="3927421" y="3342805"/>
+              <a:ext cx="944381" cy="464695"/>
+            </a:xfrm>
+            <a:prstGeom prst="roundRect">
+              <a:avLst/>
+            </a:prstGeom>
+          </p:spPr>
+          <p:style>
+            <a:lnRef idx="1">
+              <a:schemeClr val="accent3"/>
+            </a:lnRef>
+            <a:fillRef idx="3">
+              <a:schemeClr val="accent3"/>
+            </a:fillRef>
+            <a:effectRef idx="2">
+              <a:schemeClr val="accent3"/>
+            </a:effectRef>
+            <a:fontRef idx="minor">
+              <a:schemeClr val="lt1"/>
+            </a:fontRef>
+          </p:style>
+          <p:txBody>
+            <a:bodyPr rtlCol="0" anchor="ctr"/>
+            <a:lstStyle/>
+            <a:p>
+              <a:pPr algn="ctr"/>
+              <a:r>
+                <a:rPr lang="pl-PL" sz="2400" b="1" dirty="0"/>
+                <a:t>P1</a:t>
+              </a:r>
+              <a:endParaRPr lang="en-US" sz="2400" b="1" dirty="0"/>
+            </a:p>
+          </p:txBody>
+        </p:sp>
+        <p:sp>
+          <p:nvSpPr>
+            <p:cNvPr id="10" name="Prostokąt: zaokrąglone rogi 9">
+              <a:extLst>
+                <a:ext uri="{FF2B5EF4-FFF2-40B4-BE49-F238E27FC236}">
+                  <a16:creationId xmlns:a16="http://schemas.microsoft.com/office/drawing/2014/main" id="{3B8BEC20-92F9-37EC-3BAD-4AE55333E084}"/>
+                </a:ext>
+              </a:extLst>
+            </p:cNvPr>
+            <p:cNvSpPr/>
+            <p:nvPr/>
+          </p:nvSpPr>
+          <p:spPr>
+            <a:xfrm>
+              <a:off x="3927420" y="3919925"/>
+              <a:ext cx="944381" cy="464695"/>
+            </a:xfrm>
+            <a:prstGeom prst="roundRect">
+              <a:avLst/>
+            </a:prstGeom>
+          </p:spPr>
+          <p:style>
+            <a:lnRef idx="1">
+              <a:schemeClr val="accent3"/>
+            </a:lnRef>
+            <a:fillRef idx="3">
+              <a:schemeClr val="accent3"/>
+            </a:fillRef>
+            <a:effectRef idx="2">
+              <a:schemeClr val="accent3"/>
+            </a:effectRef>
+            <a:fontRef idx="minor">
+              <a:schemeClr val="lt1"/>
+            </a:fontRef>
+          </p:style>
+          <p:txBody>
+            <a:bodyPr rtlCol="0" anchor="ctr"/>
+            <a:lstStyle/>
+            <a:p>
+              <a:pPr algn="ctr"/>
+              <a:r>
+                <a:rPr lang="pl-PL" sz="2400" b="1" dirty="0"/>
+                <a:t>P2</a:t>
+              </a:r>
+              <a:endParaRPr lang="en-US" sz="2400" b="1" dirty="0"/>
+            </a:p>
+          </p:txBody>
+        </p:sp>
+        <p:sp>
+          <p:nvSpPr>
+            <p:cNvPr id="11" name="Prostokąt: zaokrąglone rogi 10">
+              <a:extLst>
+                <a:ext uri="{FF2B5EF4-FFF2-40B4-BE49-F238E27FC236}">
+                  <a16:creationId xmlns:a16="http://schemas.microsoft.com/office/drawing/2014/main" id="{422A15F6-8AE8-8D7B-D290-FCF694888960}"/>
+                </a:ext>
+              </a:extLst>
+            </p:cNvPr>
+            <p:cNvSpPr/>
+            <p:nvPr/>
+          </p:nvSpPr>
+          <p:spPr>
+            <a:xfrm>
+              <a:off x="3927419" y="4512040"/>
+              <a:ext cx="944381" cy="464695"/>
+            </a:xfrm>
+            <a:prstGeom prst="roundRect">
+              <a:avLst/>
+            </a:prstGeom>
+          </p:spPr>
+          <p:style>
+            <a:lnRef idx="1">
+              <a:schemeClr val="accent3"/>
+            </a:lnRef>
+            <a:fillRef idx="3">
+              <a:schemeClr val="accent3"/>
+            </a:fillRef>
+            <a:effectRef idx="2">
+              <a:schemeClr val="accent3"/>
+            </a:effectRef>
+            <a:fontRef idx="minor">
+              <a:schemeClr val="lt1"/>
+            </a:fontRef>
+          </p:style>
+          <p:txBody>
+            <a:bodyPr rtlCol="0" anchor="ctr"/>
+            <a:lstStyle/>
+            <a:p>
+              <a:pPr algn="ctr"/>
+              <a:r>
+                <a:rPr lang="pl-PL" sz="2400" b="1" dirty="0"/>
+                <a:t>P3</a:t>
+              </a:r>
+              <a:endParaRPr lang="en-US" sz="2400" b="1" dirty="0"/>
+            </a:p>
+          </p:txBody>
+        </p:sp>
+        <p:sp>
+          <p:nvSpPr>
+            <p:cNvPr id="12" name="Prostokąt: zaokrąglone rogi 11">
+              <a:extLst>
+                <a:ext uri="{FF2B5EF4-FFF2-40B4-BE49-F238E27FC236}">
+                  <a16:creationId xmlns:a16="http://schemas.microsoft.com/office/drawing/2014/main" id="{21937925-26BE-8304-AB58-D5A21CD4B635}"/>
+                </a:ext>
+              </a:extLst>
+            </p:cNvPr>
+            <p:cNvSpPr/>
+            <p:nvPr/>
+          </p:nvSpPr>
+          <p:spPr>
+            <a:xfrm>
+              <a:off x="3927418" y="5096652"/>
+              <a:ext cx="944381" cy="464695"/>
+            </a:xfrm>
+            <a:prstGeom prst="roundRect">
+              <a:avLst/>
+            </a:prstGeom>
+          </p:spPr>
+          <p:style>
+            <a:lnRef idx="1">
+              <a:schemeClr val="accent3"/>
+            </a:lnRef>
+            <a:fillRef idx="3">
+              <a:schemeClr val="accent3"/>
+            </a:fillRef>
+            <a:effectRef idx="2">
+              <a:schemeClr val="accent3"/>
+            </a:effectRef>
+            <a:fontRef idx="minor">
+              <a:schemeClr val="lt1"/>
+            </a:fontRef>
+          </p:style>
+          <p:txBody>
+            <a:bodyPr rtlCol="0" anchor="ctr"/>
+            <a:lstStyle/>
+            <a:p>
+              <a:pPr algn="ctr"/>
+              <a:r>
+                <a:rPr lang="pl-PL" sz="2400" b="1" dirty="0"/>
+                <a:t>GND</a:t>
+              </a:r>
+              <a:endParaRPr lang="en-US" sz="2400" b="1" dirty="0"/>
+            </a:p>
+          </p:txBody>
+        </p:sp>
+        <p:sp>
+          <p:nvSpPr>
+            <p:cNvPr id="13" name="Prostokąt: zaokrąglone rogi 12">
+              <a:extLst>
+                <a:ext uri="{FF2B5EF4-FFF2-40B4-BE49-F238E27FC236}">
+                  <a16:creationId xmlns:a16="http://schemas.microsoft.com/office/drawing/2014/main" id="{2A5F1DB6-3910-3970-BEDC-DFE8E5955C37}"/>
+                </a:ext>
+              </a:extLst>
+            </p:cNvPr>
+            <p:cNvSpPr/>
+            <p:nvPr/>
+          </p:nvSpPr>
+          <p:spPr>
+            <a:xfrm>
+              <a:off x="6730585" y="989351"/>
+              <a:ext cx="944381" cy="464695"/>
+            </a:xfrm>
+            <a:prstGeom prst="roundRect">
+              <a:avLst/>
+            </a:prstGeom>
+          </p:spPr>
+          <p:style>
+            <a:lnRef idx="1">
+              <a:schemeClr val="accent3"/>
+            </a:lnRef>
+            <a:fillRef idx="3">
+              <a:schemeClr val="accent3"/>
+            </a:fillRef>
+            <a:effectRef idx="2">
+              <a:schemeClr val="accent3"/>
+            </a:effectRef>
+            <a:fontRef idx="minor">
+              <a:schemeClr val="lt1"/>
+            </a:fontRef>
+          </p:style>
+          <p:txBody>
+            <a:bodyPr rtlCol="0" anchor="ctr"/>
+            <a:lstStyle/>
+            <a:p>
+              <a:pPr algn="ctr"/>
+              <a:r>
+                <a:rPr lang="pl-PL" sz="2400" b="1" dirty="0"/>
+                <a:t>VCC</a:t>
+              </a:r>
+              <a:endParaRPr lang="en-US" sz="2400" b="1" dirty="0"/>
+            </a:p>
+          </p:txBody>
+        </p:sp>
+        <p:sp>
+          <p:nvSpPr>
+            <p:cNvPr id="14" name="Prostokąt: zaokrąglone rogi 13">
+              <a:extLst>
+                <a:ext uri="{FF2B5EF4-FFF2-40B4-BE49-F238E27FC236}">
+                  <a16:creationId xmlns:a16="http://schemas.microsoft.com/office/drawing/2014/main" id="{987C8523-0E24-B1A5-BAF6-2370C8F96B46}"/>
+                </a:ext>
+              </a:extLst>
+            </p:cNvPr>
+            <p:cNvSpPr/>
+            <p:nvPr/>
+          </p:nvSpPr>
+          <p:spPr>
+            <a:xfrm>
+              <a:off x="6730585" y="1588958"/>
+              <a:ext cx="944381" cy="464695"/>
+            </a:xfrm>
+            <a:prstGeom prst="roundRect">
+              <a:avLst/>
+            </a:prstGeom>
+          </p:spPr>
+          <p:style>
+            <a:lnRef idx="1">
+              <a:schemeClr val="accent3"/>
+            </a:lnRef>
+            <a:fillRef idx="3">
+              <a:schemeClr val="accent3"/>
+            </a:fillRef>
+            <a:effectRef idx="2">
+              <a:schemeClr val="accent3"/>
+            </a:effectRef>
+            <a:fontRef idx="minor">
+              <a:schemeClr val="lt1"/>
+            </a:fontRef>
+          </p:style>
+          <p:txBody>
+            <a:bodyPr rtlCol="0" anchor="ctr"/>
+            <a:lstStyle/>
+            <a:p>
+              <a:pPr algn="ctr"/>
+              <a:r>
+                <a:rPr lang="pl-PL" sz="2400" b="1" dirty="0"/>
+                <a:t>SDA</a:t>
+              </a:r>
+              <a:endParaRPr lang="en-US" sz="2400" b="1" dirty="0"/>
+            </a:p>
+          </p:txBody>
+        </p:sp>
+        <p:sp>
+          <p:nvSpPr>
+            <p:cNvPr id="15" name="Prostokąt: zaokrąglone rogi 14">
+              <a:extLst>
+                <a:ext uri="{FF2B5EF4-FFF2-40B4-BE49-F238E27FC236}">
+                  <a16:creationId xmlns:a16="http://schemas.microsoft.com/office/drawing/2014/main" id="{2492D805-8B7E-9597-7598-70053F8D103D}"/>
+                </a:ext>
+              </a:extLst>
+            </p:cNvPr>
+            <p:cNvSpPr/>
+            <p:nvPr/>
+          </p:nvSpPr>
+          <p:spPr>
+            <a:xfrm>
+              <a:off x="6730584" y="2188565"/>
+              <a:ext cx="944381" cy="464695"/>
+            </a:xfrm>
+            <a:prstGeom prst="roundRect">
+              <a:avLst/>
+            </a:prstGeom>
+          </p:spPr>
+          <p:style>
+            <a:lnRef idx="1">
+              <a:schemeClr val="accent3"/>
+            </a:lnRef>
+            <a:fillRef idx="3">
+              <a:schemeClr val="accent3"/>
+            </a:fillRef>
+            <a:effectRef idx="2">
+              <a:schemeClr val="accent3"/>
+            </a:effectRef>
+            <a:fontRef idx="minor">
+              <a:schemeClr val="lt1"/>
+            </a:fontRef>
+          </p:style>
+          <p:txBody>
+            <a:bodyPr rtlCol="0" anchor="ctr"/>
+            <a:lstStyle/>
+            <a:p>
+              <a:pPr algn="ctr"/>
+              <a:r>
+                <a:rPr lang="pl-PL" sz="2400" b="1" dirty="0"/>
+                <a:t>SCL</a:t>
+              </a:r>
+              <a:endParaRPr lang="en-US" sz="2400" b="1" dirty="0"/>
+            </a:p>
+          </p:txBody>
+        </p:sp>
+        <p:sp>
+          <p:nvSpPr>
+            <p:cNvPr id="16" name="Prostokąt: zaokrąglone rogi 15">
+              <a:extLst>
+                <a:ext uri="{FF2B5EF4-FFF2-40B4-BE49-F238E27FC236}">
+                  <a16:creationId xmlns:a16="http://schemas.microsoft.com/office/drawing/2014/main" id="{39DCB9E3-FB08-1666-B81C-A10A1E69051F}"/>
+                </a:ext>
+              </a:extLst>
+            </p:cNvPr>
+            <p:cNvSpPr/>
+            <p:nvPr/>
+          </p:nvSpPr>
+          <p:spPr>
+            <a:xfrm>
+              <a:off x="6730584" y="2765685"/>
+              <a:ext cx="944381" cy="464695"/>
+            </a:xfrm>
+            <a:prstGeom prst="roundRect">
+              <a:avLst/>
+            </a:prstGeom>
+          </p:spPr>
+          <p:style>
+            <a:lnRef idx="1">
+              <a:schemeClr val="accent3"/>
+            </a:lnRef>
+            <a:fillRef idx="3">
+              <a:schemeClr val="accent3"/>
+            </a:fillRef>
+            <a:effectRef idx="2">
+              <a:schemeClr val="accent3"/>
+            </a:effectRef>
+            <a:fontRef idx="minor">
+              <a:schemeClr val="lt1"/>
+            </a:fontRef>
+          </p:style>
+          <p:txBody>
+            <a:bodyPr rtlCol="0" anchor="ctr"/>
+            <a:lstStyle/>
+            <a:p>
+              <a:pPr algn="ctr"/>
+              <a:r>
+                <a:rPr lang="pl-PL" sz="2400" b="1" dirty="0"/>
+                <a:t>INT</a:t>
+              </a:r>
+              <a:endParaRPr lang="en-US" sz="2400" b="1" dirty="0"/>
+            </a:p>
+          </p:txBody>
+        </p:sp>
+        <p:sp>
+          <p:nvSpPr>
+            <p:cNvPr id="17" name="Prostokąt: zaokrąglone rogi 16">
+              <a:extLst>
+                <a:ext uri="{FF2B5EF4-FFF2-40B4-BE49-F238E27FC236}">
+                  <a16:creationId xmlns:a16="http://schemas.microsoft.com/office/drawing/2014/main" id="{CC501A57-CB87-B35B-05B6-CDDD6FAFFE15}"/>
+                </a:ext>
+              </a:extLst>
+            </p:cNvPr>
+            <p:cNvSpPr/>
+            <p:nvPr/>
+          </p:nvSpPr>
+          <p:spPr>
+            <a:xfrm>
+              <a:off x="6700603" y="3342805"/>
+              <a:ext cx="944381" cy="464695"/>
+            </a:xfrm>
+            <a:prstGeom prst="roundRect">
+              <a:avLst/>
+            </a:prstGeom>
+          </p:spPr>
+          <p:style>
+            <a:lnRef idx="1">
+              <a:schemeClr val="accent3"/>
+            </a:lnRef>
+            <a:fillRef idx="3">
+              <a:schemeClr val="accent3"/>
+            </a:fillRef>
+            <a:effectRef idx="2">
+              <a:schemeClr val="accent3"/>
+            </a:effectRef>
+            <a:fontRef idx="minor">
+              <a:schemeClr val="lt1"/>
+            </a:fontRef>
+          </p:style>
+          <p:txBody>
+            <a:bodyPr rtlCol="0" anchor="ctr"/>
+            <a:lstStyle/>
+            <a:p>
+              <a:pPr algn="ctr"/>
+              <a:r>
+                <a:rPr lang="pl-PL" sz="2400" b="1" dirty="0"/>
+                <a:t>P7</a:t>
+              </a:r>
+              <a:endParaRPr lang="en-US" sz="2400" b="1" dirty="0"/>
+            </a:p>
+          </p:txBody>
+        </p:sp>
+        <p:sp>
+          <p:nvSpPr>
+            <p:cNvPr id="18" name="Prostokąt: zaokrąglone rogi 17">
+              <a:extLst>
+                <a:ext uri="{FF2B5EF4-FFF2-40B4-BE49-F238E27FC236}">
+                  <a16:creationId xmlns:a16="http://schemas.microsoft.com/office/drawing/2014/main" id="{0A483A7D-BFDE-D860-8180-6E0C8CB87306}"/>
+                </a:ext>
+              </a:extLst>
+            </p:cNvPr>
+            <p:cNvSpPr/>
+            <p:nvPr/>
+          </p:nvSpPr>
+          <p:spPr>
+            <a:xfrm>
+              <a:off x="6700602" y="3919925"/>
+              <a:ext cx="944381" cy="464695"/>
+            </a:xfrm>
+            <a:prstGeom prst="roundRect">
+              <a:avLst/>
+            </a:prstGeom>
+          </p:spPr>
+          <p:style>
+            <a:lnRef idx="1">
+              <a:schemeClr val="accent3"/>
+            </a:lnRef>
+            <a:fillRef idx="3">
+              <a:schemeClr val="accent3"/>
+            </a:fillRef>
+            <a:effectRef idx="2">
+              <a:schemeClr val="accent3"/>
+            </a:effectRef>
+            <a:fontRef idx="minor">
+              <a:schemeClr val="lt1"/>
+            </a:fontRef>
+          </p:style>
+          <p:txBody>
+            <a:bodyPr rtlCol="0" anchor="ctr"/>
+            <a:lstStyle/>
+            <a:p>
+              <a:pPr algn="ctr"/>
+              <a:r>
+                <a:rPr lang="pl-PL" sz="2400" b="1" dirty="0"/>
+                <a:t>P6</a:t>
+              </a:r>
+              <a:endParaRPr lang="en-US" sz="2400" b="1" dirty="0"/>
+            </a:p>
+          </p:txBody>
+        </p:sp>
+        <p:sp>
+          <p:nvSpPr>
+            <p:cNvPr id="19" name="Prostokąt: zaokrąglone rogi 18">
+              <a:extLst>
+                <a:ext uri="{FF2B5EF4-FFF2-40B4-BE49-F238E27FC236}">
+                  <a16:creationId xmlns:a16="http://schemas.microsoft.com/office/drawing/2014/main" id="{BA797679-8E01-81A7-3711-6D7C32D31F9D}"/>
+                </a:ext>
+              </a:extLst>
+            </p:cNvPr>
+            <p:cNvSpPr/>
+            <p:nvPr/>
+          </p:nvSpPr>
+          <p:spPr>
+            <a:xfrm>
+              <a:off x="6700601" y="4512040"/>
+              <a:ext cx="944381" cy="464695"/>
+            </a:xfrm>
+            <a:prstGeom prst="roundRect">
+              <a:avLst/>
+            </a:prstGeom>
+          </p:spPr>
+          <p:style>
+            <a:lnRef idx="1">
+              <a:schemeClr val="accent3"/>
+            </a:lnRef>
+            <a:fillRef idx="3">
+              <a:schemeClr val="accent3"/>
+            </a:fillRef>
+            <a:effectRef idx="2">
+              <a:schemeClr val="accent3"/>
+            </a:effectRef>
+            <a:fontRef idx="minor">
+              <a:schemeClr val="lt1"/>
+            </a:fontRef>
+          </p:style>
+          <p:txBody>
+            <a:bodyPr rtlCol="0" anchor="ctr"/>
+            <a:lstStyle/>
+            <a:p>
+              <a:pPr algn="ctr"/>
+              <a:r>
+                <a:rPr lang="pl-PL" sz="2400" b="1" dirty="0"/>
+                <a:t>P5</a:t>
+              </a:r>
+              <a:endParaRPr lang="en-US" sz="2400" b="1" dirty="0"/>
+            </a:p>
+          </p:txBody>
+        </p:sp>
+        <p:sp>
+          <p:nvSpPr>
+            <p:cNvPr id="20" name="Prostokąt: zaokrąglone rogi 19">
+              <a:extLst>
+                <a:ext uri="{FF2B5EF4-FFF2-40B4-BE49-F238E27FC236}">
+                  <a16:creationId xmlns:a16="http://schemas.microsoft.com/office/drawing/2014/main" id="{60F0EB27-02D2-707C-D10C-1C7BA230FA52}"/>
+                </a:ext>
+              </a:extLst>
+            </p:cNvPr>
+            <p:cNvSpPr/>
+            <p:nvPr/>
+          </p:nvSpPr>
+          <p:spPr>
+            <a:xfrm>
+              <a:off x="6700600" y="5096652"/>
+              <a:ext cx="944381" cy="464695"/>
+            </a:xfrm>
+            <a:prstGeom prst="roundRect">
+              <a:avLst/>
+            </a:prstGeom>
+          </p:spPr>
+          <p:style>
+            <a:lnRef idx="1">
+              <a:schemeClr val="accent3"/>
+            </a:lnRef>
+            <a:fillRef idx="3">
+              <a:schemeClr val="accent3"/>
+            </a:fillRef>
+            <a:effectRef idx="2">
+              <a:schemeClr val="accent3"/>
+            </a:effectRef>
+            <a:fontRef idx="minor">
+              <a:schemeClr val="lt1"/>
+            </a:fontRef>
+          </p:style>
+          <p:txBody>
+            <a:bodyPr rtlCol="0" anchor="ctr"/>
+            <a:lstStyle/>
+            <a:p>
+              <a:pPr algn="ctr"/>
+              <a:r>
+                <a:rPr lang="pl-PL" sz="2400" b="1" dirty="0"/>
+                <a:t>P4</a:t>
+              </a:r>
+              <a:endParaRPr lang="en-US" sz="2400" b="1" dirty="0"/>
+            </a:p>
+          </p:txBody>
+        </p:sp>
+        <p:cxnSp>
+          <p:nvCxnSpPr>
+            <p:cNvPr id="22" name="Łącznik prosty 21">
+              <a:extLst>
+                <a:ext uri="{FF2B5EF4-FFF2-40B4-BE49-F238E27FC236}">
+                  <a16:creationId xmlns:a16="http://schemas.microsoft.com/office/drawing/2014/main" id="{00451C36-EBF8-B0AF-47BB-169A06491565}"/>
+                </a:ext>
+              </a:extLst>
+            </p:cNvPr>
+            <p:cNvCxnSpPr>
+              <a:cxnSpLocks/>
+            </p:cNvCxnSpPr>
+            <p:nvPr/>
+          </p:nvCxnSpPr>
+          <p:spPr>
+            <a:xfrm>
+              <a:off x="7000407" y="2851150"/>
+              <a:ext cx="435443" cy="0"/>
+            </a:xfrm>
+            <a:prstGeom prst="line">
+              <a:avLst/>
+            </a:prstGeom>
+            <a:ln w="34925">
+              <a:solidFill>
+                <a:schemeClr val="bg1"/>
+              </a:solidFill>
+            </a:ln>
+          </p:spPr>
+          <p:style>
+            <a:lnRef idx="1">
+              <a:schemeClr val="accent2"/>
+            </a:lnRef>
+            <a:fillRef idx="0">
+              <a:schemeClr val="accent2"/>
+            </a:fillRef>
+            <a:effectRef idx="0">
+              <a:schemeClr val="accent2"/>
+            </a:effectRef>
+            <a:fontRef idx="minor">
+              <a:schemeClr val="tx1"/>
+            </a:fontRef>
+          </p:style>
+        </p:cxnSp>
+        <p:sp>
+          <p:nvSpPr>
+            <p:cNvPr id="29" name="pole tekstowe 28">
+              <a:extLst>
+                <a:ext uri="{FF2B5EF4-FFF2-40B4-BE49-F238E27FC236}">
+                  <a16:creationId xmlns:a16="http://schemas.microsoft.com/office/drawing/2014/main" id="{C18A8B11-BDAF-4282-29B8-4A1B356D179E}"/>
+                </a:ext>
+              </a:extLst>
+            </p:cNvPr>
+            <p:cNvSpPr txBox="1"/>
+            <p:nvPr/>
+          </p:nvSpPr>
+          <p:spPr>
+            <a:xfrm>
+              <a:off x="4897153" y="1037032"/>
+              <a:ext cx="444706" cy="369332"/>
+            </a:xfrm>
+            <a:prstGeom prst="rect">
+              <a:avLst/>
+            </a:prstGeom>
+            <a:noFill/>
+          </p:spPr>
+          <p:txBody>
+            <a:bodyPr wrap="square" rtlCol="0">
+              <a:spAutoFit/>
+            </a:bodyPr>
+            <a:lstStyle/>
+            <a:p>
+              <a:r>
+                <a:rPr lang="pl-PL" dirty="0"/>
+                <a:t>1</a:t>
+              </a:r>
+              <a:endParaRPr lang="en-US" dirty="0"/>
+            </a:p>
+          </p:txBody>
+        </p:sp>
+        <p:sp>
+          <p:nvSpPr>
+            <p:cNvPr id="30" name="pole tekstowe 29">
+              <a:extLst>
+                <a:ext uri="{FF2B5EF4-FFF2-40B4-BE49-F238E27FC236}">
+                  <a16:creationId xmlns:a16="http://schemas.microsoft.com/office/drawing/2014/main" id="{85BBE305-D4C2-30C3-74BC-EB6E29511D7A}"/>
+                </a:ext>
+              </a:extLst>
+            </p:cNvPr>
+            <p:cNvSpPr txBox="1"/>
+            <p:nvPr/>
+          </p:nvSpPr>
+          <p:spPr>
+            <a:xfrm>
+              <a:off x="4897755" y="1609706"/>
+              <a:ext cx="444706" cy="369332"/>
+            </a:xfrm>
+            <a:prstGeom prst="rect">
+              <a:avLst/>
+            </a:prstGeom>
+            <a:noFill/>
+          </p:spPr>
+          <p:txBody>
+            <a:bodyPr wrap="square" rtlCol="0">
+              <a:spAutoFit/>
+            </a:bodyPr>
+            <a:lstStyle/>
+            <a:p>
+              <a:r>
+                <a:rPr lang="pl-PL" dirty="0"/>
+                <a:t>2</a:t>
+              </a:r>
+              <a:endParaRPr lang="en-US" dirty="0"/>
+            </a:p>
+          </p:txBody>
+        </p:sp>
+        <p:sp>
+          <p:nvSpPr>
+            <p:cNvPr id="31" name="pole tekstowe 30">
+              <a:extLst>
+                <a:ext uri="{FF2B5EF4-FFF2-40B4-BE49-F238E27FC236}">
+                  <a16:creationId xmlns:a16="http://schemas.microsoft.com/office/drawing/2014/main" id="{893087FE-72BE-3591-3000-C94A35683960}"/>
+                </a:ext>
+              </a:extLst>
+            </p:cNvPr>
+            <p:cNvSpPr txBox="1"/>
+            <p:nvPr/>
+          </p:nvSpPr>
+          <p:spPr>
+            <a:xfrm>
+              <a:off x="4897152" y="2236246"/>
+              <a:ext cx="444706" cy="369332"/>
+            </a:xfrm>
+            <a:prstGeom prst="rect">
+              <a:avLst/>
+            </a:prstGeom>
+            <a:noFill/>
+          </p:spPr>
+          <p:txBody>
+            <a:bodyPr wrap="square" rtlCol="0">
+              <a:spAutoFit/>
+            </a:bodyPr>
+            <a:lstStyle/>
+            <a:p>
+              <a:r>
+                <a:rPr lang="pl-PL" dirty="0"/>
+                <a:t>3</a:t>
+              </a:r>
+              <a:endParaRPr lang="en-US" dirty="0"/>
+            </a:p>
+          </p:txBody>
+        </p:sp>
+        <p:sp>
+          <p:nvSpPr>
+            <p:cNvPr id="32" name="pole tekstowe 31">
+              <a:extLst>
+                <a:ext uri="{FF2B5EF4-FFF2-40B4-BE49-F238E27FC236}">
+                  <a16:creationId xmlns:a16="http://schemas.microsoft.com/office/drawing/2014/main" id="{E1691073-299D-3AD3-33A2-92C379E3783C}"/>
+                </a:ext>
+              </a:extLst>
+            </p:cNvPr>
+            <p:cNvSpPr txBox="1"/>
+            <p:nvPr/>
+          </p:nvSpPr>
+          <p:spPr>
+            <a:xfrm>
+              <a:off x="4906676" y="2824102"/>
+              <a:ext cx="444706" cy="369332"/>
+            </a:xfrm>
+            <a:prstGeom prst="rect">
+              <a:avLst/>
+            </a:prstGeom>
+            <a:noFill/>
+          </p:spPr>
+          <p:txBody>
+            <a:bodyPr wrap="square" rtlCol="0">
+              <a:spAutoFit/>
+            </a:bodyPr>
+            <a:lstStyle/>
+            <a:p>
+              <a:r>
+                <a:rPr lang="pl-PL" dirty="0"/>
+                <a:t>4</a:t>
+              </a:r>
+              <a:endParaRPr lang="en-US" dirty="0"/>
+            </a:p>
+          </p:txBody>
+        </p:sp>
+        <p:sp>
+          <p:nvSpPr>
+            <p:cNvPr id="33" name="pole tekstowe 32">
+              <a:extLst>
+                <a:ext uri="{FF2B5EF4-FFF2-40B4-BE49-F238E27FC236}">
+                  <a16:creationId xmlns:a16="http://schemas.microsoft.com/office/drawing/2014/main" id="{40E6BF14-0096-03A9-1BD6-FCD4D9D9150E}"/>
+                </a:ext>
+              </a:extLst>
+            </p:cNvPr>
+            <p:cNvSpPr txBox="1"/>
+            <p:nvPr/>
+          </p:nvSpPr>
+          <p:spPr>
+            <a:xfrm>
+              <a:off x="4906676" y="3390486"/>
+              <a:ext cx="444706" cy="369332"/>
+            </a:xfrm>
+            <a:prstGeom prst="rect">
+              <a:avLst/>
+            </a:prstGeom>
+            <a:noFill/>
+          </p:spPr>
+          <p:txBody>
+            <a:bodyPr wrap="square" rtlCol="0">
+              <a:spAutoFit/>
+            </a:bodyPr>
+            <a:lstStyle/>
+            <a:p>
+              <a:r>
+                <a:rPr lang="pl-PL" dirty="0"/>
+                <a:t>5</a:t>
+              </a:r>
+              <a:endParaRPr lang="en-US" dirty="0"/>
+            </a:p>
+          </p:txBody>
+        </p:sp>
+        <p:sp>
+          <p:nvSpPr>
+            <p:cNvPr id="34" name="pole tekstowe 33">
+              <a:extLst>
+                <a:ext uri="{FF2B5EF4-FFF2-40B4-BE49-F238E27FC236}">
+                  <a16:creationId xmlns:a16="http://schemas.microsoft.com/office/drawing/2014/main" id="{0C8F6EA5-3291-ECAA-82D7-5CF38472EEF5}"/>
+                </a:ext>
+              </a:extLst>
+            </p:cNvPr>
+            <p:cNvSpPr txBox="1"/>
+            <p:nvPr/>
+          </p:nvSpPr>
+          <p:spPr>
+            <a:xfrm>
+              <a:off x="4897152" y="3973228"/>
+              <a:ext cx="444706" cy="369332"/>
+            </a:xfrm>
+            <a:prstGeom prst="rect">
+              <a:avLst/>
+            </a:prstGeom>
+            <a:noFill/>
+          </p:spPr>
+          <p:txBody>
+            <a:bodyPr wrap="square" rtlCol="0">
+              <a:spAutoFit/>
+            </a:bodyPr>
+            <a:lstStyle/>
+            <a:p>
+              <a:r>
+                <a:rPr lang="pl-PL" dirty="0"/>
+                <a:t>6</a:t>
+              </a:r>
+              <a:endParaRPr lang="en-US" dirty="0"/>
+            </a:p>
+          </p:txBody>
+        </p:sp>
+        <p:sp>
+          <p:nvSpPr>
+            <p:cNvPr id="35" name="pole tekstowe 34">
+              <a:extLst>
+                <a:ext uri="{FF2B5EF4-FFF2-40B4-BE49-F238E27FC236}">
+                  <a16:creationId xmlns:a16="http://schemas.microsoft.com/office/drawing/2014/main" id="{E013C373-F097-00E4-258C-1356DD7D33E2}"/>
+                </a:ext>
+              </a:extLst>
+            </p:cNvPr>
+            <p:cNvSpPr txBox="1"/>
+            <p:nvPr/>
+          </p:nvSpPr>
+          <p:spPr>
+            <a:xfrm>
+              <a:off x="4897152" y="4555970"/>
+              <a:ext cx="444706" cy="369332"/>
+            </a:xfrm>
+            <a:prstGeom prst="rect">
+              <a:avLst/>
+            </a:prstGeom>
+            <a:noFill/>
+          </p:spPr>
+          <p:txBody>
+            <a:bodyPr wrap="square" rtlCol="0">
+              <a:spAutoFit/>
+            </a:bodyPr>
+            <a:lstStyle/>
+            <a:p>
+              <a:r>
+                <a:rPr lang="pl-PL" dirty="0"/>
+                <a:t>7</a:t>
+              </a:r>
+              <a:endParaRPr lang="en-US" dirty="0"/>
+            </a:p>
+          </p:txBody>
+        </p:sp>
+        <p:sp>
+          <p:nvSpPr>
+            <p:cNvPr id="36" name="pole tekstowe 35">
+              <a:extLst>
+                <a:ext uri="{FF2B5EF4-FFF2-40B4-BE49-F238E27FC236}">
+                  <a16:creationId xmlns:a16="http://schemas.microsoft.com/office/drawing/2014/main" id="{8820E7B4-A3CA-8C59-B48A-E0F16B3B66C8}"/>
+                </a:ext>
+              </a:extLst>
+            </p:cNvPr>
+            <p:cNvSpPr txBox="1"/>
+            <p:nvPr/>
+          </p:nvSpPr>
+          <p:spPr>
+            <a:xfrm>
+              <a:off x="4897152" y="5141625"/>
+              <a:ext cx="444706" cy="369332"/>
+            </a:xfrm>
+            <a:prstGeom prst="rect">
+              <a:avLst/>
+            </a:prstGeom>
+            <a:noFill/>
+          </p:spPr>
+          <p:txBody>
+            <a:bodyPr wrap="square" rtlCol="0">
+              <a:spAutoFit/>
+            </a:bodyPr>
+            <a:lstStyle/>
+            <a:p>
+              <a:r>
+                <a:rPr lang="pl-PL" dirty="0"/>
+                <a:t>8</a:t>
+              </a:r>
+              <a:endParaRPr lang="en-US" dirty="0"/>
+            </a:p>
+          </p:txBody>
+        </p:sp>
+        <p:sp>
+          <p:nvSpPr>
+            <p:cNvPr id="37" name="pole tekstowe 36">
+              <a:extLst>
+                <a:ext uri="{FF2B5EF4-FFF2-40B4-BE49-F238E27FC236}">
+                  <a16:creationId xmlns:a16="http://schemas.microsoft.com/office/drawing/2014/main" id="{E4713049-4D87-110E-FD8B-D7D1D26E37D6}"/>
+                </a:ext>
+              </a:extLst>
+            </p:cNvPr>
+            <p:cNvSpPr txBox="1"/>
+            <p:nvPr/>
+          </p:nvSpPr>
+          <p:spPr>
+            <a:xfrm>
+              <a:off x="6405438" y="5141625"/>
+              <a:ext cx="444706" cy="369332"/>
+            </a:xfrm>
+            <a:prstGeom prst="rect">
+              <a:avLst/>
+            </a:prstGeom>
+            <a:noFill/>
+          </p:spPr>
+          <p:txBody>
+            <a:bodyPr wrap="square" rtlCol="0">
+              <a:spAutoFit/>
+            </a:bodyPr>
+            <a:lstStyle/>
+            <a:p>
+              <a:r>
+                <a:rPr lang="pl-PL" dirty="0"/>
+                <a:t>9</a:t>
+              </a:r>
+              <a:endParaRPr lang="en-US" dirty="0"/>
+            </a:p>
+          </p:txBody>
+        </p:sp>
+        <p:sp>
+          <p:nvSpPr>
+            <p:cNvPr id="38" name="pole tekstowe 37">
+              <a:extLst>
+                <a:ext uri="{FF2B5EF4-FFF2-40B4-BE49-F238E27FC236}">
+                  <a16:creationId xmlns:a16="http://schemas.microsoft.com/office/drawing/2014/main" id="{31E01E12-316A-BEC3-C55B-41C5BE6D18A3}"/>
+                </a:ext>
+              </a:extLst>
+            </p:cNvPr>
+            <p:cNvSpPr txBox="1"/>
+            <p:nvPr/>
+          </p:nvSpPr>
+          <p:spPr>
+            <a:xfrm>
+              <a:off x="6313944" y="4563476"/>
+              <a:ext cx="619601" cy="369332"/>
+            </a:xfrm>
+            <a:prstGeom prst="rect">
+              <a:avLst/>
+            </a:prstGeom>
+            <a:noFill/>
+          </p:spPr>
+          <p:txBody>
+            <a:bodyPr wrap="square" rtlCol="0">
+              <a:spAutoFit/>
+            </a:bodyPr>
+            <a:lstStyle/>
+            <a:p>
+              <a:r>
+                <a:rPr lang="pl-PL" dirty="0"/>
+                <a:t>10</a:t>
+              </a:r>
+              <a:endParaRPr lang="en-US" dirty="0"/>
+            </a:p>
+          </p:txBody>
+        </p:sp>
+        <p:sp>
+          <p:nvSpPr>
+            <p:cNvPr id="41" name="pole tekstowe 40">
+              <a:extLst>
+                <a:ext uri="{FF2B5EF4-FFF2-40B4-BE49-F238E27FC236}">
+                  <a16:creationId xmlns:a16="http://schemas.microsoft.com/office/drawing/2014/main" id="{ACE1052A-3BB0-BB99-6175-4B8127281C99}"/>
+                </a:ext>
+              </a:extLst>
+            </p:cNvPr>
+            <p:cNvSpPr txBox="1"/>
+            <p:nvPr/>
+          </p:nvSpPr>
+          <p:spPr>
+            <a:xfrm>
+              <a:off x="6313944" y="3963354"/>
+              <a:ext cx="619601" cy="369332"/>
+            </a:xfrm>
+            <a:prstGeom prst="rect">
+              <a:avLst/>
+            </a:prstGeom>
+            <a:noFill/>
+          </p:spPr>
+          <p:txBody>
+            <a:bodyPr wrap="square" rtlCol="0">
+              <a:spAutoFit/>
+            </a:bodyPr>
+            <a:lstStyle/>
+            <a:p>
+              <a:r>
+                <a:rPr lang="pl-PL" dirty="0"/>
+                <a:t>11</a:t>
+              </a:r>
+              <a:endParaRPr lang="en-US" dirty="0"/>
+            </a:p>
+          </p:txBody>
+        </p:sp>
+        <p:sp>
+          <p:nvSpPr>
+            <p:cNvPr id="42" name="pole tekstowe 41">
+              <a:extLst>
+                <a:ext uri="{FF2B5EF4-FFF2-40B4-BE49-F238E27FC236}">
+                  <a16:creationId xmlns:a16="http://schemas.microsoft.com/office/drawing/2014/main" id="{A49078A7-46B6-25BD-075B-1956DC7185BC}"/>
+                </a:ext>
+              </a:extLst>
+            </p:cNvPr>
+            <p:cNvSpPr txBox="1"/>
+            <p:nvPr/>
+          </p:nvSpPr>
+          <p:spPr>
+            <a:xfrm>
+              <a:off x="6317989" y="3394739"/>
+              <a:ext cx="619601" cy="369332"/>
+            </a:xfrm>
+            <a:prstGeom prst="rect">
+              <a:avLst/>
+            </a:prstGeom>
+            <a:noFill/>
+          </p:spPr>
+          <p:txBody>
+            <a:bodyPr wrap="square" rtlCol="0">
+              <a:spAutoFit/>
+            </a:bodyPr>
+            <a:lstStyle/>
+            <a:p>
+              <a:r>
+                <a:rPr lang="pl-PL" dirty="0"/>
+                <a:t>12</a:t>
+              </a:r>
+              <a:endParaRPr lang="en-US" dirty="0"/>
+            </a:p>
+          </p:txBody>
+        </p:sp>
+        <p:sp>
+          <p:nvSpPr>
+            <p:cNvPr id="43" name="pole tekstowe 42">
+              <a:extLst>
+                <a:ext uri="{FF2B5EF4-FFF2-40B4-BE49-F238E27FC236}">
+                  <a16:creationId xmlns:a16="http://schemas.microsoft.com/office/drawing/2014/main" id="{8E18A920-EECA-07E7-F954-0AA1E1F3D85A}"/>
+                </a:ext>
+              </a:extLst>
+            </p:cNvPr>
+            <p:cNvSpPr txBox="1"/>
+            <p:nvPr/>
+          </p:nvSpPr>
+          <p:spPr>
+            <a:xfrm>
+              <a:off x="6317990" y="2813520"/>
+              <a:ext cx="619601" cy="369332"/>
+            </a:xfrm>
+            <a:prstGeom prst="rect">
+              <a:avLst/>
+            </a:prstGeom>
+            <a:noFill/>
+          </p:spPr>
+          <p:txBody>
+            <a:bodyPr wrap="square" rtlCol="0">
+              <a:spAutoFit/>
+            </a:bodyPr>
+            <a:lstStyle/>
+            <a:p>
+              <a:r>
+                <a:rPr lang="pl-PL" dirty="0"/>
+                <a:t>13</a:t>
+              </a:r>
+              <a:endParaRPr lang="en-US" dirty="0"/>
+            </a:p>
+          </p:txBody>
+        </p:sp>
+        <p:sp>
+          <p:nvSpPr>
+            <p:cNvPr id="45" name="pole tekstowe 44">
+              <a:extLst>
+                <a:ext uri="{FF2B5EF4-FFF2-40B4-BE49-F238E27FC236}">
+                  <a16:creationId xmlns:a16="http://schemas.microsoft.com/office/drawing/2014/main" id="{B6C5B00F-6E18-B232-8169-7C6BC00FDCCB}"/>
+                </a:ext>
+              </a:extLst>
+            </p:cNvPr>
+            <p:cNvSpPr txBox="1"/>
+            <p:nvPr/>
+          </p:nvSpPr>
+          <p:spPr>
+            <a:xfrm>
+              <a:off x="6313943" y="2241368"/>
+              <a:ext cx="619601" cy="369332"/>
+            </a:xfrm>
+            <a:prstGeom prst="rect">
+              <a:avLst/>
+            </a:prstGeom>
+            <a:noFill/>
+          </p:spPr>
+          <p:txBody>
+            <a:bodyPr wrap="square" rtlCol="0">
+              <a:spAutoFit/>
+            </a:bodyPr>
+            <a:lstStyle/>
+            <a:p>
+              <a:r>
+                <a:rPr lang="pl-PL" dirty="0"/>
+                <a:t>14</a:t>
+              </a:r>
+              <a:endParaRPr lang="en-US" dirty="0"/>
+            </a:p>
+          </p:txBody>
+        </p:sp>
+        <p:sp>
+          <p:nvSpPr>
+            <p:cNvPr id="46" name="pole tekstowe 45">
+              <a:extLst>
+                <a:ext uri="{FF2B5EF4-FFF2-40B4-BE49-F238E27FC236}">
+                  <a16:creationId xmlns:a16="http://schemas.microsoft.com/office/drawing/2014/main" id="{D6563B01-0A02-7555-25B5-B6B03EFF68AE}"/>
+                </a:ext>
+              </a:extLst>
+            </p:cNvPr>
+            <p:cNvSpPr txBox="1"/>
+            <p:nvPr/>
+          </p:nvSpPr>
+          <p:spPr>
+            <a:xfrm>
+              <a:off x="6313942" y="1631237"/>
+              <a:ext cx="619601" cy="369332"/>
+            </a:xfrm>
+            <a:prstGeom prst="rect">
+              <a:avLst/>
+            </a:prstGeom>
+            <a:noFill/>
+          </p:spPr>
+          <p:txBody>
+            <a:bodyPr wrap="square" rtlCol="0">
+              <a:spAutoFit/>
+            </a:bodyPr>
+            <a:lstStyle/>
+            <a:p>
+              <a:r>
+                <a:rPr lang="pl-PL" dirty="0"/>
+                <a:t>15</a:t>
+              </a:r>
+              <a:endParaRPr lang="en-US" dirty="0"/>
+            </a:p>
+          </p:txBody>
+        </p:sp>
+        <p:sp>
+          <p:nvSpPr>
+            <p:cNvPr id="48" name="pole tekstowe 47">
+              <a:extLst>
+                <a:ext uri="{FF2B5EF4-FFF2-40B4-BE49-F238E27FC236}">
+                  <a16:creationId xmlns:a16="http://schemas.microsoft.com/office/drawing/2014/main" id="{054D96E1-09DC-C9A6-91C8-492EBF434DF2}"/>
+                </a:ext>
+              </a:extLst>
+            </p:cNvPr>
+            <p:cNvSpPr txBox="1"/>
+            <p:nvPr/>
+          </p:nvSpPr>
+          <p:spPr>
+            <a:xfrm>
+              <a:off x="6313941" y="1044908"/>
+              <a:ext cx="619601" cy="369332"/>
+            </a:xfrm>
+            <a:prstGeom prst="rect">
+              <a:avLst/>
+            </a:prstGeom>
+            <a:noFill/>
+          </p:spPr>
+          <p:txBody>
+            <a:bodyPr wrap="square" rtlCol="0">
+              <a:spAutoFit/>
+            </a:bodyPr>
+            <a:lstStyle/>
+            <a:p>
+              <a:r>
+                <a:rPr lang="pl-PL" dirty="0"/>
+                <a:t>16</a:t>
+              </a:r>
+              <a:endParaRPr lang="en-US" dirty="0"/>
+            </a:p>
+          </p:txBody>
+        </p:sp>
+        <p:sp>
+          <p:nvSpPr>
+            <p:cNvPr id="50" name="pole tekstowe 49">
+              <a:extLst>
+                <a:ext uri="{FF2B5EF4-FFF2-40B4-BE49-F238E27FC236}">
+                  <a16:creationId xmlns:a16="http://schemas.microsoft.com/office/drawing/2014/main" id="{0A78C494-8EC3-939D-0F82-902A5A8C9C95}"/>
+                </a:ext>
+              </a:extLst>
+            </p:cNvPr>
+            <p:cNvSpPr txBox="1"/>
+            <p:nvPr/>
+          </p:nvSpPr>
+          <p:spPr>
+            <a:xfrm rot="16200000">
+              <a:off x="4757459" y="3036543"/>
+              <a:ext cx="2087468" cy="707886"/>
+            </a:xfrm>
+            <a:prstGeom prst="rect">
+              <a:avLst/>
+            </a:prstGeom>
+            <a:noFill/>
+          </p:spPr>
+          <p:txBody>
+            <a:bodyPr wrap="square" rtlCol="0">
+              <a:spAutoFit/>
+            </a:bodyPr>
+            <a:lstStyle/>
+            <a:p>
+              <a:r>
+                <a:rPr lang="pl-PL" sz="4000" b="1" dirty="0"/>
+                <a:t>PCF8574</a:t>
+              </a:r>
+              <a:endParaRPr lang="en-US" sz="2400" b="1" dirty="0"/>
+            </a:p>
+          </p:txBody>
+        </p:sp>
+      </p:grpSp>
+    </p:spTree>
+    <p:extLst>
+      <p:ext uri="{BB962C8B-B14F-4D97-AF65-F5344CB8AC3E}">
+        <p14:creationId xmlns:p14="http://schemas.microsoft.com/office/powerpoint/2010/main" val="756849000"/>
+      </p:ext>
+    </p:extLst>
+  </p:cSld>
+  <p:clrMapOvr>
+    <a:masterClrMapping/>
+  </p:clrMapOvr>
+</p:sld>
+</file>
+
+<file path=ppt/slides/slide3.xml><?xml version="1.0" encoding="utf-8"?>
+<p:sld xmlns:a="http://schemas.openxmlformats.org/drawingml/2006/main" xmlns:r="http://schemas.openxmlformats.org/officeDocument/2006/relationships" xmlns:p="http://schemas.openxmlformats.org/presentationml/2006/main">
+  <p:cSld>
+    <p:spTree>
+      <p:nvGrpSpPr>
+        <p:cNvPr id="1" name="">
+          <a:extLst>
+            <a:ext uri="{FF2B5EF4-FFF2-40B4-BE49-F238E27FC236}">
+              <a16:creationId xmlns:a16="http://schemas.microsoft.com/office/drawing/2014/main" id="{FB00AEE5-B1A9-02C9-255A-267507978567}"/>
+            </a:ext>
+          </a:extLst>
+        </p:cNvPr>
+        <p:cNvGrpSpPr/>
+        <p:nvPr/>
+      </p:nvGrpSpPr>
+      <p:grpSpPr>
+        <a:xfrm>
+          <a:off x="0" y="0"/>
+          <a:ext cx="0" cy="0"/>
+          <a:chOff x="0" y="0"/>
+          <a:chExt cx="0" cy="0"/>
+        </a:xfrm>
+      </p:grpSpPr>
+      <p:grpSp>
+        <p:nvGrpSpPr>
+          <p:cNvPr id="2" name="Grupa 1">
+            <a:extLst>
+              <a:ext uri="{FF2B5EF4-FFF2-40B4-BE49-F238E27FC236}">
+                <a16:creationId xmlns:a16="http://schemas.microsoft.com/office/drawing/2014/main" id="{B25C7797-CE15-1D5E-2560-A7C6B77FB528}"/>
+              </a:ext>
+            </a:extLst>
+          </p:cNvPr>
+          <p:cNvGrpSpPr/>
+          <p:nvPr/>
+        </p:nvGrpSpPr>
+        <p:grpSpPr>
+          <a:xfrm>
+            <a:off x="1204687" y="1233713"/>
+            <a:ext cx="9158514" cy="3567169"/>
+            <a:chOff x="1204687" y="1233713"/>
+            <a:chExt cx="9158514" cy="3567169"/>
+          </a:xfrm>
+        </p:grpSpPr>
+        <p:grpSp>
+          <p:nvGrpSpPr>
+            <p:cNvPr id="123" name="Grupa 122">
+              <a:extLst>
+                <a:ext uri="{FF2B5EF4-FFF2-40B4-BE49-F238E27FC236}">
+                  <a16:creationId xmlns:a16="http://schemas.microsoft.com/office/drawing/2014/main" id="{4D92771C-C243-ADDA-EBC2-72B5A5FBEDAB}"/>
+                </a:ext>
+              </a:extLst>
+            </p:cNvPr>
+            <p:cNvGrpSpPr/>
+            <p:nvPr/>
+          </p:nvGrpSpPr>
+          <p:grpSpPr>
+            <a:xfrm>
+              <a:off x="1204687" y="1233713"/>
+              <a:ext cx="9158514" cy="3567169"/>
+              <a:chOff x="1204687" y="1233713"/>
+              <a:chExt cx="9158514" cy="3567169"/>
+            </a:xfrm>
+          </p:grpSpPr>
+          <p:sp>
+            <p:nvSpPr>
+              <p:cNvPr id="26" name="Prostokąt 25">
+                <a:extLst>
+                  <a:ext uri="{FF2B5EF4-FFF2-40B4-BE49-F238E27FC236}">
+                    <a16:creationId xmlns:a16="http://schemas.microsoft.com/office/drawing/2014/main" id="{49D6442B-1D48-B435-50FA-9013F2447E07}"/>
+                  </a:ext>
+                </a:extLst>
+              </p:cNvPr>
+              <p:cNvSpPr/>
+              <p:nvPr/>
+            </p:nvSpPr>
+            <p:spPr>
+              <a:xfrm rot="16200000">
+                <a:off x="4584730" y="-1462614"/>
+                <a:ext cx="2398427" cy="9158514"/>
+              </a:xfrm>
+              <a:prstGeom prst="rect">
+                <a:avLst/>
+              </a:prstGeom>
+              <a:solidFill>
+                <a:schemeClr val="accent4">
+                  <a:lumMod val="40000"/>
+                  <a:lumOff val="60000"/>
+                </a:schemeClr>
+              </a:solidFill>
+            </p:spPr>
+            <p:style>
+              <a:lnRef idx="2">
+                <a:schemeClr val="accent1">
+                  <a:shade val="15000"/>
+                </a:schemeClr>
+              </a:lnRef>
+              <a:fillRef idx="1">
+                <a:schemeClr val="accent1"/>
+              </a:fillRef>
+              <a:effectRef idx="0">
+                <a:schemeClr val="accent1"/>
+              </a:effectRef>
+              <a:fontRef idx="minor">
+                <a:schemeClr val="lt1"/>
+              </a:fontRef>
+            </p:style>
+            <p:txBody>
+              <a:bodyPr rtlCol="0" anchor="ctr"/>
+              <a:lstStyle/>
+              <a:p>
+                <a:pPr algn="ctr"/>
+                <a:endParaRPr lang="en-US"/>
+              </a:p>
+            </p:txBody>
+          </p:sp>
+          <p:grpSp>
+            <p:nvGrpSpPr>
+              <p:cNvPr id="59" name="Grupa 58">
+                <a:extLst>
+                  <a:ext uri="{FF2B5EF4-FFF2-40B4-BE49-F238E27FC236}">
+                    <a16:creationId xmlns:a16="http://schemas.microsoft.com/office/drawing/2014/main" id="{D686D7F3-FC9B-ACBA-23FA-969A5B486E58}"/>
+                  </a:ext>
+                </a:extLst>
+              </p:cNvPr>
+              <p:cNvGrpSpPr/>
+              <p:nvPr/>
+            </p:nvGrpSpPr>
+            <p:grpSpPr>
+              <a:xfrm>
+                <a:off x="1395989" y="3843658"/>
+                <a:ext cx="8757111" cy="957224"/>
+                <a:chOff x="1395989" y="3843658"/>
+                <a:chExt cx="8757111" cy="957224"/>
+              </a:xfrm>
+            </p:grpSpPr>
+            <p:sp>
+              <p:nvSpPr>
+                <p:cNvPr id="27" name="Prostokąt: zaokrąglone rogi 26">
+                  <a:extLst>
+                    <a:ext uri="{FF2B5EF4-FFF2-40B4-BE49-F238E27FC236}">
+                      <a16:creationId xmlns:a16="http://schemas.microsoft.com/office/drawing/2014/main" id="{E945E419-BDC4-D0A7-52BE-AC2FB7717B75}"/>
+                    </a:ext>
+                  </a:extLst>
+                </p:cNvPr>
+                <p:cNvSpPr/>
+                <p:nvPr/>
+              </p:nvSpPr>
+              <p:spPr>
+                <a:xfrm rot="16200000">
+                  <a:off x="1156146" y="4083509"/>
+                  <a:ext cx="944381" cy="464695"/>
+                </a:xfrm>
+                <a:prstGeom prst="roundRect">
+                  <a:avLst/>
+                </a:prstGeom>
+              </p:spPr>
+              <p:style>
+                <a:lnRef idx="1">
+                  <a:schemeClr val="accent3"/>
+                </a:lnRef>
+                <a:fillRef idx="3">
+                  <a:schemeClr val="accent3"/>
+                </a:fillRef>
+                <a:effectRef idx="2">
+                  <a:schemeClr val="accent3"/>
+                </a:effectRef>
+                <a:fontRef idx="minor">
+                  <a:schemeClr val="lt1"/>
+                </a:fontRef>
+              </p:style>
+              <p:txBody>
+                <a:bodyPr rtlCol="0" anchor="ctr"/>
+                <a:lstStyle/>
+                <a:p>
+                  <a:pPr algn="ctr"/>
+                  <a:r>
+                    <a:rPr lang="pl-PL" sz="2400" b="1" dirty="0"/>
+                    <a:t>GPB0</a:t>
+                  </a:r>
+                  <a:endParaRPr lang="en-US" b="1" dirty="0"/>
+                </a:p>
+              </p:txBody>
+            </p:sp>
+            <p:sp>
+              <p:nvSpPr>
+                <p:cNvPr id="28" name="Prostokąt: zaokrąglone rogi 27">
+                  <a:extLst>
+                    <a:ext uri="{FF2B5EF4-FFF2-40B4-BE49-F238E27FC236}">
+                      <a16:creationId xmlns:a16="http://schemas.microsoft.com/office/drawing/2014/main" id="{4204FFCD-7CEC-9DF6-E041-906C74C4A729}"/>
+                    </a:ext>
+                  </a:extLst>
+                </p:cNvPr>
+                <p:cNvSpPr/>
+                <p:nvPr/>
+              </p:nvSpPr>
+              <p:spPr>
+                <a:xfrm rot="16200000">
+                  <a:off x="1785971" y="4083509"/>
+                  <a:ext cx="944381" cy="464695"/>
+                </a:xfrm>
+                <a:prstGeom prst="roundRect">
+                  <a:avLst/>
+                </a:prstGeom>
+              </p:spPr>
+              <p:style>
+                <a:lnRef idx="1">
+                  <a:schemeClr val="accent3"/>
+                </a:lnRef>
+                <a:fillRef idx="3">
+                  <a:schemeClr val="accent3"/>
+                </a:fillRef>
+                <a:effectRef idx="2">
+                  <a:schemeClr val="accent3"/>
+                </a:effectRef>
+                <a:fontRef idx="minor">
+                  <a:schemeClr val="lt1"/>
+                </a:fontRef>
+              </p:style>
+              <p:txBody>
+                <a:bodyPr rtlCol="0" anchor="ctr"/>
+                <a:lstStyle/>
+                <a:p>
+                  <a:pPr algn="ctr"/>
+                  <a:r>
+                    <a:rPr lang="pl-PL" sz="2400" b="1" dirty="0"/>
+                    <a:t>GBP1</a:t>
+                  </a:r>
+                  <a:endParaRPr lang="en-US" b="1" dirty="0"/>
+                </a:p>
+              </p:txBody>
+            </p:sp>
+            <p:sp>
+              <p:nvSpPr>
+                <p:cNvPr id="39" name="Prostokąt: zaokrąglone rogi 38">
+                  <a:extLst>
+                    <a:ext uri="{FF2B5EF4-FFF2-40B4-BE49-F238E27FC236}">
+                      <a16:creationId xmlns:a16="http://schemas.microsoft.com/office/drawing/2014/main" id="{B194EE87-2323-846B-691D-CBE4A1AAD125}"/>
+                    </a:ext>
+                  </a:extLst>
+                </p:cNvPr>
+                <p:cNvSpPr/>
+                <p:nvPr/>
+              </p:nvSpPr>
+              <p:spPr>
+                <a:xfrm rot="16200000">
+                  <a:off x="2415795" y="4083508"/>
+                  <a:ext cx="944381" cy="464695"/>
+                </a:xfrm>
+                <a:prstGeom prst="roundRect">
+                  <a:avLst/>
+                </a:prstGeom>
+              </p:spPr>
+              <p:style>
+                <a:lnRef idx="1">
+                  <a:schemeClr val="accent3"/>
+                </a:lnRef>
+                <a:fillRef idx="3">
+                  <a:schemeClr val="accent3"/>
+                </a:fillRef>
+                <a:effectRef idx="2">
+                  <a:schemeClr val="accent3"/>
+                </a:effectRef>
+                <a:fontRef idx="minor">
+                  <a:schemeClr val="lt1"/>
+                </a:fontRef>
+              </p:style>
+              <p:txBody>
+                <a:bodyPr rtlCol="0" anchor="ctr"/>
+                <a:lstStyle/>
+                <a:p>
+                  <a:pPr algn="ctr"/>
+                  <a:r>
+                    <a:rPr lang="pl-PL" sz="2400" b="1" dirty="0"/>
+                    <a:t>GPB2</a:t>
+                  </a:r>
+                  <a:endParaRPr lang="en-US" b="1" dirty="0"/>
+                </a:p>
+              </p:txBody>
+            </p:sp>
+            <p:sp>
+              <p:nvSpPr>
+                <p:cNvPr id="40" name="Prostokąt: zaokrąglone rogi 39">
+                  <a:extLst>
+                    <a:ext uri="{FF2B5EF4-FFF2-40B4-BE49-F238E27FC236}">
+                      <a16:creationId xmlns:a16="http://schemas.microsoft.com/office/drawing/2014/main" id="{683F3425-41C1-9E4F-BE21-74AE370B4207}"/>
+                    </a:ext>
+                  </a:extLst>
+                </p:cNvPr>
+                <p:cNvSpPr/>
+                <p:nvPr/>
+              </p:nvSpPr>
+              <p:spPr>
+                <a:xfrm rot="16200000">
+                  <a:off x="3045620" y="4083507"/>
+                  <a:ext cx="944381" cy="464695"/>
+                </a:xfrm>
+                <a:prstGeom prst="roundRect">
+                  <a:avLst/>
+                </a:prstGeom>
+              </p:spPr>
+              <p:style>
+                <a:lnRef idx="1">
+                  <a:schemeClr val="accent3"/>
+                </a:lnRef>
+                <a:fillRef idx="3">
+                  <a:schemeClr val="accent3"/>
+                </a:fillRef>
+                <a:effectRef idx="2">
+                  <a:schemeClr val="accent3"/>
+                </a:effectRef>
+                <a:fontRef idx="minor">
+                  <a:schemeClr val="lt1"/>
+                </a:fontRef>
+              </p:style>
+              <p:txBody>
+                <a:bodyPr rtlCol="0" anchor="ctr"/>
+                <a:lstStyle/>
+                <a:p>
+                  <a:pPr algn="ctr"/>
+                  <a:r>
+                    <a:rPr lang="pl-PL" sz="2400" b="1" dirty="0"/>
+                    <a:t>GPB3</a:t>
+                  </a:r>
+                  <a:endParaRPr lang="en-US" sz="2400" b="1" dirty="0"/>
+                </a:p>
+              </p:txBody>
+            </p:sp>
+            <p:sp>
+              <p:nvSpPr>
+                <p:cNvPr id="44" name="Prostokąt: zaokrąglone rogi 43">
+                  <a:extLst>
+                    <a:ext uri="{FF2B5EF4-FFF2-40B4-BE49-F238E27FC236}">
+                      <a16:creationId xmlns:a16="http://schemas.microsoft.com/office/drawing/2014/main" id="{E6606438-2F8B-8C21-8043-A21B33DD4746}"/>
+                    </a:ext>
+                  </a:extLst>
+                </p:cNvPr>
+                <p:cNvSpPr/>
+                <p:nvPr/>
+              </p:nvSpPr>
+              <p:spPr>
+                <a:xfrm rot="16200000">
+                  <a:off x="3675444" y="4083506"/>
+                  <a:ext cx="944381" cy="464695"/>
+                </a:xfrm>
+                <a:prstGeom prst="roundRect">
+                  <a:avLst/>
+                </a:prstGeom>
+              </p:spPr>
+              <p:style>
+                <a:lnRef idx="1">
+                  <a:schemeClr val="accent3"/>
+                </a:lnRef>
+                <a:fillRef idx="3">
+                  <a:schemeClr val="accent3"/>
+                </a:fillRef>
+                <a:effectRef idx="2">
+                  <a:schemeClr val="accent3"/>
+                </a:effectRef>
+                <a:fontRef idx="minor">
+                  <a:schemeClr val="lt1"/>
+                </a:fontRef>
+              </p:style>
+              <p:txBody>
+                <a:bodyPr rtlCol="0" anchor="ctr"/>
+                <a:lstStyle/>
+                <a:p>
+                  <a:pPr algn="ctr"/>
+                  <a:r>
+                    <a:rPr lang="pl-PL" sz="2400" b="1" dirty="0"/>
+                    <a:t>GPB4</a:t>
+                  </a:r>
+                  <a:endParaRPr lang="en-US" sz="2400" b="1" dirty="0"/>
+                </a:p>
+              </p:txBody>
+            </p:sp>
+            <p:sp>
+              <p:nvSpPr>
+                <p:cNvPr id="47" name="Prostokąt: zaokrąglone rogi 46">
+                  <a:extLst>
+                    <a:ext uri="{FF2B5EF4-FFF2-40B4-BE49-F238E27FC236}">
+                      <a16:creationId xmlns:a16="http://schemas.microsoft.com/office/drawing/2014/main" id="{0B6BFCFD-7179-E03F-09F5-DE89A7039428}"/>
+                    </a:ext>
+                  </a:extLst>
+                </p:cNvPr>
+                <p:cNvSpPr/>
+                <p:nvPr/>
+              </p:nvSpPr>
+              <p:spPr>
+                <a:xfrm rot="16200000">
+                  <a:off x="4305268" y="4083505"/>
+                  <a:ext cx="944381" cy="464695"/>
+                </a:xfrm>
+                <a:prstGeom prst="roundRect">
+                  <a:avLst/>
+                </a:prstGeom>
+              </p:spPr>
+              <p:style>
+                <a:lnRef idx="1">
+                  <a:schemeClr val="accent3"/>
+                </a:lnRef>
+                <a:fillRef idx="3">
+                  <a:schemeClr val="accent3"/>
+                </a:fillRef>
+                <a:effectRef idx="2">
+                  <a:schemeClr val="accent3"/>
+                </a:effectRef>
+                <a:fontRef idx="minor">
+                  <a:schemeClr val="lt1"/>
+                </a:fontRef>
+              </p:style>
+              <p:txBody>
+                <a:bodyPr rtlCol="0" anchor="ctr"/>
+                <a:lstStyle/>
+                <a:p>
+                  <a:pPr algn="ctr"/>
+                  <a:r>
+                    <a:rPr lang="pl-PL" sz="2400" b="1" dirty="0"/>
+                    <a:t>GPB5</a:t>
+                  </a:r>
+                  <a:endParaRPr lang="en-US" sz="2400" b="1" dirty="0"/>
+                </a:p>
+              </p:txBody>
+            </p:sp>
+            <p:sp>
+              <p:nvSpPr>
+                <p:cNvPr id="49" name="Prostokąt: zaokrąglone rogi 48">
+                  <a:extLst>
+                    <a:ext uri="{FF2B5EF4-FFF2-40B4-BE49-F238E27FC236}">
+                      <a16:creationId xmlns:a16="http://schemas.microsoft.com/office/drawing/2014/main" id="{0AD55B09-696B-B20A-D6F6-1A6028493BB8}"/>
+                    </a:ext>
+                  </a:extLst>
+                </p:cNvPr>
+                <p:cNvSpPr/>
+                <p:nvPr/>
+              </p:nvSpPr>
+              <p:spPr>
+                <a:xfrm rot="16200000">
+                  <a:off x="4935092" y="4083504"/>
+                  <a:ext cx="944381" cy="464695"/>
+                </a:xfrm>
+                <a:prstGeom prst="roundRect">
+                  <a:avLst/>
+                </a:prstGeom>
+              </p:spPr>
+              <p:style>
+                <a:lnRef idx="1">
+                  <a:schemeClr val="accent3"/>
+                </a:lnRef>
+                <a:fillRef idx="3">
+                  <a:schemeClr val="accent3"/>
+                </a:fillRef>
+                <a:effectRef idx="2">
+                  <a:schemeClr val="accent3"/>
+                </a:effectRef>
+                <a:fontRef idx="minor">
+                  <a:schemeClr val="lt1"/>
+                </a:fontRef>
+              </p:style>
+              <p:txBody>
+                <a:bodyPr rtlCol="0" anchor="ctr"/>
+                <a:lstStyle/>
+                <a:p>
+                  <a:pPr algn="ctr"/>
+                  <a:r>
+                    <a:rPr lang="pl-PL" sz="2400" b="1" dirty="0"/>
+                    <a:t>GPB6</a:t>
+                  </a:r>
+                  <a:endParaRPr lang="en-US" sz="2400" b="1" dirty="0"/>
+                </a:p>
+              </p:txBody>
+            </p:sp>
+            <p:sp>
+              <p:nvSpPr>
+                <p:cNvPr id="52" name="Prostokąt: zaokrąglone rogi 51">
+                  <a:extLst>
+                    <a:ext uri="{FF2B5EF4-FFF2-40B4-BE49-F238E27FC236}">
+                      <a16:creationId xmlns:a16="http://schemas.microsoft.com/office/drawing/2014/main" id="{0FFA931B-E307-982F-FEF0-8C799688EFB8}"/>
+                    </a:ext>
+                  </a:extLst>
+                </p:cNvPr>
+                <p:cNvSpPr/>
+                <p:nvPr/>
+              </p:nvSpPr>
+              <p:spPr>
+                <a:xfrm rot="16200000">
+                  <a:off x="5564916" y="4083503"/>
+                  <a:ext cx="944381" cy="464695"/>
+                </a:xfrm>
+                <a:prstGeom prst="roundRect">
+                  <a:avLst/>
+                </a:prstGeom>
+              </p:spPr>
+              <p:style>
+                <a:lnRef idx="1">
+                  <a:schemeClr val="accent3"/>
+                </a:lnRef>
+                <a:fillRef idx="3">
+                  <a:schemeClr val="accent3"/>
+                </a:fillRef>
+                <a:effectRef idx="2">
+                  <a:schemeClr val="accent3"/>
+                </a:effectRef>
+                <a:fontRef idx="minor">
+                  <a:schemeClr val="lt1"/>
+                </a:fontRef>
+              </p:style>
+              <p:txBody>
+                <a:bodyPr rtlCol="0" anchor="ctr"/>
+                <a:lstStyle/>
+                <a:p>
+                  <a:pPr algn="ctr"/>
+                  <a:r>
+                    <a:rPr lang="pl-PL" sz="2400" b="1" dirty="0"/>
+                    <a:t>GPB7</a:t>
+                  </a:r>
+                  <a:endParaRPr lang="en-US" sz="2400" b="1" dirty="0"/>
+                </a:p>
+              </p:txBody>
+            </p:sp>
+            <p:sp>
+              <p:nvSpPr>
+                <p:cNvPr id="53" name="Prostokąt: zaokrąglone rogi 52">
+                  <a:extLst>
+                    <a:ext uri="{FF2B5EF4-FFF2-40B4-BE49-F238E27FC236}">
+                      <a16:creationId xmlns:a16="http://schemas.microsoft.com/office/drawing/2014/main" id="{73F67880-769C-C92D-51C2-A18C5D066074}"/>
+                    </a:ext>
+                  </a:extLst>
+                </p:cNvPr>
+                <p:cNvSpPr/>
+                <p:nvPr/>
+              </p:nvSpPr>
+              <p:spPr>
+                <a:xfrm rot="16200000">
+                  <a:off x="6220915" y="4083503"/>
+                  <a:ext cx="944381" cy="464695"/>
+                </a:xfrm>
+                <a:prstGeom prst="roundRect">
+                  <a:avLst/>
+                </a:prstGeom>
+              </p:spPr>
+              <p:style>
+                <a:lnRef idx="1">
+                  <a:schemeClr val="accent3"/>
+                </a:lnRef>
+                <a:fillRef idx="3">
+                  <a:schemeClr val="accent3"/>
+                </a:fillRef>
+                <a:effectRef idx="2">
+                  <a:schemeClr val="accent3"/>
+                </a:effectRef>
+                <a:fontRef idx="minor">
+                  <a:schemeClr val="lt1"/>
+                </a:fontRef>
+              </p:style>
+              <p:txBody>
+                <a:bodyPr rtlCol="0" anchor="ctr"/>
+                <a:lstStyle/>
+                <a:p>
+                  <a:pPr algn="ctr"/>
+                  <a:r>
+                    <a:rPr lang="pl-PL" sz="2400" b="1" dirty="0"/>
+                    <a:t>VDD</a:t>
+                  </a:r>
+                  <a:endParaRPr lang="en-US" b="1" dirty="0"/>
+                </a:p>
+              </p:txBody>
+            </p:sp>
+            <p:sp>
+              <p:nvSpPr>
+                <p:cNvPr id="54" name="Prostokąt: zaokrąglone rogi 53">
+                  <a:extLst>
+                    <a:ext uri="{FF2B5EF4-FFF2-40B4-BE49-F238E27FC236}">
+                      <a16:creationId xmlns:a16="http://schemas.microsoft.com/office/drawing/2014/main" id="{5C0EE056-1D85-38A2-6617-6CBD0F2E1788}"/>
+                    </a:ext>
+                  </a:extLst>
+                </p:cNvPr>
+                <p:cNvSpPr/>
+                <p:nvPr/>
+              </p:nvSpPr>
+              <p:spPr>
+                <a:xfrm rot="16200000">
+                  <a:off x="6850740" y="4096344"/>
+                  <a:ext cx="944381" cy="464695"/>
+                </a:xfrm>
+                <a:prstGeom prst="roundRect">
+                  <a:avLst/>
+                </a:prstGeom>
+              </p:spPr>
+              <p:style>
+                <a:lnRef idx="1">
+                  <a:schemeClr val="accent3"/>
+                </a:lnRef>
+                <a:fillRef idx="3">
+                  <a:schemeClr val="accent3"/>
+                </a:fillRef>
+                <a:effectRef idx="2">
+                  <a:schemeClr val="accent3"/>
+                </a:effectRef>
+                <a:fontRef idx="minor">
+                  <a:schemeClr val="lt1"/>
+                </a:fontRef>
+              </p:style>
+              <p:txBody>
+                <a:bodyPr rtlCol="0" anchor="ctr"/>
+                <a:lstStyle/>
+                <a:p>
+                  <a:pPr algn="ctr"/>
+                  <a:r>
+                    <a:rPr lang="pl-PL" sz="2400" b="1" dirty="0"/>
+                    <a:t>VSS</a:t>
+                  </a:r>
+                  <a:endParaRPr lang="en-US" b="1" dirty="0"/>
+                </a:p>
+              </p:txBody>
+            </p:sp>
+            <p:sp>
+              <p:nvSpPr>
+                <p:cNvPr id="55" name="Prostokąt: zaokrąglone rogi 54">
+                  <a:extLst>
+                    <a:ext uri="{FF2B5EF4-FFF2-40B4-BE49-F238E27FC236}">
+                      <a16:creationId xmlns:a16="http://schemas.microsoft.com/office/drawing/2014/main" id="{C4940DA1-47D1-904F-8AE8-36E2DCE762A6}"/>
+                    </a:ext>
+                  </a:extLst>
+                </p:cNvPr>
+                <p:cNvSpPr/>
+                <p:nvPr/>
+              </p:nvSpPr>
+              <p:spPr>
+                <a:xfrm rot="16200000">
+                  <a:off x="7506739" y="4083502"/>
+                  <a:ext cx="944381" cy="464695"/>
+                </a:xfrm>
+                <a:prstGeom prst="roundRect">
+                  <a:avLst/>
+                </a:prstGeom>
+              </p:spPr>
+              <p:style>
+                <a:lnRef idx="1">
+                  <a:schemeClr val="accent3"/>
+                </a:lnRef>
+                <a:fillRef idx="3">
+                  <a:schemeClr val="accent3"/>
+                </a:fillRef>
+                <a:effectRef idx="2">
+                  <a:schemeClr val="accent3"/>
+                </a:effectRef>
+                <a:fontRef idx="minor">
+                  <a:schemeClr val="lt1"/>
+                </a:fontRef>
+              </p:style>
+              <p:txBody>
+                <a:bodyPr rtlCol="0" anchor="ctr"/>
+                <a:lstStyle/>
+                <a:p>
+                  <a:pPr algn="ctr"/>
+                  <a:r>
+                    <a:rPr lang="pl-PL" sz="2400" b="1" dirty="0"/>
+                    <a:t>CS</a:t>
+                  </a:r>
+                  <a:endParaRPr lang="en-US" b="1" dirty="0"/>
+                </a:p>
+              </p:txBody>
+            </p:sp>
+            <p:sp>
+              <p:nvSpPr>
+                <p:cNvPr id="56" name="Prostokąt: zaokrąglone rogi 55">
+                  <a:extLst>
+                    <a:ext uri="{FF2B5EF4-FFF2-40B4-BE49-F238E27FC236}">
+                      <a16:creationId xmlns:a16="http://schemas.microsoft.com/office/drawing/2014/main" id="{9B6835AB-8DB3-6D29-A21C-7D98CDFDC4A4}"/>
+                    </a:ext>
+                  </a:extLst>
+                </p:cNvPr>
+                <p:cNvSpPr/>
+                <p:nvPr/>
+              </p:nvSpPr>
+              <p:spPr>
+                <a:xfrm rot="16200000">
+                  <a:off x="8162739" y="4083501"/>
+                  <a:ext cx="944381" cy="464695"/>
+                </a:xfrm>
+                <a:prstGeom prst="roundRect">
+                  <a:avLst/>
+                </a:prstGeom>
+              </p:spPr>
+              <p:style>
+                <a:lnRef idx="1">
+                  <a:schemeClr val="accent3"/>
+                </a:lnRef>
+                <a:fillRef idx="3">
+                  <a:schemeClr val="accent3"/>
+                </a:fillRef>
+                <a:effectRef idx="2">
+                  <a:schemeClr val="accent3"/>
+                </a:effectRef>
+                <a:fontRef idx="minor">
+                  <a:schemeClr val="lt1"/>
+                </a:fontRef>
+              </p:style>
+              <p:txBody>
+                <a:bodyPr rtlCol="0" anchor="ctr"/>
+                <a:lstStyle/>
+                <a:p>
+                  <a:pPr algn="ctr"/>
+                  <a:r>
+                    <a:rPr lang="pl-PL" sz="2400" b="1" dirty="0"/>
+                    <a:t>SCK</a:t>
+                  </a:r>
+                  <a:endParaRPr lang="en-US" b="1" dirty="0"/>
+                </a:p>
+              </p:txBody>
+            </p:sp>
+            <p:sp>
+              <p:nvSpPr>
+                <p:cNvPr id="57" name="Prostokąt: zaokrąglone rogi 56">
+                  <a:extLst>
+                    <a:ext uri="{FF2B5EF4-FFF2-40B4-BE49-F238E27FC236}">
+                      <a16:creationId xmlns:a16="http://schemas.microsoft.com/office/drawing/2014/main" id="{18CC776C-C10C-1BEF-4A78-4CAB3123D484}"/>
+                    </a:ext>
+                  </a:extLst>
+                </p:cNvPr>
+                <p:cNvSpPr/>
+                <p:nvPr/>
+              </p:nvSpPr>
+              <p:spPr>
+                <a:xfrm rot="16200000">
+                  <a:off x="8792563" y="4096343"/>
+                  <a:ext cx="944381" cy="464695"/>
+                </a:xfrm>
+                <a:prstGeom prst="roundRect">
+                  <a:avLst/>
+                </a:prstGeom>
+              </p:spPr>
+              <p:style>
+                <a:lnRef idx="1">
+                  <a:schemeClr val="accent3"/>
+                </a:lnRef>
+                <a:fillRef idx="3">
+                  <a:schemeClr val="accent3"/>
+                </a:fillRef>
+                <a:effectRef idx="2">
+                  <a:schemeClr val="accent3"/>
+                </a:effectRef>
+                <a:fontRef idx="minor">
+                  <a:schemeClr val="lt1"/>
+                </a:fontRef>
+              </p:style>
+              <p:txBody>
+                <a:bodyPr rtlCol="0" anchor="ctr"/>
+                <a:lstStyle/>
+                <a:p>
+                  <a:pPr algn="ctr"/>
+                  <a:r>
+                    <a:rPr lang="pl-PL" sz="2400" b="1" dirty="0"/>
+                    <a:t>SI</a:t>
+                  </a:r>
+                  <a:endParaRPr lang="en-US" b="1" dirty="0"/>
+                </a:p>
+              </p:txBody>
+            </p:sp>
+            <p:sp>
+              <p:nvSpPr>
+                <p:cNvPr id="58" name="Prostokąt: zaokrąglone rogi 57">
+                  <a:extLst>
+                    <a:ext uri="{FF2B5EF4-FFF2-40B4-BE49-F238E27FC236}">
+                      <a16:creationId xmlns:a16="http://schemas.microsoft.com/office/drawing/2014/main" id="{B6B3D4FF-2DC5-3DAE-BAB6-58B0B68428AC}"/>
+                    </a:ext>
+                  </a:extLst>
+                </p:cNvPr>
+                <p:cNvSpPr/>
+                <p:nvPr/>
+              </p:nvSpPr>
+              <p:spPr>
+                <a:xfrm rot="16200000">
+                  <a:off x="9448562" y="4096342"/>
+                  <a:ext cx="944381" cy="464695"/>
+                </a:xfrm>
+                <a:prstGeom prst="roundRect">
+                  <a:avLst/>
+                </a:prstGeom>
+              </p:spPr>
+              <p:style>
+                <a:lnRef idx="1">
+                  <a:schemeClr val="accent3"/>
+                </a:lnRef>
+                <a:fillRef idx="3">
+                  <a:schemeClr val="accent3"/>
+                </a:fillRef>
+                <a:effectRef idx="2">
+                  <a:schemeClr val="accent3"/>
+                </a:effectRef>
+                <a:fontRef idx="minor">
+                  <a:schemeClr val="lt1"/>
+                </a:fontRef>
+              </p:style>
+              <p:txBody>
+                <a:bodyPr rtlCol="0" anchor="ctr"/>
+                <a:lstStyle/>
+                <a:p>
+                  <a:pPr algn="ctr"/>
+                  <a:r>
+                    <a:rPr lang="pl-PL" sz="2400" b="1" dirty="0"/>
+                    <a:t>SO</a:t>
+                  </a:r>
+                  <a:endParaRPr lang="en-US" b="1" dirty="0"/>
+                </a:p>
+              </p:txBody>
+            </p:sp>
+          </p:grpSp>
+          <p:grpSp>
+            <p:nvGrpSpPr>
+              <p:cNvPr id="60" name="Grupa 59">
+                <a:extLst>
+                  <a:ext uri="{FF2B5EF4-FFF2-40B4-BE49-F238E27FC236}">
+                    <a16:creationId xmlns:a16="http://schemas.microsoft.com/office/drawing/2014/main" id="{4D459510-9E84-D9E6-1F8A-24F7FE33DBCF}"/>
+                  </a:ext>
+                </a:extLst>
+              </p:cNvPr>
+              <p:cNvGrpSpPr/>
+              <p:nvPr/>
+            </p:nvGrpSpPr>
+            <p:grpSpPr>
+              <a:xfrm>
+                <a:off x="1395988" y="1438817"/>
+                <a:ext cx="8757111" cy="957224"/>
+                <a:chOff x="1395989" y="3843658"/>
+                <a:chExt cx="8757111" cy="957224"/>
+              </a:xfrm>
+            </p:grpSpPr>
+            <p:sp>
+              <p:nvSpPr>
+                <p:cNvPr id="61" name="Prostokąt: zaokrąglone rogi 60">
+                  <a:extLst>
+                    <a:ext uri="{FF2B5EF4-FFF2-40B4-BE49-F238E27FC236}">
+                      <a16:creationId xmlns:a16="http://schemas.microsoft.com/office/drawing/2014/main" id="{6463B6E8-A09C-E36B-48D3-AC2993F88BE4}"/>
+                    </a:ext>
+                  </a:extLst>
+                </p:cNvPr>
+                <p:cNvSpPr/>
+                <p:nvPr/>
+              </p:nvSpPr>
+              <p:spPr>
+                <a:xfrm rot="16200000">
+                  <a:off x="1156146" y="4083509"/>
+                  <a:ext cx="944381" cy="464695"/>
+                </a:xfrm>
+                <a:prstGeom prst="roundRect">
+                  <a:avLst/>
+                </a:prstGeom>
+              </p:spPr>
+              <p:style>
+                <a:lnRef idx="1">
+                  <a:schemeClr val="accent3"/>
+                </a:lnRef>
+                <a:fillRef idx="3">
+                  <a:schemeClr val="accent3"/>
+                </a:fillRef>
+                <a:effectRef idx="2">
+                  <a:schemeClr val="accent3"/>
+                </a:effectRef>
+                <a:fontRef idx="minor">
+                  <a:schemeClr val="lt1"/>
+                </a:fontRef>
+              </p:style>
+              <p:txBody>
+                <a:bodyPr rtlCol="0" anchor="ctr"/>
+                <a:lstStyle/>
+                <a:p>
+                  <a:pPr algn="ctr"/>
+                  <a:r>
+                    <a:rPr lang="pl-PL" sz="2400" b="1" dirty="0"/>
+                    <a:t>GPA7</a:t>
+                  </a:r>
+                  <a:endParaRPr lang="en-US" b="1" dirty="0"/>
+                </a:p>
+              </p:txBody>
+            </p:sp>
+            <p:sp>
+              <p:nvSpPr>
+                <p:cNvPr id="62" name="Prostokąt: zaokrąglone rogi 61">
+                  <a:extLst>
+                    <a:ext uri="{FF2B5EF4-FFF2-40B4-BE49-F238E27FC236}">
+                      <a16:creationId xmlns:a16="http://schemas.microsoft.com/office/drawing/2014/main" id="{F5A02AFC-F82C-3651-CBE9-063401E6E152}"/>
+                    </a:ext>
+                  </a:extLst>
+                </p:cNvPr>
+                <p:cNvSpPr/>
+                <p:nvPr/>
+              </p:nvSpPr>
+              <p:spPr>
+                <a:xfrm rot="16200000">
+                  <a:off x="1785971" y="4083509"/>
+                  <a:ext cx="944381" cy="464695"/>
+                </a:xfrm>
+                <a:prstGeom prst="roundRect">
+                  <a:avLst/>
+                </a:prstGeom>
+              </p:spPr>
+              <p:style>
+                <a:lnRef idx="1">
+                  <a:schemeClr val="accent3"/>
+                </a:lnRef>
+                <a:fillRef idx="3">
+                  <a:schemeClr val="accent3"/>
+                </a:fillRef>
+                <a:effectRef idx="2">
+                  <a:schemeClr val="accent3"/>
+                </a:effectRef>
+                <a:fontRef idx="minor">
+                  <a:schemeClr val="lt1"/>
+                </a:fontRef>
+              </p:style>
+              <p:txBody>
+                <a:bodyPr rtlCol="0" anchor="ctr"/>
+                <a:lstStyle/>
+                <a:p>
+                  <a:pPr algn="ctr"/>
+                  <a:r>
+                    <a:rPr lang="pl-PL" sz="2400" b="1" dirty="0"/>
+                    <a:t>GPA6</a:t>
+                  </a:r>
+                  <a:endParaRPr lang="en-US" b="1" dirty="0"/>
+                </a:p>
+              </p:txBody>
+            </p:sp>
+            <p:sp>
+              <p:nvSpPr>
+                <p:cNvPr id="63" name="Prostokąt: zaokrąglone rogi 62">
+                  <a:extLst>
+                    <a:ext uri="{FF2B5EF4-FFF2-40B4-BE49-F238E27FC236}">
+                      <a16:creationId xmlns:a16="http://schemas.microsoft.com/office/drawing/2014/main" id="{21D7225D-CE37-E0DF-3D66-C751C9E4EA56}"/>
+                    </a:ext>
+                  </a:extLst>
+                </p:cNvPr>
+                <p:cNvSpPr/>
+                <p:nvPr/>
+              </p:nvSpPr>
+              <p:spPr>
+                <a:xfrm rot="16200000">
+                  <a:off x="2415795" y="4083508"/>
+                  <a:ext cx="944381" cy="464695"/>
+                </a:xfrm>
+                <a:prstGeom prst="roundRect">
+                  <a:avLst/>
+                </a:prstGeom>
+              </p:spPr>
+              <p:style>
+                <a:lnRef idx="1">
+                  <a:schemeClr val="accent3"/>
+                </a:lnRef>
+                <a:fillRef idx="3">
+                  <a:schemeClr val="accent3"/>
+                </a:fillRef>
+                <a:effectRef idx="2">
+                  <a:schemeClr val="accent3"/>
+                </a:effectRef>
+                <a:fontRef idx="minor">
+                  <a:schemeClr val="lt1"/>
+                </a:fontRef>
+              </p:style>
+              <p:txBody>
+                <a:bodyPr rtlCol="0" anchor="ctr"/>
+                <a:lstStyle/>
+                <a:p>
+                  <a:pPr algn="ctr"/>
+                  <a:r>
+                    <a:rPr lang="pl-PL" sz="2400" b="1" dirty="0"/>
+                    <a:t>GPA5</a:t>
+                  </a:r>
+                  <a:endParaRPr lang="en-US" b="1" dirty="0"/>
+                </a:p>
+              </p:txBody>
+            </p:sp>
+            <p:sp>
+              <p:nvSpPr>
+                <p:cNvPr id="64" name="Prostokąt: zaokrąglone rogi 63">
+                  <a:extLst>
+                    <a:ext uri="{FF2B5EF4-FFF2-40B4-BE49-F238E27FC236}">
+                      <a16:creationId xmlns:a16="http://schemas.microsoft.com/office/drawing/2014/main" id="{AFECBD5A-9FDD-DA10-EF1C-BBF05E98FE78}"/>
+                    </a:ext>
+                  </a:extLst>
+                </p:cNvPr>
+                <p:cNvSpPr/>
+                <p:nvPr/>
+              </p:nvSpPr>
+              <p:spPr>
+                <a:xfrm rot="16200000">
+                  <a:off x="3045620" y="4083507"/>
+                  <a:ext cx="944381" cy="464695"/>
+                </a:xfrm>
+                <a:prstGeom prst="roundRect">
+                  <a:avLst/>
+                </a:prstGeom>
+              </p:spPr>
+              <p:style>
+                <a:lnRef idx="1">
+                  <a:schemeClr val="accent3"/>
+                </a:lnRef>
+                <a:fillRef idx="3">
+                  <a:schemeClr val="accent3"/>
+                </a:fillRef>
+                <a:effectRef idx="2">
+                  <a:schemeClr val="accent3"/>
+                </a:effectRef>
+                <a:fontRef idx="minor">
+                  <a:schemeClr val="lt1"/>
+                </a:fontRef>
+              </p:style>
+              <p:txBody>
+                <a:bodyPr rtlCol="0" anchor="ctr"/>
+                <a:lstStyle/>
+                <a:p>
+                  <a:pPr algn="ctr"/>
+                  <a:r>
+                    <a:rPr lang="pl-PL" sz="2400" b="1" dirty="0"/>
+                    <a:t>GPA4</a:t>
+                  </a:r>
+                  <a:endParaRPr lang="en-US" b="1" dirty="0"/>
+                </a:p>
+              </p:txBody>
+            </p:sp>
+            <p:sp>
+              <p:nvSpPr>
+                <p:cNvPr id="65" name="Prostokąt: zaokrąglone rogi 64">
+                  <a:extLst>
+                    <a:ext uri="{FF2B5EF4-FFF2-40B4-BE49-F238E27FC236}">
+                      <a16:creationId xmlns:a16="http://schemas.microsoft.com/office/drawing/2014/main" id="{3F64BCB7-4963-6DD2-2249-185B87E5F140}"/>
+                    </a:ext>
+                  </a:extLst>
+                </p:cNvPr>
+                <p:cNvSpPr/>
+                <p:nvPr/>
+              </p:nvSpPr>
+              <p:spPr>
+                <a:xfrm rot="16200000">
+                  <a:off x="3675444" y="4083506"/>
+                  <a:ext cx="944381" cy="464695"/>
+                </a:xfrm>
+                <a:prstGeom prst="roundRect">
+                  <a:avLst/>
+                </a:prstGeom>
+              </p:spPr>
+              <p:style>
+                <a:lnRef idx="1">
+                  <a:schemeClr val="accent3"/>
+                </a:lnRef>
+                <a:fillRef idx="3">
+                  <a:schemeClr val="accent3"/>
+                </a:fillRef>
+                <a:effectRef idx="2">
+                  <a:schemeClr val="accent3"/>
+                </a:effectRef>
+                <a:fontRef idx="minor">
+                  <a:schemeClr val="lt1"/>
+                </a:fontRef>
+              </p:style>
+              <p:txBody>
+                <a:bodyPr rtlCol="0" anchor="ctr"/>
+                <a:lstStyle/>
+                <a:p>
+                  <a:pPr algn="ctr"/>
+                  <a:r>
+                    <a:rPr lang="pl-PL" sz="2400" b="1" dirty="0"/>
+                    <a:t>GPA3</a:t>
+                  </a:r>
+                  <a:endParaRPr lang="en-US" b="1" dirty="0"/>
+                </a:p>
+              </p:txBody>
+            </p:sp>
+            <p:sp>
+              <p:nvSpPr>
+                <p:cNvPr id="66" name="Prostokąt: zaokrąglone rogi 65">
+                  <a:extLst>
+                    <a:ext uri="{FF2B5EF4-FFF2-40B4-BE49-F238E27FC236}">
+                      <a16:creationId xmlns:a16="http://schemas.microsoft.com/office/drawing/2014/main" id="{8C8E5113-39F8-4948-A2C6-8A35ACF20D92}"/>
+                    </a:ext>
+                  </a:extLst>
+                </p:cNvPr>
+                <p:cNvSpPr/>
+                <p:nvPr/>
+              </p:nvSpPr>
+              <p:spPr>
+                <a:xfrm rot="16200000">
+                  <a:off x="4305268" y="4083505"/>
+                  <a:ext cx="944381" cy="464695"/>
+                </a:xfrm>
+                <a:prstGeom prst="roundRect">
+                  <a:avLst/>
+                </a:prstGeom>
+              </p:spPr>
+              <p:style>
+                <a:lnRef idx="1">
+                  <a:schemeClr val="accent3"/>
+                </a:lnRef>
+                <a:fillRef idx="3">
+                  <a:schemeClr val="accent3"/>
+                </a:fillRef>
+                <a:effectRef idx="2">
+                  <a:schemeClr val="accent3"/>
+                </a:effectRef>
+                <a:fontRef idx="minor">
+                  <a:schemeClr val="lt1"/>
+                </a:fontRef>
+              </p:style>
+              <p:txBody>
+                <a:bodyPr rtlCol="0" anchor="ctr"/>
+                <a:lstStyle/>
+                <a:p>
+                  <a:pPr algn="ctr"/>
+                  <a:r>
+                    <a:rPr lang="pl-PL" sz="2400" b="1" dirty="0"/>
+                    <a:t>GPA2</a:t>
+                  </a:r>
+                  <a:endParaRPr lang="en-US" b="1" dirty="0"/>
+                </a:p>
+              </p:txBody>
+            </p:sp>
+            <p:sp>
+              <p:nvSpPr>
+                <p:cNvPr id="67" name="Prostokąt: zaokrąglone rogi 66">
+                  <a:extLst>
+                    <a:ext uri="{FF2B5EF4-FFF2-40B4-BE49-F238E27FC236}">
+                      <a16:creationId xmlns:a16="http://schemas.microsoft.com/office/drawing/2014/main" id="{E15312EE-6914-1E2D-71CB-B85A5C927796}"/>
+                    </a:ext>
+                  </a:extLst>
+                </p:cNvPr>
+                <p:cNvSpPr/>
+                <p:nvPr/>
+              </p:nvSpPr>
+              <p:spPr>
+                <a:xfrm rot="16200000">
+                  <a:off x="4935092" y="4083504"/>
+                  <a:ext cx="944381" cy="464695"/>
+                </a:xfrm>
+                <a:prstGeom prst="roundRect">
+                  <a:avLst/>
+                </a:prstGeom>
+              </p:spPr>
+              <p:style>
+                <a:lnRef idx="1">
+                  <a:schemeClr val="accent3"/>
+                </a:lnRef>
+                <a:fillRef idx="3">
+                  <a:schemeClr val="accent3"/>
+                </a:fillRef>
+                <a:effectRef idx="2">
+                  <a:schemeClr val="accent3"/>
+                </a:effectRef>
+                <a:fontRef idx="minor">
+                  <a:schemeClr val="lt1"/>
+                </a:fontRef>
+              </p:style>
+              <p:txBody>
+                <a:bodyPr rtlCol="0" anchor="ctr"/>
+                <a:lstStyle/>
+                <a:p>
+                  <a:pPr algn="ctr"/>
+                  <a:r>
+                    <a:rPr lang="pl-PL" sz="2400" b="1" dirty="0"/>
+                    <a:t>GPA1</a:t>
+                  </a:r>
+                  <a:endParaRPr lang="en-US" b="1" dirty="0"/>
+                </a:p>
+              </p:txBody>
+            </p:sp>
+            <p:sp>
+              <p:nvSpPr>
+                <p:cNvPr id="68" name="Prostokąt: zaokrąglone rogi 67">
+                  <a:extLst>
+                    <a:ext uri="{FF2B5EF4-FFF2-40B4-BE49-F238E27FC236}">
+                      <a16:creationId xmlns:a16="http://schemas.microsoft.com/office/drawing/2014/main" id="{110BEBEF-8F0E-A959-7040-0C0CD7DB4588}"/>
+                    </a:ext>
+                  </a:extLst>
+                </p:cNvPr>
+                <p:cNvSpPr/>
+                <p:nvPr/>
+              </p:nvSpPr>
+              <p:spPr>
+                <a:xfrm rot="16200000">
+                  <a:off x="5564916" y="4083503"/>
+                  <a:ext cx="944381" cy="464695"/>
+                </a:xfrm>
+                <a:prstGeom prst="roundRect">
+                  <a:avLst/>
+                </a:prstGeom>
+              </p:spPr>
+              <p:style>
+                <a:lnRef idx="1">
+                  <a:schemeClr val="accent3"/>
+                </a:lnRef>
+                <a:fillRef idx="3">
+                  <a:schemeClr val="accent3"/>
+                </a:fillRef>
+                <a:effectRef idx="2">
+                  <a:schemeClr val="accent3"/>
+                </a:effectRef>
+                <a:fontRef idx="minor">
+                  <a:schemeClr val="lt1"/>
+                </a:fontRef>
+              </p:style>
+              <p:txBody>
+                <a:bodyPr rtlCol="0" anchor="ctr"/>
+                <a:lstStyle/>
+                <a:p>
+                  <a:pPr algn="ctr"/>
+                  <a:r>
+                    <a:rPr lang="pl-PL" sz="2400" b="1" dirty="0"/>
+                    <a:t>GPA0</a:t>
+                  </a:r>
+                  <a:endParaRPr lang="en-US" b="1" dirty="0"/>
+                </a:p>
+              </p:txBody>
+            </p:sp>
+            <p:sp>
+              <p:nvSpPr>
+                <p:cNvPr id="69" name="Prostokąt: zaokrąglone rogi 68">
+                  <a:extLst>
+                    <a:ext uri="{FF2B5EF4-FFF2-40B4-BE49-F238E27FC236}">
+                      <a16:creationId xmlns:a16="http://schemas.microsoft.com/office/drawing/2014/main" id="{3132C133-6921-D2B0-4593-E8CA86EF7750}"/>
+                    </a:ext>
+                  </a:extLst>
+                </p:cNvPr>
+                <p:cNvSpPr/>
+                <p:nvPr/>
+              </p:nvSpPr>
+              <p:spPr>
+                <a:xfrm rot="16200000">
+                  <a:off x="6220915" y="4083503"/>
+                  <a:ext cx="944381" cy="464695"/>
+                </a:xfrm>
+                <a:prstGeom prst="roundRect">
+                  <a:avLst/>
+                </a:prstGeom>
+              </p:spPr>
+              <p:style>
+                <a:lnRef idx="1">
+                  <a:schemeClr val="accent3"/>
+                </a:lnRef>
+                <a:fillRef idx="3">
+                  <a:schemeClr val="accent3"/>
+                </a:fillRef>
+                <a:effectRef idx="2">
+                  <a:schemeClr val="accent3"/>
+                </a:effectRef>
+                <a:fontRef idx="minor">
+                  <a:schemeClr val="lt1"/>
+                </a:fontRef>
+              </p:style>
+              <p:txBody>
+                <a:bodyPr rtlCol="0" anchor="ctr"/>
+                <a:lstStyle/>
+                <a:p>
+                  <a:pPr algn="ctr"/>
+                  <a:r>
+                    <a:rPr lang="pl-PL" sz="2400" b="1" dirty="0"/>
+                    <a:t>INTA</a:t>
+                  </a:r>
+                  <a:endParaRPr lang="en-US" b="1" dirty="0"/>
+                </a:p>
+              </p:txBody>
+            </p:sp>
+            <p:sp>
+              <p:nvSpPr>
+                <p:cNvPr id="70" name="Prostokąt: zaokrąglone rogi 69">
+                  <a:extLst>
+                    <a:ext uri="{FF2B5EF4-FFF2-40B4-BE49-F238E27FC236}">
+                      <a16:creationId xmlns:a16="http://schemas.microsoft.com/office/drawing/2014/main" id="{06A7C3BF-2963-6E41-9097-577E3491FD3D}"/>
+                    </a:ext>
+                  </a:extLst>
+                </p:cNvPr>
+                <p:cNvSpPr/>
+                <p:nvPr/>
+              </p:nvSpPr>
+              <p:spPr>
+                <a:xfrm rot="16200000">
+                  <a:off x="6850740" y="4096344"/>
+                  <a:ext cx="944381" cy="464695"/>
+                </a:xfrm>
+                <a:prstGeom prst="roundRect">
+                  <a:avLst/>
+                </a:prstGeom>
+              </p:spPr>
+              <p:style>
+                <a:lnRef idx="1">
+                  <a:schemeClr val="accent3"/>
+                </a:lnRef>
+                <a:fillRef idx="3">
+                  <a:schemeClr val="accent3"/>
+                </a:fillRef>
+                <a:effectRef idx="2">
+                  <a:schemeClr val="accent3"/>
+                </a:effectRef>
+                <a:fontRef idx="minor">
+                  <a:schemeClr val="lt1"/>
+                </a:fontRef>
+              </p:style>
+              <p:txBody>
+                <a:bodyPr rtlCol="0" anchor="ctr"/>
+                <a:lstStyle/>
+                <a:p>
+                  <a:pPr algn="ctr"/>
+                  <a:r>
+                    <a:rPr lang="pl-PL" sz="2400" b="1" dirty="0"/>
+                    <a:t>INTB</a:t>
+                  </a:r>
+                  <a:endParaRPr lang="en-US" b="1" dirty="0"/>
+                </a:p>
+              </p:txBody>
+            </p:sp>
+            <p:sp>
+              <p:nvSpPr>
+                <p:cNvPr id="71" name="Prostokąt: zaokrąglone rogi 70">
+                  <a:extLst>
+                    <a:ext uri="{FF2B5EF4-FFF2-40B4-BE49-F238E27FC236}">
+                      <a16:creationId xmlns:a16="http://schemas.microsoft.com/office/drawing/2014/main" id="{A5CF9B26-68F1-6B16-6912-E719A3FE2057}"/>
+                    </a:ext>
+                  </a:extLst>
+                </p:cNvPr>
+                <p:cNvSpPr/>
+                <p:nvPr/>
+              </p:nvSpPr>
+              <p:spPr>
+                <a:xfrm rot="16200000">
+                  <a:off x="7506739" y="4083502"/>
+                  <a:ext cx="944381" cy="464695"/>
+                </a:xfrm>
+                <a:prstGeom prst="roundRect">
+                  <a:avLst/>
+                </a:prstGeom>
+              </p:spPr>
+              <p:style>
+                <a:lnRef idx="1">
+                  <a:schemeClr val="accent3"/>
+                </a:lnRef>
+                <a:fillRef idx="3">
+                  <a:schemeClr val="accent3"/>
+                </a:fillRef>
+                <a:effectRef idx="2">
+                  <a:schemeClr val="accent3"/>
+                </a:effectRef>
+                <a:fontRef idx="minor">
+                  <a:schemeClr val="lt1"/>
+                </a:fontRef>
+              </p:style>
+              <p:txBody>
+                <a:bodyPr rtlCol="0" anchor="ctr"/>
+                <a:lstStyle/>
+                <a:p>
+                  <a:pPr algn="ctr"/>
+                  <a:endParaRPr lang="en-US" b="1" dirty="0"/>
+                </a:p>
+              </p:txBody>
+            </p:sp>
+            <p:sp>
+              <p:nvSpPr>
+                <p:cNvPr id="72" name="Prostokąt: zaokrąglone rogi 71">
+                  <a:extLst>
+                    <a:ext uri="{FF2B5EF4-FFF2-40B4-BE49-F238E27FC236}">
+                      <a16:creationId xmlns:a16="http://schemas.microsoft.com/office/drawing/2014/main" id="{F98A4A6E-1472-77D2-CB70-65BEDAFEC5D7}"/>
+                    </a:ext>
+                  </a:extLst>
+                </p:cNvPr>
+                <p:cNvSpPr/>
+                <p:nvPr/>
+              </p:nvSpPr>
+              <p:spPr>
+                <a:xfrm rot="16200000">
+                  <a:off x="8162739" y="4083501"/>
+                  <a:ext cx="944381" cy="464695"/>
+                </a:xfrm>
+                <a:prstGeom prst="roundRect">
+                  <a:avLst/>
+                </a:prstGeom>
+              </p:spPr>
+              <p:style>
+                <a:lnRef idx="1">
+                  <a:schemeClr val="accent3"/>
+                </a:lnRef>
+                <a:fillRef idx="3">
+                  <a:schemeClr val="accent3"/>
+                </a:fillRef>
+                <a:effectRef idx="2">
+                  <a:schemeClr val="accent3"/>
+                </a:effectRef>
+                <a:fontRef idx="minor">
+                  <a:schemeClr val="lt1"/>
+                </a:fontRef>
+              </p:style>
+              <p:txBody>
+                <a:bodyPr rtlCol="0" anchor="ctr"/>
+                <a:lstStyle/>
+                <a:p>
+                  <a:pPr algn="ctr"/>
+                  <a:r>
+                    <a:rPr lang="pl-PL" sz="2400" b="1" dirty="0"/>
+                    <a:t>A2</a:t>
+                  </a:r>
+                  <a:endParaRPr lang="en-US" b="1" dirty="0"/>
+                </a:p>
+              </p:txBody>
+            </p:sp>
+            <p:sp>
+              <p:nvSpPr>
+                <p:cNvPr id="73" name="Prostokąt: zaokrąglone rogi 72">
+                  <a:extLst>
+                    <a:ext uri="{FF2B5EF4-FFF2-40B4-BE49-F238E27FC236}">
+                      <a16:creationId xmlns:a16="http://schemas.microsoft.com/office/drawing/2014/main" id="{3A5B292E-D4A0-3166-87D4-81987B98E274}"/>
+                    </a:ext>
+                  </a:extLst>
+                </p:cNvPr>
+                <p:cNvSpPr/>
+                <p:nvPr/>
+              </p:nvSpPr>
+              <p:spPr>
+                <a:xfrm rot="16200000">
+                  <a:off x="8792563" y="4096343"/>
+                  <a:ext cx="944381" cy="464695"/>
+                </a:xfrm>
+                <a:prstGeom prst="roundRect">
+                  <a:avLst/>
+                </a:prstGeom>
+              </p:spPr>
+              <p:style>
+                <a:lnRef idx="1">
+                  <a:schemeClr val="accent3"/>
+                </a:lnRef>
+                <a:fillRef idx="3">
+                  <a:schemeClr val="accent3"/>
+                </a:fillRef>
+                <a:effectRef idx="2">
+                  <a:schemeClr val="accent3"/>
+                </a:effectRef>
+                <a:fontRef idx="minor">
+                  <a:schemeClr val="lt1"/>
+                </a:fontRef>
+              </p:style>
+              <p:txBody>
+                <a:bodyPr rtlCol="0" anchor="ctr"/>
+                <a:lstStyle/>
+                <a:p>
+                  <a:pPr algn="ctr"/>
+                  <a:r>
+                    <a:rPr lang="pl-PL" sz="2400" b="1" dirty="0"/>
+                    <a:t>A1</a:t>
+                  </a:r>
+                  <a:endParaRPr lang="en-US" b="1" dirty="0"/>
+                </a:p>
+              </p:txBody>
+            </p:sp>
+            <p:sp>
+              <p:nvSpPr>
+                <p:cNvPr id="74" name="Prostokąt: zaokrąglone rogi 73">
+                  <a:extLst>
+                    <a:ext uri="{FF2B5EF4-FFF2-40B4-BE49-F238E27FC236}">
+                      <a16:creationId xmlns:a16="http://schemas.microsoft.com/office/drawing/2014/main" id="{A40FCB15-D14C-75C7-C86F-3D6CAA3C5CA4}"/>
+                    </a:ext>
+                  </a:extLst>
+                </p:cNvPr>
+                <p:cNvSpPr/>
+                <p:nvPr/>
+              </p:nvSpPr>
+              <p:spPr>
+                <a:xfrm rot="16200000">
+                  <a:off x="9448562" y="4096342"/>
+                  <a:ext cx="944381" cy="464695"/>
+                </a:xfrm>
+                <a:prstGeom prst="roundRect">
+                  <a:avLst/>
+                </a:prstGeom>
+              </p:spPr>
+              <p:style>
+                <a:lnRef idx="1">
+                  <a:schemeClr val="accent3"/>
+                </a:lnRef>
+                <a:fillRef idx="3">
+                  <a:schemeClr val="accent3"/>
+                </a:fillRef>
+                <a:effectRef idx="2">
+                  <a:schemeClr val="accent3"/>
+                </a:effectRef>
+                <a:fontRef idx="minor">
+                  <a:schemeClr val="lt1"/>
+                </a:fontRef>
+              </p:style>
+              <p:txBody>
+                <a:bodyPr rtlCol="0" anchor="ctr"/>
+                <a:lstStyle/>
+                <a:p>
+                  <a:pPr algn="ctr"/>
+                  <a:r>
+                    <a:rPr lang="pl-PL" sz="2400" b="1" dirty="0"/>
+                    <a:t>A0</a:t>
+                  </a:r>
+                  <a:endParaRPr lang="en-US" b="1" dirty="0"/>
+                </a:p>
+              </p:txBody>
+            </p:sp>
+          </p:grpSp>
+          <p:sp>
+            <p:nvSpPr>
+              <p:cNvPr id="75" name="pole tekstowe 74">
+                <a:extLst>
+                  <a:ext uri="{FF2B5EF4-FFF2-40B4-BE49-F238E27FC236}">
+                    <a16:creationId xmlns:a16="http://schemas.microsoft.com/office/drawing/2014/main" id="{45C25757-5B7F-B2A1-D1DB-E47E0D37272B}"/>
+                  </a:ext>
+                </a:extLst>
+              </p:cNvPr>
+              <p:cNvSpPr txBox="1"/>
+              <p:nvPr/>
+            </p:nvSpPr>
+            <p:spPr>
+              <a:xfrm rot="16200000">
+                <a:off x="7407391" y="1574417"/>
+                <a:ext cx="1143073" cy="461665"/>
+              </a:xfrm>
+              <a:prstGeom prst="rect">
+                <a:avLst/>
+              </a:prstGeom>
+              <a:noFill/>
+            </p:spPr>
+            <p:txBody>
+              <a:bodyPr wrap="square" rtlCol="0">
+                <a:spAutoFit/>
+              </a:bodyPr>
+              <a:lstStyle/>
+              <a:p>
+                <a:r>
+                  <a:rPr lang="pl-PL" sz="2400" b="1" dirty="0">
+                    <a:solidFill>
+                      <a:schemeClr val="bg1"/>
+                    </a:solidFill>
+                  </a:rPr>
+                  <a:t>RESET</a:t>
+                </a:r>
+                <a:endParaRPr lang="en-US" b="1" dirty="0">
+                  <a:solidFill>
+                    <a:schemeClr val="bg1"/>
+                  </a:solidFill>
+                </a:endParaRPr>
+              </a:p>
+            </p:txBody>
+          </p:sp>
+          <p:cxnSp>
+            <p:nvCxnSpPr>
+              <p:cNvPr id="77" name="Łącznik prosty 76">
+                <a:extLst>
+                  <a:ext uri="{FF2B5EF4-FFF2-40B4-BE49-F238E27FC236}">
+                    <a16:creationId xmlns:a16="http://schemas.microsoft.com/office/drawing/2014/main" id="{4FD646CF-7188-2C9C-BCDB-93DDE768E51B}"/>
+                  </a:ext>
+                </a:extLst>
+              </p:cNvPr>
+              <p:cNvCxnSpPr>
+                <a:cxnSpLocks/>
+              </p:cNvCxnSpPr>
+              <p:nvPr/>
+            </p:nvCxnSpPr>
+            <p:spPr>
+              <a:xfrm flipV="1">
+                <a:off x="7854601" y="4148138"/>
+                <a:ext cx="0" cy="314325"/>
+              </a:xfrm>
+              <a:prstGeom prst="line">
+                <a:avLst/>
+              </a:prstGeom>
+              <a:ln w="41275">
+                <a:solidFill>
+                  <a:schemeClr val="bg1"/>
+                </a:solidFill>
+              </a:ln>
+            </p:spPr>
+            <p:style>
+              <a:lnRef idx="1">
+                <a:schemeClr val="accent1"/>
+              </a:lnRef>
+              <a:fillRef idx="0">
+                <a:schemeClr val="accent1"/>
+              </a:fillRef>
+              <a:effectRef idx="0">
+                <a:schemeClr val="accent1"/>
+              </a:effectRef>
+              <a:fontRef idx="minor">
+                <a:schemeClr val="tx1"/>
+              </a:fontRef>
+            </p:style>
+          </p:cxnSp>
+          <p:cxnSp>
+            <p:nvCxnSpPr>
+              <p:cNvPr id="81" name="Łącznik prosty 80">
+                <a:extLst>
+                  <a:ext uri="{FF2B5EF4-FFF2-40B4-BE49-F238E27FC236}">
+                    <a16:creationId xmlns:a16="http://schemas.microsoft.com/office/drawing/2014/main" id="{B35BFA7E-B594-6BAE-4DDA-FAFB2C1D257A}"/>
+                  </a:ext>
+                </a:extLst>
+              </p:cNvPr>
+              <p:cNvCxnSpPr>
+                <a:cxnSpLocks/>
+              </p:cNvCxnSpPr>
+              <p:nvPr/>
+            </p:nvCxnSpPr>
+            <p:spPr>
+              <a:xfrm flipV="1">
+                <a:off x="7854601" y="1519238"/>
+                <a:ext cx="0" cy="752475"/>
+              </a:xfrm>
+              <a:prstGeom prst="line">
+                <a:avLst/>
+              </a:prstGeom>
+              <a:ln w="41275">
+                <a:solidFill>
+                  <a:schemeClr val="bg1"/>
+                </a:solidFill>
+              </a:ln>
+            </p:spPr>
+            <p:style>
+              <a:lnRef idx="1">
+                <a:schemeClr val="accent1"/>
+              </a:lnRef>
+              <a:fillRef idx="0">
+                <a:schemeClr val="accent1"/>
+              </a:fillRef>
+              <a:effectRef idx="0">
+                <a:schemeClr val="accent1"/>
+              </a:effectRef>
+              <a:fontRef idx="minor">
+                <a:schemeClr val="tx1"/>
+              </a:fontRef>
+            </p:style>
+          </p:cxnSp>
+          <p:cxnSp>
+            <p:nvCxnSpPr>
+              <p:cNvPr id="84" name="Łącznik prosty 83">
+                <a:extLst>
+                  <a:ext uri="{FF2B5EF4-FFF2-40B4-BE49-F238E27FC236}">
+                    <a16:creationId xmlns:a16="http://schemas.microsoft.com/office/drawing/2014/main" id="{FE9C2888-D037-0428-2E48-3EBFB8E77858}"/>
+                  </a:ext>
+                </a:extLst>
+              </p:cNvPr>
+              <p:cNvCxnSpPr>
+                <a:cxnSpLocks/>
+              </p:cNvCxnSpPr>
+              <p:nvPr/>
+            </p:nvCxnSpPr>
+            <p:spPr>
+              <a:xfrm flipV="1">
+                <a:off x="7199605" y="1619250"/>
+                <a:ext cx="0" cy="590550"/>
+              </a:xfrm>
+              <a:prstGeom prst="line">
+                <a:avLst/>
+              </a:prstGeom>
+              <a:ln w="41275">
+                <a:solidFill>
+                  <a:schemeClr val="bg1"/>
+                </a:solidFill>
+              </a:ln>
+            </p:spPr>
+            <p:style>
+              <a:lnRef idx="1">
+                <a:schemeClr val="accent1"/>
+              </a:lnRef>
+              <a:fillRef idx="0">
+                <a:schemeClr val="accent1"/>
+              </a:fillRef>
+              <a:effectRef idx="0">
+                <a:schemeClr val="accent1"/>
+              </a:effectRef>
+              <a:fontRef idx="minor">
+                <a:schemeClr val="tx1"/>
+              </a:fontRef>
+            </p:style>
+          </p:cxnSp>
+          <p:cxnSp>
+            <p:nvCxnSpPr>
+              <p:cNvPr id="85" name="Łącznik prosty 84">
+                <a:extLst>
+                  <a:ext uri="{FF2B5EF4-FFF2-40B4-BE49-F238E27FC236}">
+                    <a16:creationId xmlns:a16="http://schemas.microsoft.com/office/drawing/2014/main" id="{7B93569E-3331-C07C-5CB0-69D215C9A1DF}"/>
+                  </a:ext>
+                </a:extLst>
+              </p:cNvPr>
+              <p:cNvCxnSpPr>
+                <a:cxnSpLocks/>
+              </p:cNvCxnSpPr>
+              <p:nvPr/>
+            </p:nvCxnSpPr>
+            <p:spPr>
+              <a:xfrm flipV="1">
+                <a:off x="6554337" y="1593056"/>
+                <a:ext cx="0" cy="595313"/>
+              </a:xfrm>
+              <a:prstGeom prst="line">
+                <a:avLst/>
+              </a:prstGeom>
+              <a:ln w="41275">
+                <a:solidFill>
+                  <a:schemeClr val="bg1"/>
+                </a:solidFill>
+              </a:ln>
+            </p:spPr>
+            <p:style>
+              <a:lnRef idx="1">
+                <a:schemeClr val="accent1"/>
+              </a:lnRef>
+              <a:fillRef idx="0">
+                <a:schemeClr val="accent1"/>
+              </a:fillRef>
+              <a:effectRef idx="0">
+                <a:schemeClr val="accent1"/>
+              </a:effectRef>
+              <a:fontRef idx="minor">
+                <a:schemeClr val="tx1"/>
+              </a:fontRef>
+            </p:style>
+          </p:cxnSp>
+          <p:sp>
+            <p:nvSpPr>
+              <p:cNvPr id="93" name="pole tekstowe 92">
+                <a:extLst>
+                  <a:ext uri="{FF2B5EF4-FFF2-40B4-BE49-F238E27FC236}">
+                    <a16:creationId xmlns:a16="http://schemas.microsoft.com/office/drawing/2014/main" id="{D7C09D7A-139B-880D-3178-83E0EE19C1DA}"/>
+                  </a:ext>
+                </a:extLst>
+              </p:cNvPr>
+              <p:cNvSpPr txBox="1"/>
+              <p:nvPr/>
+            </p:nvSpPr>
+            <p:spPr>
+              <a:xfrm rot="16200000">
+                <a:off x="1405982" y="3396328"/>
+                <a:ext cx="444706" cy="369332"/>
+              </a:xfrm>
+              <a:prstGeom prst="rect">
+                <a:avLst/>
+              </a:prstGeom>
+              <a:noFill/>
+            </p:spPr>
+            <p:txBody>
+              <a:bodyPr wrap="square" rtlCol="0">
+                <a:spAutoFit/>
+              </a:bodyPr>
+              <a:lstStyle/>
+              <a:p>
+                <a:r>
+                  <a:rPr lang="pl-PL" dirty="0"/>
+                  <a:t>1</a:t>
+                </a:r>
+                <a:endParaRPr lang="en-US" dirty="0"/>
+              </a:p>
+            </p:txBody>
+          </p:sp>
+          <p:sp>
+            <p:nvSpPr>
+              <p:cNvPr id="94" name="pole tekstowe 93">
+                <a:extLst>
+                  <a:ext uri="{FF2B5EF4-FFF2-40B4-BE49-F238E27FC236}">
+                    <a16:creationId xmlns:a16="http://schemas.microsoft.com/office/drawing/2014/main" id="{E8013207-A9F3-11A5-8AC1-01DDED373CCB}"/>
+                  </a:ext>
+                </a:extLst>
+              </p:cNvPr>
+              <p:cNvSpPr txBox="1"/>
+              <p:nvPr/>
+            </p:nvSpPr>
+            <p:spPr>
+              <a:xfrm rot="16200000">
+                <a:off x="2046352" y="3396320"/>
+                <a:ext cx="444706" cy="369332"/>
+              </a:xfrm>
+              <a:prstGeom prst="rect">
+                <a:avLst/>
+              </a:prstGeom>
+              <a:noFill/>
+            </p:spPr>
+            <p:txBody>
+              <a:bodyPr wrap="square" rtlCol="0">
+                <a:spAutoFit/>
+              </a:bodyPr>
+              <a:lstStyle/>
+              <a:p>
+                <a:r>
+                  <a:rPr lang="pl-PL" dirty="0"/>
+                  <a:t>2</a:t>
+                </a:r>
+                <a:endParaRPr lang="en-US" dirty="0"/>
+              </a:p>
+            </p:txBody>
+          </p:sp>
+          <p:sp>
+            <p:nvSpPr>
+              <p:cNvPr id="95" name="pole tekstowe 94">
+                <a:extLst>
+                  <a:ext uri="{FF2B5EF4-FFF2-40B4-BE49-F238E27FC236}">
+                    <a16:creationId xmlns:a16="http://schemas.microsoft.com/office/drawing/2014/main" id="{8E4F91AB-F72B-4418-DDFD-B71A5AD30C96}"/>
+                  </a:ext>
+                </a:extLst>
+              </p:cNvPr>
+              <p:cNvSpPr txBox="1"/>
+              <p:nvPr/>
+            </p:nvSpPr>
+            <p:spPr>
+              <a:xfrm rot="16200000">
+                <a:off x="2664635" y="3396320"/>
+                <a:ext cx="444706" cy="369332"/>
+              </a:xfrm>
+              <a:prstGeom prst="rect">
+                <a:avLst/>
+              </a:prstGeom>
+              <a:noFill/>
+            </p:spPr>
+            <p:txBody>
+              <a:bodyPr wrap="square" rtlCol="0">
+                <a:spAutoFit/>
+              </a:bodyPr>
+              <a:lstStyle/>
+              <a:p>
+                <a:r>
+                  <a:rPr lang="pl-PL" dirty="0"/>
+                  <a:t>3</a:t>
+                </a:r>
+                <a:endParaRPr lang="en-US" dirty="0"/>
+              </a:p>
+            </p:txBody>
+          </p:sp>
+          <p:sp>
+            <p:nvSpPr>
+              <p:cNvPr id="96" name="pole tekstowe 95">
+                <a:extLst>
+                  <a:ext uri="{FF2B5EF4-FFF2-40B4-BE49-F238E27FC236}">
+                    <a16:creationId xmlns:a16="http://schemas.microsoft.com/office/drawing/2014/main" id="{6BE07953-B5D8-7DF3-8D24-66A7F0191B36}"/>
+                  </a:ext>
+                </a:extLst>
+              </p:cNvPr>
+              <p:cNvSpPr txBox="1"/>
+              <p:nvPr/>
+            </p:nvSpPr>
+            <p:spPr>
+              <a:xfrm rot="16200000">
+                <a:off x="3293719" y="3396319"/>
+                <a:ext cx="444706" cy="369332"/>
+              </a:xfrm>
+              <a:prstGeom prst="rect">
+                <a:avLst/>
+              </a:prstGeom>
+              <a:noFill/>
+            </p:spPr>
+            <p:txBody>
+              <a:bodyPr wrap="square" rtlCol="0">
+                <a:spAutoFit/>
+              </a:bodyPr>
+              <a:lstStyle/>
+              <a:p>
+                <a:r>
+                  <a:rPr lang="pl-PL" dirty="0"/>
+                  <a:t>4</a:t>
+                </a:r>
+                <a:endParaRPr lang="en-US" dirty="0"/>
+              </a:p>
+            </p:txBody>
+          </p:sp>
+          <p:sp>
+            <p:nvSpPr>
+              <p:cNvPr id="97" name="pole tekstowe 96">
+                <a:extLst>
+                  <a:ext uri="{FF2B5EF4-FFF2-40B4-BE49-F238E27FC236}">
+                    <a16:creationId xmlns:a16="http://schemas.microsoft.com/office/drawing/2014/main" id="{B9A507F8-65CD-963E-07C4-EB726DB6ACE0}"/>
+                  </a:ext>
+                </a:extLst>
+              </p:cNvPr>
+              <p:cNvSpPr txBox="1"/>
+              <p:nvPr/>
+            </p:nvSpPr>
+            <p:spPr>
+              <a:xfrm rot="16200000">
+                <a:off x="3922733" y="3396319"/>
+                <a:ext cx="444706" cy="369332"/>
+              </a:xfrm>
+              <a:prstGeom prst="rect">
+                <a:avLst/>
+              </a:prstGeom>
+              <a:noFill/>
+            </p:spPr>
+            <p:txBody>
+              <a:bodyPr wrap="square" rtlCol="0">
+                <a:spAutoFit/>
+              </a:bodyPr>
+              <a:lstStyle/>
+              <a:p>
+                <a:r>
+                  <a:rPr lang="pl-PL" dirty="0"/>
+                  <a:t>5</a:t>
+                </a:r>
+                <a:endParaRPr lang="en-US" dirty="0"/>
+              </a:p>
+            </p:txBody>
+          </p:sp>
+          <p:sp>
+            <p:nvSpPr>
+              <p:cNvPr id="98" name="pole tekstowe 97">
+                <a:extLst>
+                  <a:ext uri="{FF2B5EF4-FFF2-40B4-BE49-F238E27FC236}">
+                    <a16:creationId xmlns:a16="http://schemas.microsoft.com/office/drawing/2014/main" id="{31028DDC-3117-BFF4-4040-DC9AB8B3D81F}"/>
+                  </a:ext>
+                </a:extLst>
+              </p:cNvPr>
+              <p:cNvSpPr txBox="1"/>
+              <p:nvPr/>
+            </p:nvSpPr>
+            <p:spPr>
+              <a:xfrm rot="16200000">
+                <a:off x="4551747" y="3396319"/>
+                <a:ext cx="444706" cy="369332"/>
+              </a:xfrm>
+              <a:prstGeom prst="rect">
+                <a:avLst/>
+              </a:prstGeom>
+              <a:noFill/>
+            </p:spPr>
+            <p:txBody>
+              <a:bodyPr wrap="square" rtlCol="0">
+                <a:spAutoFit/>
+              </a:bodyPr>
+              <a:lstStyle/>
+              <a:p>
+                <a:r>
+                  <a:rPr lang="pl-PL" dirty="0"/>
+                  <a:t>6</a:t>
+                </a:r>
+                <a:endParaRPr lang="en-US" dirty="0"/>
+              </a:p>
+            </p:txBody>
+          </p:sp>
+          <p:sp>
+            <p:nvSpPr>
+              <p:cNvPr id="99" name="pole tekstowe 98">
+                <a:extLst>
+                  <a:ext uri="{FF2B5EF4-FFF2-40B4-BE49-F238E27FC236}">
+                    <a16:creationId xmlns:a16="http://schemas.microsoft.com/office/drawing/2014/main" id="{E309C5F1-09A0-DD39-9FC5-A3E455433439}"/>
+                  </a:ext>
+                </a:extLst>
+              </p:cNvPr>
+              <p:cNvSpPr txBox="1"/>
+              <p:nvPr/>
+            </p:nvSpPr>
+            <p:spPr>
+              <a:xfrm rot="16200000">
+                <a:off x="5181984" y="3396319"/>
+                <a:ext cx="444706" cy="369332"/>
+              </a:xfrm>
+              <a:prstGeom prst="rect">
+                <a:avLst/>
+              </a:prstGeom>
+              <a:noFill/>
+            </p:spPr>
+            <p:txBody>
+              <a:bodyPr wrap="square" rtlCol="0">
+                <a:spAutoFit/>
+              </a:bodyPr>
+              <a:lstStyle/>
+              <a:p>
+                <a:r>
+                  <a:rPr lang="pl-PL" dirty="0"/>
+                  <a:t>7</a:t>
+                </a:r>
+                <a:endParaRPr lang="en-US" dirty="0"/>
+              </a:p>
+            </p:txBody>
+          </p:sp>
+          <p:sp>
+            <p:nvSpPr>
+              <p:cNvPr id="100" name="pole tekstowe 99">
+                <a:extLst>
+                  <a:ext uri="{FF2B5EF4-FFF2-40B4-BE49-F238E27FC236}">
+                    <a16:creationId xmlns:a16="http://schemas.microsoft.com/office/drawing/2014/main" id="{B53748B4-4779-4007-E090-C34FB1887A7D}"/>
+                  </a:ext>
+                </a:extLst>
+              </p:cNvPr>
+              <p:cNvSpPr txBox="1"/>
+              <p:nvPr/>
+            </p:nvSpPr>
+            <p:spPr>
+              <a:xfrm rot="16200000">
+                <a:off x="5826296" y="3396319"/>
+                <a:ext cx="444706" cy="369332"/>
+              </a:xfrm>
+              <a:prstGeom prst="rect">
+                <a:avLst/>
+              </a:prstGeom>
+              <a:noFill/>
+            </p:spPr>
+            <p:txBody>
+              <a:bodyPr wrap="square" rtlCol="0">
+                <a:spAutoFit/>
+              </a:bodyPr>
+              <a:lstStyle/>
+              <a:p>
+                <a:r>
+                  <a:rPr lang="pl-PL" dirty="0"/>
+                  <a:t>8</a:t>
+                </a:r>
+                <a:endParaRPr lang="en-US" dirty="0"/>
+              </a:p>
+            </p:txBody>
+          </p:sp>
+          <p:sp>
+            <p:nvSpPr>
+              <p:cNvPr id="101" name="pole tekstowe 100">
+                <a:extLst>
+                  <a:ext uri="{FF2B5EF4-FFF2-40B4-BE49-F238E27FC236}">
+                    <a16:creationId xmlns:a16="http://schemas.microsoft.com/office/drawing/2014/main" id="{CF5999F1-ADEE-E380-BB90-DE86F69A13E8}"/>
+                  </a:ext>
+                </a:extLst>
+              </p:cNvPr>
+              <p:cNvSpPr txBox="1"/>
+              <p:nvPr/>
+            </p:nvSpPr>
+            <p:spPr>
+              <a:xfrm rot="16200000">
+                <a:off x="6444579" y="3396321"/>
+                <a:ext cx="444706" cy="369332"/>
+              </a:xfrm>
+              <a:prstGeom prst="rect">
+                <a:avLst/>
+              </a:prstGeom>
+              <a:noFill/>
+            </p:spPr>
+            <p:txBody>
+              <a:bodyPr wrap="square" rtlCol="0">
+                <a:spAutoFit/>
+              </a:bodyPr>
+              <a:lstStyle/>
+              <a:p>
+                <a:r>
+                  <a:rPr lang="pl-PL" dirty="0"/>
+                  <a:t>9</a:t>
+                </a:r>
+                <a:endParaRPr lang="en-US" dirty="0"/>
+              </a:p>
+            </p:txBody>
+          </p:sp>
+          <p:sp>
+            <p:nvSpPr>
+              <p:cNvPr id="102" name="pole tekstowe 101">
+                <a:extLst>
+                  <a:ext uri="{FF2B5EF4-FFF2-40B4-BE49-F238E27FC236}">
+                    <a16:creationId xmlns:a16="http://schemas.microsoft.com/office/drawing/2014/main" id="{6851CC53-C201-CAFF-4E3F-EA786F1D52F5}"/>
+                  </a:ext>
+                </a:extLst>
+              </p:cNvPr>
+              <p:cNvSpPr txBox="1"/>
+              <p:nvPr/>
+            </p:nvSpPr>
+            <p:spPr>
+              <a:xfrm rot="16200000">
+                <a:off x="7087458" y="3396320"/>
+                <a:ext cx="444706" cy="369332"/>
+              </a:xfrm>
+              <a:prstGeom prst="rect">
+                <a:avLst/>
+              </a:prstGeom>
+              <a:noFill/>
+            </p:spPr>
+            <p:txBody>
+              <a:bodyPr wrap="square" rtlCol="0">
+                <a:spAutoFit/>
+              </a:bodyPr>
+              <a:lstStyle/>
+              <a:p>
+                <a:r>
+                  <a:rPr lang="pl-PL" dirty="0"/>
+                  <a:t>10</a:t>
+                </a:r>
+                <a:endParaRPr lang="en-US" dirty="0"/>
+              </a:p>
+            </p:txBody>
+          </p:sp>
+          <p:sp>
+            <p:nvSpPr>
+              <p:cNvPr id="103" name="pole tekstowe 102">
+                <a:extLst>
+                  <a:ext uri="{FF2B5EF4-FFF2-40B4-BE49-F238E27FC236}">
+                    <a16:creationId xmlns:a16="http://schemas.microsoft.com/office/drawing/2014/main" id="{BE660487-5A53-C479-2567-ACEC867AB468}"/>
+                  </a:ext>
+                </a:extLst>
+              </p:cNvPr>
+              <p:cNvSpPr txBox="1"/>
+              <p:nvPr/>
+            </p:nvSpPr>
+            <p:spPr>
+              <a:xfrm rot="16200000">
+                <a:off x="7707702" y="3398274"/>
+                <a:ext cx="444706" cy="369332"/>
+              </a:xfrm>
+              <a:prstGeom prst="rect">
+                <a:avLst/>
+              </a:prstGeom>
+              <a:noFill/>
+            </p:spPr>
+            <p:txBody>
+              <a:bodyPr wrap="square" rtlCol="0">
+                <a:spAutoFit/>
+              </a:bodyPr>
+              <a:lstStyle/>
+              <a:p>
+                <a:r>
+                  <a:rPr lang="pl-PL" dirty="0"/>
+                  <a:t>11</a:t>
+                </a:r>
+                <a:endParaRPr lang="en-US" dirty="0"/>
+              </a:p>
+            </p:txBody>
+          </p:sp>
+          <p:sp>
+            <p:nvSpPr>
+              <p:cNvPr id="105" name="pole tekstowe 104">
+                <a:extLst>
+                  <a:ext uri="{FF2B5EF4-FFF2-40B4-BE49-F238E27FC236}">
+                    <a16:creationId xmlns:a16="http://schemas.microsoft.com/office/drawing/2014/main" id="{842C6152-E731-272E-0C96-4F7BA511BF28}"/>
+                  </a:ext>
+                </a:extLst>
+              </p:cNvPr>
+              <p:cNvSpPr txBox="1"/>
+              <p:nvPr/>
+            </p:nvSpPr>
+            <p:spPr>
+              <a:xfrm rot="16200000">
+                <a:off x="8412575" y="3396319"/>
+                <a:ext cx="444706" cy="369332"/>
+              </a:xfrm>
+              <a:prstGeom prst="rect">
+                <a:avLst/>
+              </a:prstGeom>
+              <a:noFill/>
+            </p:spPr>
+            <p:txBody>
+              <a:bodyPr wrap="square" rtlCol="0">
+                <a:spAutoFit/>
+              </a:bodyPr>
+              <a:lstStyle/>
+              <a:p>
+                <a:r>
+                  <a:rPr lang="pl-PL" dirty="0"/>
+                  <a:t>12</a:t>
+                </a:r>
+                <a:endParaRPr lang="en-US" dirty="0"/>
+              </a:p>
+            </p:txBody>
+          </p:sp>
+          <p:sp>
+            <p:nvSpPr>
+              <p:cNvPr id="106" name="pole tekstowe 105">
+                <a:extLst>
+                  <a:ext uri="{FF2B5EF4-FFF2-40B4-BE49-F238E27FC236}">
+                    <a16:creationId xmlns:a16="http://schemas.microsoft.com/office/drawing/2014/main" id="{E72619A0-509A-DFE5-F44D-C0D75D3DE60B}"/>
+                  </a:ext>
+                </a:extLst>
+              </p:cNvPr>
+              <p:cNvSpPr txBox="1"/>
+              <p:nvPr/>
+            </p:nvSpPr>
+            <p:spPr>
+              <a:xfrm rot="16200000">
+                <a:off x="9045439" y="3394653"/>
+                <a:ext cx="444706" cy="369332"/>
+              </a:xfrm>
+              <a:prstGeom prst="rect">
+                <a:avLst/>
+              </a:prstGeom>
+              <a:noFill/>
+            </p:spPr>
+            <p:txBody>
+              <a:bodyPr wrap="square" rtlCol="0">
+                <a:spAutoFit/>
+              </a:bodyPr>
+              <a:lstStyle/>
+              <a:p>
+                <a:r>
+                  <a:rPr lang="pl-PL" dirty="0"/>
+                  <a:t>13</a:t>
+                </a:r>
+                <a:endParaRPr lang="en-US" dirty="0"/>
+              </a:p>
+            </p:txBody>
+          </p:sp>
+          <p:sp>
+            <p:nvSpPr>
+              <p:cNvPr id="107" name="pole tekstowe 106">
+                <a:extLst>
+                  <a:ext uri="{FF2B5EF4-FFF2-40B4-BE49-F238E27FC236}">
+                    <a16:creationId xmlns:a16="http://schemas.microsoft.com/office/drawing/2014/main" id="{73BA71FA-2314-E54D-48CE-0F3EA614DB69}"/>
+                  </a:ext>
+                </a:extLst>
+              </p:cNvPr>
+              <p:cNvSpPr txBox="1"/>
+              <p:nvPr/>
+            </p:nvSpPr>
+            <p:spPr>
+              <a:xfrm rot="16200000">
+                <a:off x="9674453" y="3399216"/>
+                <a:ext cx="444706" cy="369332"/>
+              </a:xfrm>
+              <a:prstGeom prst="rect">
+                <a:avLst/>
+              </a:prstGeom>
+              <a:noFill/>
+            </p:spPr>
+            <p:txBody>
+              <a:bodyPr wrap="square" rtlCol="0">
+                <a:spAutoFit/>
+              </a:bodyPr>
+              <a:lstStyle/>
+              <a:p>
+                <a:r>
+                  <a:rPr lang="pl-PL" dirty="0"/>
+                  <a:t>14</a:t>
+                </a:r>
+                <a:endParaRPr lang="en-US" dirty="0"/>
+              </a:p>
+            </p:txBody>
+          </p:sp>
+          <p:sp>
+            <p:nvSpPr>
+              <p:cNvPr id="122" name="pole tekstowe 121">
+                <a:extLst>
+                  <a:ext uri="{FF2B5EF4-FFF2-40B4-BE49-F238E27FC236}">
+                    <a16:creationId xmlns:a16="http://schemas.microsoft.com/office/drawing/2014/main" id="{3C6F9139-9807-CDCD-7848-EB8615958182}"/>
+                  </a:ext>
+                </a:extLst>
+              </p:cNvPr>
+              <p:cNvSpPr txBox="1"/>
+              <p:nvPr/>
+            </p:nvSpPr>
+            <p:spPr>
+              <a:xfrm rot="10800000">
+                <a:off x="4187402" y="2827904"/>
+                <a:ext cx="2714690" cy="707886"/>
+              </a:xfrm>
+              <a:prstGeom prst="rect">
+                <a:avLst/>
+              </a:prstGeom>
+              <a:noFill/>
+            </p:spPr>
+            <p:txBody>
+              <a:bodyPr wrap="square" rtlCol="0">
+                <a:spAutoFit/>
+              </a:bodyPr>
+              <a:lstStyle/>
+              <a:p>
+                <a:r>
+                  <a:rPr lang="pl-PL" sz="4000" b="1" dirty="0"/>
+                  <a:t>MCP23S17</a:t>
+                </a:r>
+                <a:endParaRPr lang="en-US" sz="2400" b="1" dirty="0"/>
+              </a:p>
+            </p:txBody>
+          </p:sp>
+        </p:grpSp>
+        <p:grpSp>
+          <p:nvGrpSpPr>
+            <p:cNvPr id="138" name="Grupa 137">
+              <a:extLst>
+                <a:ext uri="{FF2B5EF4-FFF2-40B4-BE49-F238E27FC236}">
+                  <a16:creationId xmlns:a16="http://schemas.microsoft.com/office/drawing/2014/main" id="{B7874AE9-B170-A9A3-F448-57CD879601EA}"/>
+                </a:ext>
+              </a:extLst>
+            </p:cNvPr>
+            <p:cNvGrpSpPr/>
+            <p:nvPr/>
+          </p:nvGrpSpPr>
+          <p:grpSpPr>
+            <a:xfrm>
+              <a:off x="1473236" y="2358876"/>
+              <a:ext cx="8608236" cy="462611"/>
+              <a:chOff x="1449500" y="2399191"/>
+              <a:chExt cx="8608236" cy="462611"/>
+            </a:xfrm>
+          </p:grpSpPr>
+          <p:sp>
+            <p:nvSpPr>
+              <p:cNvPr id="124" name="pole tekstowe 123">
+                <a:extLst>
+                  <a:ext uri="{FF2B5EF4-FFF2-40B4-BE49-F238E27FC236}">
+                    <a16:creationId xmlns:a16="http://schemas.microsoft.com/office/drawing/2014/main" id="{E12F4F19-1F2C-0146-3296-E7EE1F7951BD}"/>
+                  </a:ext>
+                </a:extLst>
+              </p:cNvPr>
+              <p:cNvSpPr txBox="1"/>
+              <p:nvPr/>
+            </p:nvSpPr>
+            <p:spPr>
+              <a:xfrm rot="16200000">
+                <a:off x="9650717" y="2449004"/>
+                <a:ext cx="444706" cy="369332"/>
+              </a:xfrm>
+              <a:prstGeom prst="rect">
+                <a:avLst/>
+              </a:prstGeom>
+              <a:noFill/>
+            </p:spPr>
+            <p:txBody>
+              <a:bodyPr wrap="square" rtlCol="0">
+                <a:spAutoFit/>
+              </a:bodyPr>
+              <a:lstStyle/>
+              <a:p>
+                <a:r>
+                  <a:rPr lang="pl-PL" dirty="0"/>
+                  <a:t>15</a:t>
+                </a:r>
+                <a:endParaRPr lang="en-US" dirty="0"/>
+              </a:p>
+            </p:txBody>
+          </p:sp>
+          <p:sp>
+            <p:nvSpPr>
+              <p:cNvPr id="125" name="pole tekstowe 124">
+                <a:extLst>
+                  <a:ext uri="{FF2B5EF4-FFF2-40B4-BE49-F238E27FC236}">
+                    <a16:creationId xmlns:a16="http://schemas.microsoft.com/office/drawing/2014/main" id="{F3205C69-3654-12F7-AEC4-E394FBF4EBB7}"/>
+                  </a:ext>
+                </a:extLst>
+              </p:cNvPr>
+              <p:cNvSpPr txBox="1"/>
+              <p:nvPr/>
+            </p:nvSpPr>
+            <p:spPr>
+              <a:xfrm rot="16200000">
+                <a:off x="9018078" y="2449004"/>
+                <a:ext cx="444706" cy="369332"/>
+              </a:xfrm>
+              <a:prstGeom prst="rect">
+                <a:avLst/>
+              </a:prstGeom>
+              <a:noFill/>
+            </p:spPr>
+            <p:txBody>
+              <a:bodyPr wrap="square" rtlCol="0">
+                <a:spAutoFit/>
+              </a:bodyPr>
+              <a:lstStyle/>
+              <a:p>
+                <a:r>
+                  <a:rPr lang="pl-PL" dirty="0"/>
+                  <a:t>16</a:t>
+                </a:r>
+                <a:endParaRPr lang="en-US" dirty="0"/>
+              </a:p>
+            </p:txBody>
+          </p:sp>
+          <p:sp>
+            <p:nvSpPr>
+              <p:cNvPr id="126" name="pole tekstowe 125">
+                <a:extLst>
+                  <a:ext uri="{FF2B5EF4-FFF2-40B4-BE49-F238E27FC236}">
+                    <a16:creationId xmlns:a16="http://schemas.microsoft.com/office/drawing/2014/main" id="{FCFB912D-060A-7684-A057-7EC4543C954D}"/>
+                  </a:ext>
+                </a:extLst>
+              </p:cNvPr>
+              <p:cNvSpPr txBox="1"/>
+              <p:nvPr/>
+            </p:nvSpPr>
+            <p:spPr>
+              <a:xfrm rot="16200000">
+                <a:off x="8392450" y="2449004"/>
+                <a:ext cx="444706" cy="369332"/>
+              </a:xfrm>
+              <a:prstGeom prst="rect">
+                <a:avLst/>
+              </a:prstGeom>
+              <a:noFill/>
+            </p:spPr>
+            <p:txBody>
+              <a:bodyPr wrap="square" rtlCol="0">
+                <a:spAutoFit/>
+              </a:bodyPr>
+              <a:lstStyle/>
+              <a:p>
+                <a:r>
+                  <a:rPr lang="pl-PL" dirty="0"/>
+                  <a:t>17</a:t>
+                </a:r>
+                <a:endParaRPr lang="en-US" dirty="0"/>
+              </a:p>
+            </p:txBody>
+          </p:sp>
+          <p:sp>
+            <p:nvSpPr>
+              <p:cNvPr id="127" name="pole tekstowe 126">
+                <a:extLst>
+                  <a:ext uri="{FF2B5EF4-FFF2-40B4-BE49-F238E27FC236}">
+                    <a16:creationId xmlns:a16="http://schemas.microsoft.com/office/drawing/2014/main" id="{319AE8C2-2E1A-6171-0CE3-34556A7B72E2}"/>
+                  </a:ext>
+                </a:extLst>
+              </p:cNvPr>
+              <p:cNvSpPr txBox="1"/>
+              <p:nvPr/>
+            </p:nvSpPr>
+            <p:spPr>
+              <a:xfrm rot="16200000">
+                <a:off x="7707370" y="2436878"/>
+                <a:ext cx="444706" cy="369332"/>
+              </a:xfrm>
+              <a:prstGeom prst="rect">
+                <a:avLst/>
+              </a:prstGeom>
+              <a:noFill/>
+            </p:spPr>
+            <p:txBody>
+              <a:bodyPr wrap="square" rtlCol="0">
+                <a:spAutoFit/>
+              </a:bodyPr>
+              <a:lstStyle/>
+              <a:p>
+                <a:r>
+                  <a:rPr lang="pl-PL" dirty="0"/>
+                  <a:t>18</a:t>
+                </a:r>
+                <a:endParaRPr lang="en-US" dirty="0"/>
+              </a:p>
+            </p:txBody>
+          </p:sp>
+          <p:sp>
+            <p:nvSpPr>
+              <p:cNvPr id="128" name="pole tekstowe 127">
+                <a:extLst>
+                  <a:ext uri="{FF2B5EF4-FFF2-40B4-BE49-F238E27FC236}">
+                    <a16:creationId xmlns:a16="http://schemas.microsoft.com/office/drawing/2014/main" id="{CB92E41A-6BF6-5244-FC5F-BED80EF53219}"/>
+                  </a:ext>
+                </a:extLst>
+              </p:cNvPr>
+              <p:cNvSpPr txBox="1"/>
+              <p:nvPr/>
+            </p:nvSpPr>
+            <p:spPr>
+              <a:xfrm rot="16200000">
+                <a:off x="7058210" y="2436878"/>
+                <a:ext cx="444706" cy="369332"/>
+              </a:xfrm>
+              <a:prstGeom prst="rect">
+                <a:avLst/>
+              </a:prstGeom>
+              <a:noFill/>
+            </p:spPr>
+            <p:txBody>
+              <a:bodyPr wrap="square" rtlCol="0">
+                <a:spAutoFit/>
+              </a:bodyPr>
+              <a:lstStyle/>
+              <a:p>
+                <a:r>
+                  <a:rPr lang="pl-PL" dirty="0"/>
+                  <a:t>19</a:t>
+                </a:r>
+                <a:endParaRPr lang="en-US" dirty="0"/>
+              </a:p>
+            </p:txBody>
+          </p:sp>
+          <p:sp>
+            <p:nvSpPr>
+              <p:cNvPr id="129" name="pole tekstowe 128">
+                <a:extLst>
+                  <a:ext uri="{FF2B5EF4-FFF2-40B4-BE49-F238E27FC236}">
+                    <a16:creationId xmlns:a16="http://schemas.microsoft.com/office/drawing/2014/main" id="{3D421298-B050-4ACE-EF0F-E79EC3F12DDF}"/>
+                  </a:ext>
+                </a:extLst>
+              </p:cNvPr>
+              <p:cNvSpPr txBox="1"/>
+              <p:nvPr/>
+            </p:nvSpPr>
+            <p:spPr>
+              <a:xfrm rot="16200000">
+                <a:off x="6420473" y="2454783"/>
+                <a:ext cx="444706" cy="369332"/>
+              </a:xfrm>
+              <a:prstGeom prst="rect">
+                <a:avLst/>
+              </a:prstGeom>
+              <a:noFill/>
+            </p:spPr>
+            <p:txBody>
+              <a:bodyPr wrap="square" rtlCol="0">
+                <a:spAutoFit/>
+              </a:bodyPr>
+              <a:lstStyle/>
+              <a:p>
+                <a:r>
+                  <a:rPr lang="pl-PL" dirty="0"/>
+                  <a:t>20</a:t>
+                </a:r>
+                <a:endParaRPr lang="en-US" dirty="0"/>
+              </a:p>
+            </p:txBody>
+          </p:sp>
+          <p:sp>
+            <p:nvSpPr>
+              <p:cNvPr id="130" name="pole tekstowe 129">
+                <a:extLst>
+                  <a:ext uri="{FF2B5EF4-FFF2-40B4-BE49-F238E27FC236}">
+                    <a16:creationId xmlns:a16="http://schemas.microsoft.com/office/drawing/2014/main" id="{16BCF062-534C-CCBB-33FA-31ED0A86E953}"/>
+                  </a:ext>
+                </a:extLst>
+              </p:cNvPr>
+              <p:cNvSpPr txBox="1"/>
+              <p:nvPr/>
+            </p:nvSpPr>
+            <p:spPr>
+              <a:xfrm rot="16200000">
+                <a:off x="5776010" y="2449004"/>
+                <a:ext cx="444706" cy="369332"/>
+              </a:xfrm>
+              <a:prstGeom prst="rect">
+                <a:avLst/>
+              </a:prstGeom>
+              <a:noFill/>
+            </p:spPr>
+            <p:txBody>
+              <a:bodyPr wrap="square" rtlCol="0">
+                <a:spAutoFit/>
+              </a:bodyPr>
+              <a:lstStyle/>
+              <a:p>
+                <a:r>
+                  <a:rPr lang="pl-PL" dirty="0"/>
+                  <a:t>21</a:t>
+                </a:r>
+                <a:endParaRPr lang="en-US" dirty="0"/>
+              </a:p>
+            </p:txBody>
+          </p:sp>
+          <p:sp>
+            <p:nvSpPr>
+              <p:cNvPr id="131" name="pole tekstowe 130">
+                <a:extLst>
+                  <a:ext uri="{FF2B5EF4-FFF2-40B4-BE49-F238E27FC236}">
+                    <a16:creationId xmlns:a16="http://schemas.microsoft.com/office/drawing/2014/main" id="{D1230D08-AAB5-8447-27BA-8E52B527AE1A}"/>
+                  </a:ext>
+                </a:extLst>
+              </p:cNvPr>
+              <p:cNvSpPr txBox="1"/>
+              <p:nvPr/>
+            </p:nvSpPr>
+            <p:spPr>
+              <a:xfrm rot="16200000">
+                <a:off x="5131547" y="2449004"/>
+                <a:ext cx="444706" cy="369332"/>
+              </a:xfrm>
+              <a:prstGeom prst="rect">
+                <a:avLst/>
+              </a:prstGeom>
+              <a:noFill/>
+            </p:spPr>
+            <p:txBody>
+              <a:bodyPr wrap="square" rtlCol="0">
+                <a:spAutoFit/>
+              </a:bodyPr>
+              <a:lstStyle/>
+              <a:p>
+                <a:r>
+                  <a:rPr lang="pl-PL" dirty="0"/>
+                  <a:t>22</a:t>
+                </a:r>
+                <a:endParaRPr lang="en-US" dirty="0"/>
+              </a:p>
+            </p:txBody>
+          </p:sp>
+          <p:sp>
+            <p:nvSpPr>
+              <p:cNvPr id="132" name="pole tekstowe 131">
+                <a:extLst>
+                  <a:ext uri="{FF2B5EF4-FFF2-40B4-BE49-F238E27FC236}">
+                    <a16:creationId xmlns:a16="http://schemas.microsoft.com/office/drawing/2014/main" id="{8500B431-2F81-5E74-AA98-EB6BCDCD69FE}"/>
+                  </a:ext>
+                </a:extLst>
+              </p:cNvPr>
+              <p:cNvSpPr txBox="1"/>
+              <p:nvPr/>
+            </p:nvSpPr>
+            <p:spPr>
+              <a:xfrm rot="16200000">
+                <a:off x="4501722" y="2449004"/>
+                <a:ext cx="444706" cy="369332"/>
+              </a:xfrm>
+              <a:prstGeom prst="rect">
+                <a:avLst/>
+              </a:prstGeom>
+              <a:noFill/>
+            </p:spPr>
+            <p:txBody>
+              <a:bodyPr wrap="square" rtlCol="0">
+                <a:spAutoFit/>
+              </a:bodyPr>
+              <a:lstStyle/>
+              <a:p>
+                <a:r>
+                  <a:rPr lang="pl-PL" dirty="0"/>
+                  <a:t>23</a:t>
+                </a:r>
+                <a:endParaRPr lang="en-US" dirty="0"/>
+              </a:p>
+            </p:txBody>
+          </p:sp>
+          <p:sp>
+            <p:nvSpPr>
+              <p:cNvPr id="133" name="pole tekstowe 132">
+                <a:extLst>
+                  <a:ext uri="{FF2B5EF4-FFF2-40B4-BE49-F238E27FC236}">
+                    <a16:creationId xmlns:a16="http://schemas.microsoft.com/office/drawing/2014/main" id="{7A87C389-4C46-6167-F401-4F05935D892F}"/>
+                  </a:ext>
+                </a:extLst>
+              </p:cNvPr>
+              <p:cNvSpPr txBox="1"/>
+              <p:nvPr/>
+            </p:nvSpPr>
+            <p:spPr>
+              <a:xfrm rot="16200000">
+                <a:off x="3870862" y="2436878"/>
+                <a:ext cx="444706" cy="369332"/>
+              </a:xfrm>
+              <a:prstGeom prst="rect">
+                <a:avLst/>
+              </a:prstGeom>
+              <a:noFill/>
+            </p:spPr>
+            <p:txBody>
+              <a:bodyPr wrap="square" rtlCol="0">
+                <a:spAutoFit/>
+              </a:bodyPr>
+              <a:lstStyle/>
+              <a:p>
+                <a:r>
+                  <a:rPr lang="pl-PL" dirty="0"/>
+                  <a:t>24</a:t>
+                </a:r>
+                <a:endParaRPr lang="en-US" dirty="0"/>
+              </a:p>
+            </p:txBody>
+          </p:sp>
+          <p:sp>
+            <p:nvSpPr>
+              <p:cNvPr id="134" name="pole tekstowe 133">
+                <a:extLst>
+                  <a:ext uri="{FF2B5EF4-FFF2-40B4-BE49-F238E27FC236}">
+                    <a16:creationId xmlns:a16="http://schemas.microsoft.com/office/drawing/2014/main" id="{22245732-ADCA-CF4C-0442-44E7EDB78F1A}"/>
+                  </a:ext>
+                </a:extLst>
+              </p:cNvPr>
+              <p:cNvSpPr txBox="1"/>
+              <p:nvPr/>
+            </p:nvSpPr>
+            <p:spPr>
+              <a:xfrm rot="16200000">
+                <a:off x="3241037" y="2436878"/>
+                <a:ext cx="444706" cy="369332"/>
+              </a:xfrm>
+              <a:prstGeom prst="rect">
+                <a:avLst/>
+              </a:prstGeom>
+              <a:noFill/>
+            </p:spPr>
+            <p:txBody>
+              <a:bodyPr wrap="square" rtlCol="0">
+                <a:spAutoFit/>
+              </a:bodyPr>
+              <a:lstStyle/>
+              <a:p>
+                <a:r>
+                  <a:rPr lang="pl-PL" dirty="0"/>
+                  <a:t>25</a:t>
+                </a:r>
+                <a:endParaRPr lang="en-US" dirty="0"/>
+              </a:p>
+            </p:txBody>
+          </p:sp>
+          <p:sp>
+            <p:nvSpPr>
+              <p:cNvPr id="135" name="pole tekstowe 134">
+                <a:extLst>
+                  <a:ext uri="{FF2B5EF4-FFF2-40B4-BE49-F238E27FC236}">
+                    <a16:creationId xmlns:a16="http://schemas.microsoft.com/office/drawing/2014/main" id="{CF8CCF90-FF71-F3C1-823D-8572BA13663C}"/>
+                  </a:ext>
+                </a:extLst>
+              </p:cNvPr>
+              <p:cNvSpPr txBox="1"/>
+              <p:nvPr/>
+            </p:nvSpPr>
+            <p:spPr>
+              <a:xfrm rot="16200000">
+                <a:off x="2611212" y="2449004"/>
+                <a:ext cx="444706" cy="369332"/>
+              </a:xfrm>
+              <a:prstGeom prst="rect">
+                <a:avLst/>
+              </a:prstGeom>
+              <a:noFill/>
+            </p:spPr>
+            <p:txBody>
+              <a:bodyPr wrap="square" rtlCol="0">
+                <a:spAutoFit/>
+              </a:bodyPr>
+              <a:lstStyle/>
+              <a:p>
+                <a:r>
+                  <a:rPr lang="pl-PL" dirty="0"/>
+                  <a:t>26</a:t>
+                </a:r>
+                <a:endParaRPr lang="en-US" dirty="0"/>
+              </a:p>
+            </p:txBody>
+          </p:sp>
+          <p:sp>
+            <p:nvSpPr>
+              <p:cNvPr id="136" name="pole tekstowe 135">
+                <a:extLst>
+                  <a:ext uri="{FF2B5EF4-FFF2-40B4-BE49-F238E27FC236}">
+                    <a16:creationId xmlns:a16="http://schemas.microsoft.com/office/drawing/2014/main" id="{F8F3B888-10A8-B1CB-0054-C89525435DD4}"/>
+                  </a:ext>
+                </a:extLst>
+              </p:cNvPr>
+              <p:cNvSpPr txBox="1"/>
+              <p:nvPr/>
+            </p:nvSpPr>
+            <p:spPr>
+              <a:xfrm rot="16200000">
+                <a:off x="1994994" y="2449004"/>
+                <a:ext cx="444706" cy="369332"/>
+              </a:xfrm>
+              <a:prstGeom prst="rect">
+                <a:avLst/>
+              </a:prstGeom>
+              <a:noFill/>
+            </p:spPr>
+            <p:txBody>
+              <a:bodyPr wrap="square" rtlCol="0">
+                <a:spAutoFit/>
+              </a:bodyPr>
+              <a:lstStyle/>
+              <a:p>
+                <a:r>
+                  <a:rPr lang="pl-PL" dirty="0"/>
+                  <a:t>27</a:t>
+                </a:r>
+                <a:endParaRPr lang="en-US" dirty="0"/>
+              </a:p>
+            </p:txBody>
+          </p:sp>
+          <p:sp>
+            <p:nvSpPr>
+              <p:cNvPr id="137" name="pole tekstowe 136">
+                <a:extLst>
+                  <a:ext uri="{FF2B5EF4-FFF2-40B4-BE49-F238E27FC236}">
+                    <a16:creationId xmlns:a16="http://schemas.microsoft.com/office/drawing/2014/main" id="{D130BBA7-A815-B3A8-007B-164FED4AF02A}"/>
+                  </a:ext>
+                </a:extLst>
+              </p:cNvPr>
+              <p:cNvSpPr txBox="1"/>
+              <p:nvPr/>
+            </p:nvSpPr>
+            <p:spPr>
+              <a:xfrm rot="16200000">
+                <a:off x="1411813" y="2449004"/>
+                <a:ext cx="444706" cy="369332"/>
+              </a:xfrm>
+              <a:prstGeom prst="rect">
+                <a:avLst/>
+              </a:prstGeom>
+              <a:noFill/>
+            </p:spPr>
+            <p:txBody>
+              <a:bodyPr wrap="square" rtlCol="0">
+                <a:spAutoFit/>
+              </a:bodyPr>
+              <a:lstStyle/>
+              <a:p>
+                <a:r>
+                  <a:rPr lang="pl-PL" dirty="0"/>
+                  <a:t>28</a:t>
+                </a:r>
+                <a:endParaRPr lang="en-US" dirty="0"/>
+              </a:p>
+            </p:txBody>
+          </p:sp>
+        </p:grpSp>
+      </p:grpSp>
+    </p:spTree>
+    <p:extLst>
+      <p:ext uri="{BB962C8B-B14F-4D97-AF65-F5344CB8AC3E}">
+        <p14:creationId xmlns:p14="http://schemas.microsoft.com/office/powerpoint/2010/main" val="2269656383"/>
+      </p:ext>
+    </p:extLst>
+  </p:cSld>
+  <p:clrMapOvr>
+    <a:masterClrMapping/>
+  </p:clrMapOvr>
+</p:sld>
+</file>
+
+<file path=ppt/slides/slide4.xml><?xml version="1.0" encoding="utf-8"?>
+<p:sld xmlns:a="http://schemas.openxmlformats.org/drawingml/2006/main" xmlns:r="http://schemas.openxmlformats.org/officeDocument/2006/relationships" xmlns:p="http://schemas.openxmlformats.org/presentationml/2006/main">
+  <p:cSld>
+    <p:spTree>
+      <p:nvGrpSpPr>
+        <p:cNvPr id="1" name="">
+          <a:extLst>
+            <a:ext uri="{FF2B5EF4-FFF2-40B4-BE49-F238E27FC236}">
+              <a16:creationId xmlns:a16="http://schemas.microsoft.com/office/drawing/2014/main" id="{440BBC94-BBEB-BABB-B8E2-3423518F095F}"/>
+            </a:ext>
+          </a:extLst>
+        </p:cNvPr>
+        <p:cNvGrpSpPr/>
+        <p:nvPr/>
+      </p:nvGrpSpPr>
+      <p:grpSpPr>
+        <a:xfrm>
+          <a:off x="0" y="0"/>
+          <a:ext cx="0" cy="0"/>
+          <a:chOff x="0" y="0"/>
+          <a:chExt cx="0" cy="0"/>
+        </a:xfrm>
+      </p:grpSpPr>
+      <p:grpSp>
+        <p:nvGrpSpPr>
+          <p:cNvPr id="123" name="Grupa 122">
+            <a:extLst>
+              <a:ext uri="{FF2B5EF4-FFF2-40B4-BE49-F238E27FC236}">
+                <a16:creationId xmlns:a16="http://schemas.microsoft.com/office/drawing/2014/main" id="{E88F6C35-92E3-5389-FB02-2E7714C04D9C}"/>
+              </a:ext>
+            </a:extLst>
+          </p:cNvPr>
+          <p:cNvGrpSpPr/>
+          <p:nvPr/>
+        </p:nvGrpSpPr>
+        <p:grpSpPr>
+          <a:xfrm>
+            <a:off x="1204687" y="1233713"/>
+            <a:ext cx="9158514" cy="3567169"/>
+            <a:chOff x="1204687" y="1233713"/>
+            <a:chExt cx="9158514" cy="3567169"/>
+          </a:xfrm>
+        </p:grpSpPr>
+        <p:sp>
+          <p:nvSpPr>
+            <p:cNvPr id="26" name="Prostokąt 25">
+              <a:extLst>
+                <a:ext uri="{FF2B5EF4-FFF2-40B4-BE49-F238E27FC236}">
+                  <a16:creationId xmlns:a16="http://schemas.microsoft.com/office/drawing/2014/main" id="{275793B0-25EF-87B0-B69F-E8232BD0E258}"/>
+                </a:ext>
+              </a:extLst>
+            </p:cNvPr>
+            <p:cNvSpPr/>
+            <p:nvPr/>
+          </p:nvSpPr>
+          <p:spPr>
+            <a:xfrm rot="16200000">
+              <a:off x="4584730" y="-1462614"/>
+              <a:ext cx="2398427" cy="9158514"/>
+            </a:xfrm>
+            <a:prstGeom prst="rect">
+              <a:avLst/>
+            </a:prstGeom>
+            <a:solidFill>
+              <a:schemeClr val="accent4">
+                <a:lumMod val="40000"/>
+                <a:lumOff val="60000"/>
+              </a:schemeClr>
+            </a:solidFill>
+          </p:spPr>
+          <p:style>
+            <a:lnRef idx="2">
+              <a:schemeClr val="accent1">
+                <a:shade val="15000"/>
+              </a:schemeClr>
+            </a:lnRef>
+            <a:fillRef idx="1">
+              <a:schemeClr val="accent1"/>
+            </a:fillRef>
+            <a:effectRef idx="0">
+              <a:schemeClr val="accent1"/>
+            </a:effectRef>
+            <a:fontRef idx="minor">
+              <a:schemeClr val="lt1"/>
+            </a:fontRef>
+          </p:style>
+          <p:txBody>
+            <a:bodyPr rtlCol="0" anchor="ctr"/>
+            <a:lstStyle/>
+            <a:p>
+              <a:pPr algn="ctr"/>
+              <a:endParaRPr lang="en-US"/>
+            </a:p>
+          </p:txBody>
+        </p:sp>
+        <p:grpSp>
+          <p:nvGrpSpPr>
+            <p:cNvPr id="59" name="Grupa 58">
+              <a:extLst>
+                <a:ext uri="{FF2B5EF4-FFF2-40B4-BE49-F238E27FC236}">
+                  <a16:creationId xmlns:a16="http://schemas.microsoft.com/office/drawing/2014/main" id="{7339F31E-F673-4EE5-9BB6-C1145778C281}"/>
+                </a:ext>
+              </a:extLst>
+            </p:cNvPr>
+            <p:cNvGrpSpPr/>
+            <p:nvPr/>
+          </p:nvGrpSpPr>
+          <p:grpSpPr>
+            <a:xfrm>
+              <a:off x="1395989" y="3843658"/>
+              <a:ext cx="8757111" cy="957224"/>
+              <a:chOff x="1395989" y="3843658"/>
+              <a:chExt cx="8757111" cy="957224"/>
+            </a:xfrm>
+          </p:grpSpPr>
+          <p:sp>
+            <p:nvSpPr>
+              <p:cNvPr id="27" name="Prostokąt: zaokrąglone rogi 26">
+                <a:extLst>
+                  <a:ext uri="{FF2B5EF4-FFF2-40B4-BE49-F238E27FC236}">
+                    <a16:creationId xmlns:a16="http://schemas.microsoft.com/office/drawing/2014/main" id="{BB03E8F1-ED04-C838-88C0-8150D058946B}"/>
+                  </a:ext>
+                </a:extLst>
+              </p:cNvPr>
+              <p:cNvSpPr/>
+              <p:nvPr/>
+            </p:nvSpPr>
+            <p:spPr>
+              <a:xfrm rot="16200000">
+                <a:off x="1156146" y="4083509"/>
+                <a:ext cx="944381" cy="464695"/>
+              </a:xfrm>
+              <a:prstGeom prst="roundRect">
+                <a:avLst/>
+              </a:prstGeom>
+            </p:spPr>
+            <p:style>
+              <a:lnRef idx="1">
+                <a:schemeClr val="accent3"/>
+              </a:lnRef>
+              <a:fillRef idx="3">
+                <a:schemeClr val="accent3"/>
+              </a:fillRef>
+              <a:effectRef idx="2">
+                <a:schemeClr val="accent3"/>
+              </a:effectRef>
+              <a:fontRef idx="minor">
+                <a:schemeClr val="lt1"/>
+              </a:fontRef>
+            </p:style>
+            <p:txBody>
+              <a:bodyPr rtlCol="0" anchor="ctr"/>
+              <a:lstStyle/>
+              <a:p>
+                <a:pPr algn="ctr"/>
+                <a:r>
+                  <a:rPr lang="pl-PL" sz="2400" b="1" dirty="0"/>
+                  <a:t>GPB0</a:t>
+                </a:r>
+                <a:endParaRPr lang="en-US" b="1" dirty="0"/>
+              </a:p>
+            </p:txBody>
+          </p:sp>
+          <p:sp>
+            <p:nvSpPr>
+              <p:cNvPr id="28" name="Prostokąt: zaokrąglone rogi 27">
+                <a:extLst>
+                  <a:ext uri="{FF2B5EF4-FFF2-40B4-BE49-F238E27FC236}">
+                    <a16:creationId xmlns:a16="http://schemas.microsoft.com/office/drawing/2014/main" id="{5C7F5403-3592-B833-455D-56B12B6509EE}"/>
+                  </a:ext>
+                </a:extLst>
+              </p:cNvPr>
+              <p:cNvSpPr/>
+              <p:nvPr/>
+            </p:nvSpPr>
+            <p:spPr>
+              <a:xfrm rot="16200000">
+                <a:off x="1785971" y="4083509"/>
+                <a:ext cx="944381" cy="464695"/>
+              </a:xfrm>
+              <a:prstGeom prst="roundRect">
+                <a:avLst/>
+              </a:prstGeom>
+            </p:spPr>
+            <p:style>
+              <a:lnRef idx="1">
+                <a:schemeClr val="accent3"/>
+              </a:lnRef>
+              <a:fillRef idx="3">
+                <a:schemeClr val="accent3"/>
+              </a:fillRef>
+              <a:effectRef idx="2">
+                <a:schemeClr val="accent3"/>
+              </a:effectRef>
+              <a:fontRef idx="minor">
+                <a:schemeClr val="lt1"/>
+              </a:fontRef>
+            </p:style>
+            <p:txBody>
+              <a:bodyPr rtlCol="0" anchor="ctr"/>
+              <a:lstStyle/>
+              <a:p>
+                <a:pPr algn="ctr"/>
+                <a:r>
+                  <a:rPr lang="pl-PL" sz="2400" b="1" dirty="0"/>
+                  <a:t>GBP1</a:t>
+                </a:r>
+                <a:endParaRPr lang="en-US" b="1" dirty="0"/>
+              </a:p>
+            </p:txBody>
+          </p:sp>
+          <p:sp>
+            <p:nvSpPr>
+              <p:cNvPr id="39" name="Prostokąt: zaokrąglone rogi 38">
+                <a:extLst>
+                  <a:ext uri="{FF2B5EF4-FFF2-40B4-BE49-F238E27FC236}">
+                    <a16:creationId xmlns:a16="http://schemas.microsoft.com/office/drawing/2014/main" id="{220BE82C-8FA3-1464-E02A-AAC82450E81F}"/>
+                  </a:ext>
+                </a:extLst>
+              </p:cNvPr>
+              <p:cNvSpPr/>
+              <p:nvPr/>
+            </p:nvSpPr>
+            <p:spPr>
+              <a:xfrm rot="16200000">
+                <a:off x="2415795" y="4083508"/>
+                <a:ext cx="944381" cy="464695"/>
+              </a:xfrm>
+              <a:prstGeom prst="roundRect">
+                <a:avLst/>
+              </a:prstGeom>
+            </p:spPr>
+            <p:style>
+              <a:lnRef idx="1">
+                <a:schemeClr val="accent3"/>
+              </a:lnRef>
+              <a:fillRef idx="3">
+                <a:schemeClr val="accent3"/>
+              </a:fillRef>
+              <a:effectRef idx="2">
+                <a:schemeClr val="accent3"/>
+              </a:effectRef>
+              <a:fontRef idx="minor">
+                <a:schemeClr val="lt1"/>
+              </a:fontRef>
+            </p:style>
+            <p:txBody>
+              <a:bodyPr rtlCol="0" anchor="ctr"/>
+              <a:lstStyle/>
+              <a:p>
+                <a:pPr algn="ctr"/>
+                <a:r>
+                  <a:rPr lang="pl-PL" sz="2400" b="1" dirty="0"/>
+                  <a:t>GPB2</a:t>
+                </a:r>
+                <a:endParaRPr lang="en-US" b="1" dirty="0"/>
+              </a:p>
+            </p:txBody>
+          </p:sp>
+          <p:sp>
+            <p:nvSpPr>
+              <p:cNvPr id="40" name="Prostokąt: zaokrąglone rogi 39">
+                <a:extLst>
+                  <a:ext uri="{FF2B5EF4-FFF2-40B4-BE49-F238E27FC236}">
+                    <a16:creationId xmlns:a16="http://schemas.microsoft.com/office/drawing/2014/main" id="{FE60D8FF-5A00-7D41-EC53-EB6DE8561C68}"/>
+                  </a:ext>
+                </a:extLst>
+              </p:cNvPr>
+              <p:cNvSpPr/>
+              <p:nvPr/>
+            </p:nvSpPr>
+            <p:spPr>
+              <a:xfrm rot="16200000">
+                <a:off x="3045620" y="4083507"/>
+                <a:ext cx="944381" cy="464695"/>
+              </a:xfrm>
+              <a:prstGeom prst="roundRect">
+                <a:avLst/>
+              </a:prstGeom>
+            </p:spPr>
+            <p:style>
+              <a:lnRef idx="1">
+                <a:schemeClr val="accent3"/>
+              </a:lnRef>
+              <a:fillRef idx="3">
+                <a:schemeClr val="accent3"/>
+              </a:fillRef>
+              <a:effectRef idx="2">
+                <a:schemeClr val="accent3"/>
+              </a:effectRef>
+              <a:fontRef idx="minor">
+                <a:schemeClr val="lt1"/>
+              </a:fontRef>
+            </p:style>
+            <p:txBody>
+              <a:bodyPr rtlCol="0" anchor="ctr"/>
+              <a:lstStyle/>
+              <a:p>
+                <a:pPr algn="ctr"/>
+                <a:r>
+                  <a:rPr lang="pl-PL" sz="2400" b="1" dirty="0"/>
+                  <a:t>GPB3</a:t>
+                </a:r>
+                <a:endParaRPr lang="en-US" sz="2400" b="1" dirty="0"/>
+              </a:p>
+            </p:txBody>
+          </p:sp>
+          <p:sp>
+            <p:nvSpPr>
+              <p:cNvPr id="44" name="Prostokąt: zaokrąglone rogi 43">
+                <a:extLst>
+                  <a:ext uri="{FF2B5EF4-FFF2-40B4-BE49-F238E27FC236}">
+                    <a16:creationId xmlns:a16="http://schemas.microsoft.com/office/drawing/2014/main" id="{13E385C2-380C-4ED8-D3A5-2239F958E7D3}"/>
+                  </a:ext>
+                </a:extLst>
+              </p:cNvPr>
+              <p:cNvSpPr/>
+              <p:nvPr/>
+            </p:nvSpPr>
+            <p:spPr>
+              <a:xfrm rot="16200000">
+                <a:off x="3675444" y="4083506"/>
+                <a:ext cx="944381" cy="464695"/>
+              </a:xfrm>
+              <a:prstGeom prst="roundRect">
+                <a:avLst/>
+              </a:prstGeom>
+            </p:spPr>
+            <p:style>
+              <a:lnRef idx="1">
+                <a:schemeClr val="accent3"/>
+              </a:lnRef>
+              <a:fillRef idx="3">
+                <a:schemeClr val="accent3"/>
+              </a:fillRef>
+              <a:effectRef idx="2">
+                <a:schemeClr val="accent3"/>
+              </a:effectRef>
+              <a:fontRef idx="minor">
+                <a:schemeClr val="lt1"/>
+              </a:fontRef>
+            </p:style>
+            <p:txBody>
+              <a:bodyPr rtlCol="0" anchor="ctr"/>
+              <a:lstStyle/>
+              <a:p>
+                <a:pPr algn="ctr"/>
+                <a:r>
+                  <a:rPr lang="pl-PL" sz="2400" b="1" dirty="0"/>
+                  <a:t>GPB4</a:t>
+                </a:r>
+                <a:endParaRPr lang="en-US" sz="2400" b="1" dirty="0"/>
+              </a:p>
+            </p:txBody>
+          </p:sp>
+          <p:sp>
+            <p:nvSpPr>
+              <p:cNvPr id="47" name="Prostokąt: zaokrąglone rogi 46">
+                <a:extLst>
+                  <a:ext uri="{FF2B5EF4-FFF2-40B4-BE49-F238E27FC236}">
+                    <a16:creationId xmlns:a16="http://schemas.microsoft.com/office/drawing/2014/main" id="{4833AC27-D53A-A66D-D993-6C44DB1DBA2D}"/>
+                  </a:ext>
+                </a:extLst>
+              </p:cNvPr>
+              <p:cNvSpPr/>
+              <p:nvPr/>
+            </p:nvSpPr>
+            <p:spPr>
+              <a:xfrm rot="16200000">
+                <a:off x="4305268" y="4083505"/>
+                <a:ext cx="944381" cy="464695"/>
+              </a:xfrm>
+              <a:prstGeom prst="roundRect">
+                <a:avLst/>
+              </a:prstGeom>
+            </p:spPr>
+            <p:style>
+              <a:lnRef idx="1">
+                <a:schemeClr val="accent3"/>
+              </a:lnRef>
+              <a:fillRef idx="3">
+                <a:schemeClr val="accent3"/>
+              </a:fillRef>
+              <a:effectRef idx="2">
+                <a:schemeClr val="accent3"/>
+              </a:effectRef>
+              <a:fontRef idx="minor">
+                <a:schemeClr val="lt1"/>
+              </a:fontRef>
+            </p:style>
+            <p:txBody>
+              <a:bodyPr rtlCol="0" anchor="ctr"/>
+              <a:lstStyle/>
+              <a:p>
+                <a:pPr algn="ctr"/>
+                <a:r>
+                  <a:rPr lang="pl-PL" sz="2400" b="1" dirty="0"/>
+                  <a:t>GPB5</a:t>
+                </a:r>
+                <a:endParaRPr lang="en-US" sz="2400" b="1" dirty="0"/>
+              </a:p>
+            </p:txBody>
+          </p:sp>
+          <p:sp>
+            <p:nvSpPr>
+              <p:cNvPr id="49" name="Prostokąt: zaokrąglone rogi 48">
+                <a:extLst>
+                  <a:ext uri="{FF2B5EF4-FFF2-40B4-BE49-F238E27FC236}">
+                    <a16:creationId xmlns:a16="http://schemas.microsoft.com/office/drawing/2014/main" id="{7BD3FAD0-84B6-44DC-7262-FA968B6A74DA}"/>
+                  </a:ext>
+                </a:extLst>
+              </p:cNvPr>
+              <p:cNvSpPr/>
+              <p:nvPr/>
+            </p:nvSpPr>
+            <p:spPr>
+              <a:xfrm rot="16200000">
+                <a:off x="4935092" y="4083504"/>
+                <a:ext cx="944381" cy="464695"/>
+              </a:xfrm>
+              <a:prstGeom prst="roundRect">
+                <a:avLst/>
+              </a:prstGeom>
+            </p:spPr>
+            <p:style>
+              <a:lnRef idx="1">
+                <a:schemeClr val="accent3"/>
+              </a:lnRef>
+              <a:fillRef idx="3">
+                <a:schemeClr val="accent3"/>
+              </a:fillRef>
+              <a:effectRef idx="2">
+                <a:schemeClr val="accent3"/>
+              </a:effectRef>
+              <a:fontRef idx="minor">
+                <a:schemeClr val="lt1"/>
+              </a:fontRef>
+            </p:style>
+            <p:txBody>
+              <a:bodyPr rtlCol="0" anchor="ctr"/>
+              <a:lstStyle/>
+              <a:p>
+                <a:pPr algn="ctr"/>
+                <a:r>
+                  <a:rPr lang="pl-PL" sz="2400" b="1" dirty="0"/>
+                  <a:t>GPB6</a:t>
+                </a:r>
+                <a:endParaRPr lang="en-US" sz="2400" b="1" dirty="0"/>
+              </a:p>
+            </p:txBody>
+          </p:sp>
+          <p:sp>
+            <p:nvSpPr>
+              <p:cNvPr id="52" name="Prostokąt: zaokrąglone rogi 51">
+                <a:extLst>
+                  <a:ext uri="{FF2B5EF4-FFF2-40B4-BE49-F238E27FC236}">
+                    <a16:creationId xmlns:a16="http://schemas.microsoft.com/office/drawing/2014/main" id="{3D7493DC-89A2-3580-E27C-2E1899C0CA51}"/>
+                  </a:ext>
+                </a:extLst>
+              </p:cNvPr>
+              <p:cNvSpPr/>
+              <p:nvPr/>
+            </p:nvSpPr>
+            <p:spPr>
+              <a:xfrm rot="16200000">
+                <a:off x="5564916" y="4083503"/>
+                <a:ext cx="944381" cy="464695"/>
+              </a:xfrm>
+              <a:prstGeom prst="roundRect">
+                <a:avLst/>
+              </a:prstGeom>
+            </p:spPr>
+            <p:style>
+              <a:lnRef idx="1">
+                <a:schemeClr val="accent3"/>
+              </a:lnRef>
+              <a:fillRef idx="3">
+                <a:schemeClr val="accent3"/>
+              </a:fillRef>
+              <a:effectRef idx="2">
+                <a:schemeClr val="accent3"/>
+              </a:effectRef>
+              <a:fontRef idx="minor">
+                <a:schemeClr val="lt1"/>
+              </a:fontRef>
+            </p:style>
+            <p:txBody>
+              <a:bodyPr rtlCol="0" anchor="ctr"/>
+              <a:lstStyle/>
+              <a:p>
+                <a:pPr algn="ctr"/>
+                <a:r>
+                  <a:rPr lang="pl-PL" sz="2400" b="1" dirty="0"/>
+                  <a:t>GPB7</a:t>
+                </a:r>
+                <a:endParaRPr lang="en-US" sz="2400" b="1" dirty="0"/>
+              </a:p>
+            </p:txBody>
+          </p:sp>
+          <p:sp>
+            <p:nvSpPr>
+              <p:cNvPr id="53" name="Prostokąt: zaokrąglone rogi 52">
+                <a:extLst>
+                  <a:ext uri="{FF2B5EF4-FFF2-40B4-BE49-F238E27FC236}">
+                    <a16:creationId xmlns:a16="http://schemas.microsoft.com/office/drawing/2014/main" id="{A3F7DAD6-266D-3B2A-51A5-EE39DBDF0C44}"/>
+                  </a:ext>
+                </a:extLst>
+              </p:cNvPr>
+              <p:cNvSpPr/>
+              <p:nvPr/>
+            </p:nvSpPr>
+            <p:spPr>
+              <a:xfrm rot="16200000">
+                <a:off x="6220915" y="4083503"/>
+                <a:ext cx="944381" cy="464695"/>
+              </a:xfrm>
+              <a:prstGeom prst="roundRect">
+                <a:avLst/>
+              </a:prstGeom>
+            </p:spPr>
+            <p:style>
+              <a:lnRef idx="1">
+                <a:schemeClr val="accent3"/>
+              </a:lnRef>
+              <a:fillRef idx="3">
+                <a:schemeClr val="accent3"/>
+              </a:fillRef>
+              <a:effectRef idx="2">
+                <a:schemeClr val="accent3"/>
+              </a:effectRef>
+              <a:fontRef idx="minor">
+                <a:schemeClr val="lt1"/>
+              </a:fontRef>
+            </p:style>
+            <p:txBody>
+              <a:bodyPr rtlCol="0" anchor="ctr"/>
+              <a:lstStyle/>
+              <a:p>
+                <a:pPr algn="ctr"/>
+                <a:r>
+                  <a:rPr lang="pl-PL" sz="2400" b="1" dirty="0"/>
+                  <a:t>VDD</a:t>
+                </a:r>
+                <a:endParaRPr lang="en-US" b="1" dirty="0"/>
+              </a:p>
+            </p:txBody>
+          </p:sp>
+          <p:sp>
+            <p:nvSpPr>
+              <p:cNvPr id="54" name="Prostokąt: zaokrąglone rogi 53">
+                <a:extLst>
+                  <a:ext uri="{FF2B5EF4-FFF2-40B4-BE49-F238E27FC236}">
+                    <a16:creationId xmlns:a16="http://schemas.microsoft.com/office/drawing/2014/main" id="{95D7FFBB-B4BA-6D7F-B470-177F77DE967A}"/>
+                  </a:ext>
+                </a:extLst>
+              </p:cNvPr>
+              <p:cNvSpPr/>
+              <p:nvPr/>
+            </p:nvSpPr>
+            <p:spPr>
+              <a:xfrm rot="16200000">
+                <a:off x="6850740" y="4096344"/>
+                <a:ext cx="944381" cy="464695"/>
+              </a:xfrm>
+              <a:prstGeom prst="roundRect">
+                <a:avLst/>
+              </a:prstGeom>
+            </p:spPr>
+            <p:style>
+              <a:lnRef idx="1">
+                <a:schemeClr val="accent3"/>
+              </a:lnRef>
+              <a:fillRef idx="3">
+                <a:schemeClr val="accent3"/>
+              </a:fillRef>
+              <a:effectRef idx="2">
+                <a:schemeClr val="accent3"/>
+              </a:effectRef>
+              <a:fontRef idx="minor">
+                <a:schemeClr val="lt1"/>
+              </a:fontRef>
+            </p:style>
+            <p:txBody>
+              <a:bodyPr rtlCol="0" anchor="ctr"/>
+              <a:lstStyle/>
+              <a:p>
+                <a:pPr algn="ctr"/>
+                <a:r>
+                  <a:rPr lang="pl-PL" sz="2400" b="1" dirty="0"/>
+                  <a:t>VSS</a:t>
+                </a:r>
+                <a:endParaRPr lang="en-US" b="1" dirty="0"/>
+              </a:p>
+            </p:txBody>
+          </p:sp>
+          <p:sp>
+            <p:nvSpPr>
+              <p:cNvPr id="55" name="Prostokąt: zaokrąglone rogi 54">
+                <a:extLst>
+                  <a:ext uri="{FF2B5EF4-FFF2-40B4-BE49-F238E27FC236}">
+                    <a16:creationId xmlns:a16="http://schemas.microsoft.com/office/drawing/2014/main" id="{B36E3B33-87BD-4955-5FE1-56443D7A3000}"/>
+                  </a:ext>
+                </a:extLst>
+              </p:cNvPr>
+              <p:cNvSpPr/>
+              <p:nvPr/>
+            </p:nvSpPr>
+            <p:spPr>
+              <a:xfrm rot="16200000">
+                <a:off x="7506739" y="4083502"/>
+                <a:ext cx="944381" cy="464695"/>
+              </a:xfrm>
+              <a:prstGeom prst="roundRect">
+                <a:avLst/>
+              </a:prstGeom>
+            </p:spPr>
+            <p:style>
+              <a:lnRef idx="1">
+                <a:schemeClr val="accent3"/>
+              </a:lnRef>
+              <a:fillRef idx="3">
+                <a:schemeClr val="accent3"/>
+              </a:fillRef>
+              <a:effectRef idx="2">
+                <a:schemeClr val="accent3"/>
+              </a:effectRef>
+              <a:fontRef idx="minor">
+                <a:schemeClr val="lt1"/>
+              </a:fontRef>
+            </p:style>
+            <p:txBody>
+              <a:bodyPr rtlCol="0" anchor="ctr"/>
+              <a:lstStyle/>
+              <a:p>
+                <a:pPr algn="ctr"/>
+                <a:r>
+                  <a:rPr lang="pl-PL" sz="2400" b="1" dirty="0"/>
+                  <a:t>NC</a:t>
+                </a:r>
+                <a:endParaRPr lang="en-US" b="1" dirty="0"/>
+              </a:p>
+            </p:txBody>
+          </p:sp>
+          <p:sp>
+            <p:nvSpPr>
+              <p:cNvPr id="56" name="Prostokąt: zaokrąglone rogi 55">
+                <a:extLst>
+                  <a:ext uri="{FF2B5EF4-FFF2-40B4-BE49-F238E27FC236}">
+                    <a16:creationId xmlns:a16="http://schemas.microsoft.com/office/drawing/2014/main" id="{484891E9-6578-67F7-7E96-3D7DA0D1914A}"/>
+                  </a:ext>
+                </a:extLst>
+              </p:cNvPr>
+              <p:cNvSpPr/>
+              <p:nvPr/>
+            </p:nvSpPr>
+            <p:spPr>
+              <a:xfrm rot="16200000">
+                <a:off x="8162739" y="4083501"/>
+                <a:ext cx="944381" cy="464695"/>
+              </a:xfrm>
+              <a:prstGeom prst="roundRect">
+                <a:avLst/>
+              </a:prstGeom>
+            </p:spPr>
+            <p:style>
+              <a:lnRef idx="1">
+                <a:schemeClr val="accent3"/>
+              </a:lnRef>
+              <a:fillRef idx="3">
+                <a:schemeClr val="accent3"/>
+              </a:fillRef>
+              <a:effectRef idx="2">
+                <a:schemeClr val="accent3"/>
+              </a:effectRef>
+              <a:fontRef idx="minor">
+                <a:schemeClr val="lt1"/>
+              </a:fontRef>
+            </p:style>
+            <p:txBody>
+              <a:bodyPr rtlCol="0" anchor="ctr"/>
+              <a:lstStyle/>
+              <a:p>
+                <a:pPr algn="ctr"/>
+                <a:r>
+                  <a:rPr lang="pl-PL" sz="2400" b="1" dirty="0"/>
+                  <a:t>SCK</a:t>
+                </a:r>
+                <a:endParaRPr lang="en-US" b="1" dirty="0"/>
+              </a:p>
+            </p:txBody>
+          </p:sp>
+          <p:sp>
+            <p:nvSpPr>
+              <p:cNvPr id="57" name="Prostokąt: zaokrąglone rogi 56">
+                <a:extLst>
+                  <a:ext uri="{FF2B5EF4-FFF2-40B4-BE49-F238E27FC236}">
+                    <a16:creationId xmlns:a16="http://schemas.microsoft.com/office/drawing/2014/main" id="{836E2E0E-92A1-320A-D79F-01D20EF60F85}"/>
+                  </a:ext>
+                </a:extLst>
+              </p:cNvPr>
+              <p:cNvSpPr/>
+              <p:nvPr/>
+            </p:nvSpPr>
+            <p:spPr>
+              <a:xfrm rot="16200000">
+                <a:off x="8792563" y="4096343"/>
+                <a:ext cx="944381" cy="464695"/>
+              </a:xfrm>
+              <a:prstGeom prst="roundRect">
+                <a:avLst/>
+              </a:prstGeom>
+            </p:spPr>
+            <p:style>
+              <a:lnRef idx="1">
+                <a:schemeClr val="accent3"/>
+              </a:lnRef>
+              <a:fillRef idx="3">
+                <a:schemeClr val="accent3"/>
+              </a:fillRef>
+              <a:effectRef idx="2">
+                <a:schemeClr val="accent3"/>
+              </a:effectRef>
+              <a:fontRef idx="minor">
+                <a:schemeClr val="lt1"/>
+              </a:fontRef>
+            </p:style>
+            <p:txBody>
+              <a:bodyPr rtlCol="0" anchor="ctr"/>
+              <a:lstStyle/>
+              <a:p>
+                <a:pPr algn="ctr"/>
+                <a:r>
+                  <a:rPr lang="pl-PL" sz="2400" b="1" dirty="0"/>
+                  <a:t>SDA</a:t>
+                </a:r>
+                <a:endParaRPr lang="en-US" b="1" dirty="0"/>
+              </a:p>
+            </p:txBody>
+          </p:sp>
+          <p:sp>
+            <p:nvSpPr>
+              <p:cNvPr id="58" name="Prostokąt: zaokrąglone rogi 57">
+                <a:extLst>
+                  <a:ext uri="{FF2B5EF4-FFF2-40B4-BE49-F238E27FC236}">
+                    <a16:creationId xmlns:a16="http://schemas.microsoft.com/office/drawing/2014/main" id="{C04652FB-F401-9ADC-2FF1-61F502D6DF9F}"/>
+                  </a:ext>
+                </a:extLst>
+              </p:cNvPr>
+              <p:cNvSpPr/>
+              <p:nvPr/>
+            </p:nvSpPr>
+            <p:spPr>
+              <a:xfrm rot="16200000">
+                <a:off x="9448562" y="4096342"/>
+                <a:ext cx="944381" cy="464695"/>
+              </a:xfrm>
+              <a:prstGeom prst="roundRect">
+                <a:avLst/>
+              </a:prstGeom>
+            </p:spPr>
+            <p:style>
+              <a:lnRef idx="1">
+                <a:schemeClr val="accent3"/>
+              </a:lnRef>
+              <a:fillRef idx="3">
+                <a:schemeClr val="accent3"/>
+              </a:fillRef>
+              <a:effectRef idx="2">
+                <a:schemeClr val="accent3"/>
+              </a:effectRef>
+              <a:fontRef idx="minor">
+                <a:schemeClr val="lt1"/>
+              </a:fontRef>
+            </p:style>
+            <p:txBody>
+              <a:bodyPr rtlCol="0" anchor="ctr"/>
+              <a:lstStyle/>
+              <a:p>
+                <a:pPr algn="ctr"/>
+                <a:r>
+                  <a:rPr lang="pl-PL" sz="2400" b="1" dirty="0"/>
+                  <a:t>NC</a:t>
+                </a:r>
+                <a:endParaRPr lang="en-US" b="1" dirty="0"/>
+              </a:p>
+            </p:txBody>
+          </p:sp>
+        </p:grpSp>
+        <p:grpSp>
+          <p:nvGrpSpPr>
+            <p:cNvPr id="60" name="Grupa 59">
+              <a:extLst>
+                <a:ext uri="{FF2B5EF4-FFF2-40B4-BE49-F238E27FC236}">
+                  <a16:creationId xmlns:a16="http://schemas.microsoft.com/office/drawing/2014/main" id="{A27ED64B-86FA-8BFA-B775-4E00172FDA11}"/>
+                </a:ext>
+              </a:extLst>
+            </p:cNvPr>
+            <p:cNvGrpSpPr/>
+            <p:nvPr/>
+          </p:nvGrpSpPr>
+          <p:grpSpPr>
+            <a:xfrm>
+              <a:off x="1395988" y="1438817"/>
+              <a:ext cx="8757111" cy="957224"/>
+              <a:chOff x="1395989" y="3843658"/>
+              <a:chExt cx="8757111" cy="957224"/>
+            </a:xfrm>
+          </p:grpSpPr>
+          <p:sp>
+            <p:nvSpPr>
+              <p:cNvPr id="61" name="Prostokąt: zaokrąglone rogi 60">
+                <a:extLst>
+                  <a:ext uri="{FF2B5EF4-FFF2-40B4-BE49-F238E27FC236}">
+                    <a16:creationId xmlns:a16="http://schemas.microsoft.com/office/drawing/2014/main" id="{89A8A1EC-F591-81B7-5008-FC91083CFE56}"/>
+                  </a:ext>
+                </a:extLst>
+              </p:cNvPr>
+              <p:cNvSpPr/>
+              <p:nvPr/>
+            </p:nvSpPr>
+            <p:spPr>
+              <a:xfrm rot="16200000">
+                <a:off x="1156146" y="4083509"/>
+                <a:ext cx="944381" cy="464695"/>
+              </a:xfrm>
+              <a:prstGeom prst="roundRect">
+                <a:avLst/>
+              </a:prstGeom>
+            </p:spPr>
+            <p:style>
+              <a:lnRef idx="1">
+                <a:schemeClr val="accent3"/>
+              </a:lnRef>
+              <a:fillRef idx="3">
+                <a:schemeClr val="accent3"/>
+              </a:fillRef>
+              <a:effectRef idx="2">
+                <a:schemeClr val="accent3"/>
+              </a:effectRef>
+              <a:fontRef idx="minor">
+                <a:schemeClr val="lt1"/>
+              </a:fontRef>
+            </p:style>
+            <p:txBody>
+              <a:bodyPr rtlCol="0" anchor="ctr"/>
+              <a:lstStyle/>
+              <a:p>
+                <a:pPr algn="ctr"/>
+                <a:r>
+                  <a:rPr lang="pl-PL" sz="2400" b="1" dirty="0"/>
+                  <a:t>GPA7</a:t>
+                </a:r>
+                <a:endParaRPr lang="en-US" b="1" dirty="0"/>
+              </a:p>
+            </p:txBody>
+          </p:sp>
+          <p:sp>
+            <p:nvSpPr>
+              <p:cNvPr id="62" name="Prostokąt: zaokrąglone rogi 61">
+                <a:extLst>
+                  <a:ext uri="{FF2B5EF4-FFF2-40B4-BE49-F238E27FC236}">
+                    <a16:creationId xmlns:a16="http://schemas.microsoft.com/office/drawing/2014/main" id="{434A600B-925C-A63A-06A4-B40662F623D9}"/>
+                  </a:ext>
+                </a:extLst>
+              </p:cNvPr>
+              <p:cNvSpPr/>
+              <p:nvPr/>
+            </p:nvSpPr>
+            <p:spPr>
+              <a:xfrm rot="16200000">
+                <a:off x="1785971" y="4083509"/>
+                <a:ext cx="944381" cy="464695"/>
+              </a:xfrm>
+              <a:prstGeom prst="roundRect">
+                <a:avLst/>
+              </a:prstGeom>
+            </p:spPr>
+            <p:style>
+              <a:lnRef idx="1">
+                <a:schemeClr val="accent3"/>
+              </a:lnRef>
+              <a:fillRef idx="3">
+                <a:schemeClr val="accent3"/>
+              </a:fillRef>
+              <a:effectRef idx="2">
+                <a:schemeClr val="accent3"/>
+              </a:effectRef>
+              <a:fontRef idx="minor">
+                <a:schemeClr val="lt1"/>
+              </a:fontRef>
+            </p:style>
+            <p:txBody>
+              <a:bodyPr rtlCol="0" anchor="ctr"/>
+              <a:lstStyle/>
+              <a:p>
+                <a:pPr algn="ctr"/>
+                <a:r>
+                  <a:rPr lang="pl-PL" sz="2400" b="1" dirty="0"/>
+                  <a:t>GPA6</a:t>
+                </a:r>
+                <a:endParaRPr lang="en-US" b="1" dirty="0"/>
+              </a:p>
+            </p:txBody>
+          </p:sp>
+          <p:sp>
+            <p:nvSpPr>
+              <p:cNvPr id="63" name="Prostokąt: zaokrąglone rogi 62">
+                <a:extLst>
+                  <a:ext uri="{FF2B5EF4-FFF2-40B4-BE49-F238E27FC236}">
+                    <a16:creationId xmlns:a16="http://schemas.microsoft.com/office/drawing/2014/main" id="{2C252F48-462A-BF8F-5DC8-252B17CF3E6B}"/>
+                  </a:ext>
+                </a:extLst>
+              </p:cNvPr>
+              <p:cNvSpPr/>
+              <p:nvPr/>
+            </p:nvSpPr>
+            <p:spPr>
+              <a:xfrm rot="16200000">
+                <a:off x="2415795" y="4083508"/>
+                <a:ext cx="944381" cy="464695"/>
+              </a:xfrm>
+              <a:prstGeom prst="roundRect">
+                <a:avLst/>
+              </a:prstGeom>
+            </p:spPr>
+            <p:style>
+              <a:lnRef idx="1">
+                <a:schemeClr val="accent3"/>
+              </a:lnRef>
+              <a:fillRef idx="3">
+                <a:schemeClr val="accent3"/>
+              </a:fillRef>
+              <a:effectRef idx="2">
+                <a:schemeClr val="accent3"/>
+              </a:effectRef>
+              <a:fontRef idx="minor">
+                <a:schemeClr val="lt1"/>
+              </a:fontRef>
+            </p:style>
+            <p:txBody>
+              <a:bodyPr rtlCol="0" anchor="ctr"/>
+              <a:lstStyle/>
+              <a:p>
+                <a:pPr algn="ctr"/>
+                <a:r>
+                  <a:rPr lang="pl-PL" sz="2400" b="1" dirty="0"/>
+                  <a:t>GPA5</a:t>
+                </a:r>
+                <a:endParaRPr lang="en-US" b="1" dirty="0"/>
+              </a:p>
+            </p:txBody>
+          </p:sp>
+          <p:sp>
+            <p:nvSpPr>
+              <p:cNvPr id="64" name="Prostokąt: zaokrąglone rogi 63">
+                <a:extLst>
+                  <a:ext uri="{FF2B5EF4-FFF2-40B4-BE49-F238E27FC236}">
+                    <a16:creationId xmlns:a16="http://schemas.microsoft.com/office/drawing/2014/main" id="{4719ED76-4B87-2369-61AF-53E2695E1A49}"/>
+                  </a:ext>
+                </a:extLst>
+              </p:cNvPr>
+              <p:cNvSpPr/>
+              <p:nvPr/>
+            </p:nvSpPr>
+            <p:spPr>
+              <a:xfrm rot="16200000">
+                <a:off x="3045620" y="4083507"/>
+                <a:ext cx="944381" cy="464695"/>
+              </a:xfrm>
+              <a:prstGeom prst="roundRect">
+                <a:avLst/>
+              </a:prstGeom>
+            </p:spPr>
+            <p:style>
+              <a:lnRef idx="1">
+                <a:schemeClr val="accent3"/>
+              </a:lnRef>
+              <a:fillRef idx="3">
+                <a:schemeClr val="accent3"/>
+              </a:fillRef>
+              <a:effectRef idx="2">
+                <a:schemeClr val="accent3"/>
+              </a:effectRef>
+              <a:fontRef idx="minor">
+                <a:schemeClr val="lt1"/>
+              </a:fontRef>
+            </p:style>
+            <p:txBody>
+              <a:bodyPr rtlCol="0" anchor="ctr"/>
+              <a:lstStyle/>
+              <a:p>
+                <a:pPr algn="ctr"/>
+                <a:r>
+                  <a:rPr lang="pl-PL" sz="2400" b="1" dirty="0"/>
+                  <a:t>GPA4</a:t>
+                </a:r>
+                <a:endParaRPr lang="en-US" b="1" dirty="0"/>
+              </a:p>
+            </p:txBody>
+          </p:sp>
+          <p:sp>
+            <p:nvSpPr>
+              <p:cNvPr id="65" name="Prostokąt: zaokrąglone rogi 64">
+                <a:extLst>
+                  <a:ext uri="{FF2B5EF4-FFF2-40B4-BE49-F238E27FC236}">
+                    <a16:creationId xmlns:a16="http://schemas.microsoft.com/office/drawing/2014/main" id="{47F1CC82-0E17-E2F0-0606-04FEE5B6E23F}"/>
+                  </a:ext>
+                </a:extLst>
+              </p:cNvPr>
+              <p:cNvSpPr/>
+              <p:nvPr/>
+            </p:nvSpPr>
+            <p:spPr>
+              <a:xfrm rot="16200000">
+                <a:off x="3675444" y="4083506"/>
+                <a:ext cx="944381" cy="464695"/>
+              </a:xfrm>
+              <a:prstGeom prst="roundRect">
+                <a:avLst/>
+              </a:prstGeom>
+            </p:spPr>
+            <p:style>
+              <a:lnRef idx="1">
+                <a:schemeClr val="accent3"/>
+              </a:lnRef>
+              <a:fillRef idx="3">
+                <a:schemeClr val="accent3"/>
+              </a:fillRef>
+              <a:effectRef idx="2">
+                <a:schemeClr val="accent3"/>
+              </a:effectRef>
+              <a:fontRef idx="minor">
+                <a:schemeClr val="lt1"/>
+              </a:fontRef>
+            </p:style>
+            <p:txBody>
+              <a:bodyPr rtlCol="0" anchor="ctr"/>
+              <a:lstStyle/>
+              <a:p>
+                <a:pPr algn="ctr"/>
+                <a:r>
+                  <a:rPr lang="pl-PL" sz="2400" b="1" dirty="0"/>
+                  <a:t>GPA3</a:t>
+                </a:r>
+                <a:endParaRPr lang="en-US" b="1" dirty="0"/>
+              </a:p>
+            </p:txBody>
+          </p:sp>
+          <p:sp>
+            <p:nvSpPr>
+              <p:cNvPr id="66" name="Prostokąt: zaokrąglone rogi 65">
+                <a:extLst>
+                  <a:ext uri="{FF2B5EF4-FFF2-40B4-BE49-F238E27FC236}">
+                    <a16:creationId xmlns:a16="http://schemas.microsoft.com/office/drawing/2014/main" id="{1A11F910-9DEF-A790-B0CE-786A65C3BD27}"/>
+                  </a:ext>
+                </a:extLst>
+              </p:cNvPr>
+              <p:cNvSpPr/>
+              <p:nvPr/>
+            </p:nvSpPr>
+            <p:spPr>
+              <a:xfrm rot="16200000">
+                <a:off x="4305268" y="4083505"/>
+                <a:ext cx="944381" cy="464695"/>
+              </a:xfrm>
+              <a:prstGeom prst="roundRect">
+                <a:avLst/>
+              </a:prstGeom>
+            </p:spPr>
+            <p:style>
+              <a:lnRef idx="1">
+                <a:schemeClr val="accent3"/>
+              </a:lnRef>
+              <a:fillRef idx="3">
+                <a:schemeClr val="accent3"/>
+              </a:fillRef>
+              <a:effectRef idx="2">
+                <a:schemeClr val="accent3"/>
+              </a:effectRef>
+              <a:fontRef idx="minor">
+                <a:schemeClr val="lt1"/>
+              </a:fontRef>
+            </p:style>
+            <p:txBody>
+              <a:bodyPr rtlCol="0" anchor="ctr"/>
+              <a:lstStyle/>
+              <a:p>
+                <a:pPr algn="ctr"/>
+                <a:r>
+                  <a:rPr lang="pl-PL" sz="2400" b="1" dirty="0"/>
+                  <a:t>GPA2</a:t>
+                </a:r>
+                <a:endParaRPr lang="en-US" b="1" dirty="0"/>
+              </a:p>
+            </p:txBody>
+          </p:sp>
+          <p:sp>
+            <p:nvSpPr>
+              <p:cNvPr id="67" name="Prostokąt: zaokrąglone rogi 66">
+                <a:extLst>
+                  <a:ext uri="{FF2B5EF4-FFF2-40B4-BE49-F238E27FC236}">
+                    <a16:creationId xmlns:a16="http://schemas.microsoft.com/office/drawing/2014/main" id="{4B18BF1E-3740-331D-E443-80FC6EC4A19B}"/>
+                  </a:ext>
+                </a:extLst>
+              </p:cNvPr>
+              <p:cNvSpPr/>
+              <p:nvPr/>
+            </p:nvSpPr>
+            <p:spPr>
+              <a:xfrm rot="16200000">
+                <a:off x="4935092" y="4083504"/>
+                <a:ext cx="944381" cy="464695"/>
+              </a:xfrm>
+              <a:prstGeom prst="roundRect">
+                <a:avLst/>
+              </a:prstGeom>
+            </p:spPr>
+            <p:style>
+              <a:lnRef idx="1">
+                <a:schemeClr val="accent3"/>
+              </a:lnRef>
+              <a:fillRef idx="3">
+                <a:schemeClr val="accent3"/>
+              </a:fillRef>
+              <a:effectRef idx="2">
+                <a:schemeClr val="accent3"/>
+              </a:effectRef>
+              <a:fontRef idx="minor">
+                <a:schemeClr val="lt1"/>
+              </a:fontRef>
+            </p:style>
+            <p:txBody>
+              <a:bodyPr rtlCol="0" anchor="ctr"/>
+              <a:lstStyle/>
+              <a:p>
+                <a:pPr algn="ctr"/>
+                <a:r>
+                  <a:rPr lang="pl-PL" sz="2400" b="1" dirty="0"/>
+                  <a:t>GPA1</a:t>
+                </a:r>
+                <a:endParaRPr lang="en-US" b="1" dirty="0"/>
+              </a:p>
+            </p:txBody>
+          </p:sp>
+          <p:sp>
+            <p:nvSpPr>
+              <p:cNvPr id="68" name="Prostokąt: zaokrąglone rogi 67">
+                <a:extLst>
+                  <a:ext uri="{FF2B5EF4-FFF2-40B4-BE49-F238E27FC236}">
+                    <a16:creationId xmlns:a16="http://schemas.microsoft.com/office/drawing/2014/main" id="{4E13F30D-604C-AD82-EF70-2AC81925EA32}"/>
+                  </a:ext>
+                </a:extLst>
+              </p:cNvPr>
+              <p:cNvSpPr/>
+              <p:nvPr/>
+            </p:nvSpPr>
+            <p:spPr>
+              <a:xfrm rot="16200000">
+                <a:off x="5564916" y="4083503"/>
+                <a:ext cx="944381" cy="464695"/>
+              </a:xfrm>
+              <a:prstGeom prst="roundRect">
+                <a:avLst/>
+              </a:prstGeom>
+            </p:spPr>
+            <p:style>
+              <a:lnRef idx="1">
+                <a:schemeClr val="accent3"/>
+              </a:lnRef>
+              <a:fillRef idx="3">
+                <a:schemeClr val="accent3"/>
+              </a:fillRef>
+              <a:effectRef idx="2">
+                <a:schemeClr val="accent3"/>
+              </a:effectRef>
+              <a:fontRef idx="minor">
+                <a:schemeClr val="lt1"/>
+              </a:fontRef>
+            </p:style>
+            <p:txBody>
+              <a:bodyPr rtlCol="0" anchor="ctr"/>
+              <a:lstStyle/>
+              <a:p>
+                <a:pPr algn="ctr"/>
+                <a:r>
+                  <a:rPr lang="pl-PL" sz="2400" b="1" dirty="0"/>
+                  <a:t>GPA0</a:t>
+                </a:r>
+                <a:endParaRPr lang="en-US" b="1" dirty="0"/>
+              </a:p>
+            </p:txBody>
+          </p:sp>
+          <p:sp>
+            <p:nvSpPr>
+              <p:cNvPr id="69" name="Prostokąt: zaokrąglone rogi 68">
+                <a:extLst>
+                  <a:ext uri="{FF2B5EF4-FFF2-40B4-BE49-F238E27FC236}">
+                    <a16:creationId xmlns:a16="http://schemas.microsoft.com/office/drawing/2014/main" id="{2ECF4BF6-20F1-3084-B52D-E1A6C13972A8}"/>
+                  </a:ext>
+                </a:extLst>
+              </p:cNvPr>
+              <p:cNvSpPr/>
+              <p:nvPr/>
+            </p:nvSpPr>
+            <p:spPr>
+              <a:xfrm rot="16200000">
+                <a:off x="6220915" y="4083503"/>
+                <a:ext cx="944381" cy="464695"/>
+              </a:xfrm>
+              <a:prstGeom prst="roundRect">
+                <a:avLst/>
+              </a:prstGeom>
+            </p:spPr>
+            <p:style>
+              <a:lnRef idx="1">
+                <a:schemeClr val="accent3"/>
+              </a:lnRef>
+              <a:fillRef idx="3">
+                <a:schemeClr val="accent3"/>
+              </a:fillRef>
+              <a:effectRef idx="2">
+                <a:schemeClr val="accent3"/>
+              </a:effectRef>
+              <a:fontRef idx="minor">
+                <a:schemeClr val="lt1"/>
+              </a:fontRef>
+            </p:style>
+            <p:txBody>
+              <a:bodyPr rtlCol="0" anchor="ctr"/>
+              <a:lstStyle/>
+              <a:p>
+                <a:pPr algn="ctr"/>
+                <a:r>
+                  <a:rPr lang="pl-PL" sz="2400" b="1" dirty="0"/>
+                  <a:t>INTA</a:t>
+                </a:r>
+                <a:endParaRPr lang="en-US" b="1" dirty="0"/>
+              </a:p>
+            </p:txBody>
+          </p:sp>
+          <p:sp>
+            <p:nvSpPr>
+              <p:cNvPr id="70" name="Prostokąt: zaokrąglone rogi 69">
+                <a:extLst>
+                  <a:ext uri="{FF2B5EF4-FFF2-40B4-BE49-F238E27FC236}">
+                    <a16:creationId xmlns:a16="http://schemas.microsoft.com/office/drawing/2014/main" id="{AC57E78C-8394-5E8B-F573-F139F3450CAC}"/>
+                  </a:ext>
+                </a:extLst>
+              </p:cNvPr>
+              <p:cNvSpPr/>
+              <p:nvPr/>
+            </p:nvSpPr>
+            <p:spPr>
+              <a:xfrm rot="16200000">
+                <a:off x="6850740" y="4096344"/>
+                <a:ext cx="944381" cy="464695"/>
+              </a:xfrm>
+              <a:prstGeom prst="roundRect">
+                <a:avLst/>
+              </a:prstGeom>
+            </p:spPr>
+            <p:style>
+              <a:lnRef idx="1">
+                <a:schemeClr val="accent3"/>
+              </a:lnRef>
+              <a:fillRef idx="3">
+                <a:schemeClr val="accent3"/>
+              </a:fillRef>
+              <a:effectRef idx="2">
+                <a:schemeClr val="accent3"/>
+              </a:effectRef>
+              <a:fontRef idx="minor">
+                <a:schemeClr val="lt1"/>
+              </a:fontRef>
+            </p:style>
+            <p:txBody>
+              <a:bodyPr rtlCol="0" anchor="ctr"/>
+              <a:lstStyle/>
+              <a:p>
+                <a:pPr algn="ctr"/>
+                <a:r>
+                  <a:rPr lang="pl-PL" sz="2400" b="1" dirty="0"/>
+                  <a:t>INTB</a:t>
+                </a:r>
+                <a:endParaRPr lang="en-US" b="1" dirty="0"/>
+              </a:p>
+            </p:txBody>
+          </p:sp>
+          <p:sp>
+            <p:nvSpPr>
+              <p:cNvPr id="71" name="Prostokąt: zaokrąglone rogi 70">
+                <a:extLst>
+                  <a:ext uri="{FF2B5EF4-FFF2-40B4-BE49-F238E27FC236}">
+                    <a16:creationId xmlns:a16="http://schemas.microsoft.com/office/drawing/2014/main" id="{AD44058A-E670-43B8-6D60-EEB3DA824751}"/>
+                  </a:ext>
+                </a:extLst>
+              </p:cNvPr>
+              <p:cNvSpPr/>
+              <p:nvPr/>
+            </p:nvSpPr>
+            <p:spPr>
+              <a:xfrm rot="16200000">
+                <a:off x="7506739" y="4083502"/>
+                <a:ext cx="944381" cy="464695"/>
+              </a:xfrm>
+              <a:prstGeom prst="roundRect">
+                <a:avLst/>
+              </a:prstGeom>
+            </p:spPr>
+            <p:style>
+              <a:lnRef idx="1">
+                <a:schemeClr val="accent3"/>
+              </a:lnRef>
+              <a:fillRef idx="3">
+                <a:schemeClr val="accent3"/>
+              </a:fillRef>
+              <a:effectRef idx="2">
+                <a:schemeClr val="accent3"/>
+              </a:effectRef>
+              <a:fontRef idx="minor">
+                <a:schemeClr val="lt1"/>
+              </a:fontRef>
+            </p:style>
+            <p:txBody>
+              <a:bodyPr rtlCol="0" anchor="ctr"/>
+              <a:lstStyle/>
+              <a:p>
+                <a:pPr algn="ctr"/>
+                <a:endParaRPr lang="en-US" b="1" dirty="0"/>
+              </a:p>
+            </p:txBody>
+          </p:sp>
+          <p:sp>
+            <p:nvSpPr>
+              <p:cNvPr id="72" name="Prostokąt: zaokrąglone rogi 71">
+                <a:extLst>
+                  <a:ext uri="{FF2B5EF4-FFF2-40B4-BE49-F238E27FC236}">
+                    <a16:creationId xmlns:a16="http://schemas.microsoft.com/office/drawing/2014/main" id="{DAF7A4C3-FF40-E484-8EC4-28781CF9A960}"/>
+                  </a:ext>
+                </a:extLst>
+              </p:cNvPr>
+              <p:cNvSpPr/>
+              <p:nvPr/>
+            </p:nvSpPr>
+            <p:spPr>
+              <a:xfrm rot="16200000">
+                <a:off x="8162739" y="4083501"/>
+                <a:ext cx="944381" cy="464695"/>
+              </a:xfrm>
+              <a:prstGeom prst="roundRect">
+                <a:avLst/>
+              </a:prstGeom>
+            </p:spPr>
+            <p:style>
+              <a:lnRef idx="1">
+                <a:schemeClr val="accent3"/>
+              </a:lnRef>
+              <a:fillRef idx="3">
+                <a:schemeClr val="accent3"/>
+              </a:fillRef>
+              <a:effectRef idx="2">
+                <a:schemeClr val="accent3"/>
+              </a:effectRef>
+              <a:fontRef idx="minor">
+                <a:schemeClr val="lt1"/>
+              </a:fontRef>
+            </p:style>
+            <p:txBody>
+              <a:bodyPr rtlCol="0" anchor="ctr"/>
+              <a:lstStyle/>
+              <a:p>
+                <a:pPr algn="ctr"/>
+                <a:r>
+                  <a:rPr lang="pl-PL" sz="2400" b="1" dirty="0"/>
+                  <a:t>A2</a:t>
+                </a:r>
+                <a:endParaRPr lang="en-US" b="1" dirty="0"/>
+              </a:p>
+            </p:txBody>
+          </p:sp>
+          <p:sp>
+            <p:nvSpPr>
+              <p:cNvPr id="73" name="Prostokąt: zaokrąglone rogi 72">
+                <a:extLst>
+                  <a:ext uri="{FF2B5EF4-FFF2-40B4-BE49-F238E27FC236}">
+                    <a16:creationId xmlns:a16="http://schemas.microsoft.com/office/drawing/2014/main" id="{DD37B0BF-AF7E-08F3-24AB-EADC44E2C8BC}"/>
+                  </a:ext>
+                </a:extLst>
+              </p:cNvPr>
+              <p:cNvSpPr/>
+              <p:nvPr/>
+            </p:nvSpPr>
+            <p:spPr>
+              <a:xfrm rot="16200000">
+                <a:off x="8792563" y="4096343"/>
+                <a:ext cx="944381" cy="464695"/>
+              </a:xfrm>
+              <a:prstGeom prst="roundRect">
+                <a:avLst/>
+              </a:prstGeom>
+            </p:spPr>
+            <p:style>
+              <a:lnRef idx="1">
+                <a:schemeClr val="accent3"/>
+              </a:lnRef>
+              <a:fillRef idx="3">
+                <a:schemeClr val="accent3"/>
+              </a:fillRef>
+              <a:effectRef idx="2">
+                <a:schemeClr val="accent3"/>
+              </a:effectRef>
+              <a:fontRef idx="minor">
+                <a:schemeClr val="lt1"/>
+              </a:fontRef>
+            </p:style>
+            <p:txBody>
+              <a:bodyPr rtlCol="0" anchor="ctr"/>
+              <a:lstStyle/>
+              <a:p>
+                <a:pPr algn="ctr"/>
+                <a:r>
+                  <a:rPr lang="pl-PL" sz="2400" b="1" dirty="0"/>
+                  <a:t>A1</a:t>
+                </a:r>
+                <a:endParaRPr lang="en-US" b="1" dirty="0"/>
+              </a:p>
+            </p:txBody>
+          </p:sp>
+          <p:sp>
+            <p:nvSpPr>
+              <p:cNvPr id="74" name="Prostokąt: zaokrąglone rogi 73">
+                <a:extLst>
+                  <a:ext uri="{FF2B5EF4-FFF2-40B4-BE49-F238E27FC236}">
+                    <a16:creationId xmlns:a16="http://schemas.microsoft.com/office/drawing/2014/main" id="{40C044CE-1165-FCF2-FBA3-0C55EB2243D2}"/>
+                  </a:ext>
+                </a:extLst>
+              </p:cNvPr>
+              <p:cNvSpPr/>
+              <p:nvPr/>
+            </p:nvSpPr>
+            <p:spPr>
+              <a:xfrm rot="16200000">
+                <a:off x="9448562" y="4096342"/>
+                <a:ext cx="944381" cy="464695"/>
+              </a:xfrm>
+              <a:prstGeom prst="roundRect">
+                <a:avLst/>
+              </a:prstGeom>
+            </p:spPr>
+            <p:style>
+              <a:lnRef idx="1">
+                <a:schemeClr val="accent3"/>
+              </a:lnRef>
+              <a:fillRef idx="3">
+                <a:schemeClr val="accent3"/>
+              </a:fillRef>
+              <a:effectRef idx="2">
+                <a:schemeClr val="accent3"/>
+              </a:effectRef>
+              <a:fontRef idx="minor">
+                <a:schemeClr val="lt1"/>
+              </a:fontRef>
+            </p:style>
+            <p:txBody>
+              <a:bodyPr rtlCol="0" anchor="ctr"/>
+              <a:lstStyle/>
+              <a:p>
+                <a:pPr algn="ctr"/>
+                <a:r>
+                  <a:rPr lang="pl-PL" sz="2400" b="1" dirty="0"/>
+                  <a:t>A0</a:t>
+                </a:r>
+                <a:endParaRPr lang="en-US" b="1" dirty="0"/>
+              </a:p>
+            </p:txBody>
+          </p:sp>
+        </p:grpSp>
+        <p:sp>
+          <p:nvSpPr>
+            <p:cNvPr id="75" name="pole tekstowe 74">
+              <a:extLst>
+                <a:ext uri="{FF2B5EF4-FFF2-40B4-BE49-F238E27FC236}">
+                  <a16:creationId xmlns:a16="http://schemas.microsoft.com/office/drawing/2014/main" id="{767CCED0-3A58-2AD1-EE89-A59BFE7FC6B3}"/>
+                </a:ext>
+              </a:extLst>
+            </p:cNvPr>
+            <p:cNvSpPr txBox="1"/>
+            <p:nvPr/>
+          </p:nvSpPr>
+          <p:spPr>
+            <a:xfrm rot="16200000">
+              <a:off x="7407391" y="1574417"/>
+              <a:ext cx="1143073" cy="461665"/>
+            </a:xfrm>
+            <a:prstGeom prst="rect">
+              <a:avLst/>
+            </a:prstGeom>
+            <a:noFill/>
+          </p:spPr>
+          <p:txBody>
+            <a:bodyPr wrap="square" rtlCol="0">
+              <a:spAutoFit/>
+            </a:bodyPr>
+            <a:lstStyle/>
+            <a:p>
+              <a:r>
+                <a:rPr lang="pl-PL" sz="2400" b="1" dirty="0">
+                  <a:solidFill>
+                    <a:schemeClr val="bg1"/>
+                  </a:solidFill>
+                </a:rPr>
+                <a:t>RESET</a:t>
+              </a:r>
+              <a:endParaRPr lang="en-US" b="1" dirty="0">
+                <a:solidFill>
+                  <a:schemeClr val="bg1"/>
+                </a:solidFill>
+              </a:endParaRPr>
+            </a:p>
+          </p:txBody>
+        </p:sp>
+        <p:cxnSp>
+          <p:nvCxnSpPr>
+            <p:cNvPr id="81" name="Łącznik prosty 80">
+              <a:extLst>
+                <a:ext uri="{FF2B5EF4-FFF2-40B4-BE49-F238E27FC236}">
+                  <a16:creationId xmlns:a16="http://schemas.microsoft.com/office/drawing/2014/main" id="{62C09978-E152-2FA0-64AA-D9E73634F1BF}"/>
+                </a:ext>
+              </a:extLst>
+            </p:cNvPr>
+            <p:cNvCxnSpPr>
+              <a:cxnSpLocks/>
+            </p:cNvCxnSpPr>
+            <p:nvPr/>
+          </p:nvCxnSpPr>
+          <p:spPr>
+            <a:xfrm flipV="1">
+              <a:off x="7854601" y="1519238"/>
+              <a:ext cx="0" cy="752475"/>
+            </a:xfrm>
+            <a:prstGeom prst="line">
+              <a:avLst/>
+            </a:prstGeom>
+            <a:ln w="41275">
+              <a:solidFill>
+                <a:schemeClr val="bg1"/>
+              </a:solidFill>
+            </a:ln>
+          </p:spPr>
+          <p:style>
+            <a:lnRef idx="1">
+              <a:schemeClr val="accent1"/>
+            </a:lnRef>
+            <a:fillRef idx="0">
+              <a:schemeClr val="accent1"/>
+            </a:fillRef>
+            <a:effectRef idx="0">
+              <a:schemeClr val="accent1"/>
+            </a:effectRef>
+            <a:fontRef idx="minor">
+              <a:schemeClr val="tx1"/>
+            </a:fontRef>
+          </p:style>
+        </p:cxnSp>
+        <p:cxnSp>
+          <p:nvCxnSpPr>
+            <p:cNvPr id="84" name="Łącznik prosty 83">
+              <a:extLst>
+                <a:ext uri="{FF2B5EF4-FFF2-40B4-BE49-F238E27FC236}">
+                  <a16:creationId xmlns:a16="http://schemas.microsoft.com/office/drawing/2014/main" id="{E5077D24-A272-FBAC-FD2F-8F77DD541ECF}"/>
+                </a:ext>
+              </a:extLst>
+            </p:cNvPr>
+            <p:cNvCxnSpPr>
+              <a:cxnSpLocks/>
+            </p:cNvCxnSpPr>
+            <p:nvPr/>
+          </p:nvCxnSpPr>
+          <p:spPr>
+            <a:xfrm flipV="1">
+              <a:off x="7199605" y="1619250"/>
+              <a:ext cx="0" cy="590550"/>
+            </a:xfrm>
+            <a:prstGeom prst="line">
+              <a:avLst/>
+            </a:prstGeom>
+            <a:ln w="41275">
+              <a:solidFill>
+                <a:schemeClr val="bg1"/>
+              </a:solidFill>
+            </a:ln>
+          </p:spPr>
+          <p:style>
+            <a:lnRef idx="1">
+              <a:schemeClr val="accent1"/>
+            </a:lnRef>
+            <a:fillRef idx="0">
+              <a:schemeClr val="accent1"/>
+            </a:fillRef>
+            <a:effectRef idx="0">
+              <a:schemeClr val="accent1"/>
+            </a:effectRef>
+            <a:fontRef idx="minor">
+              <a:schemeClr val="tx1"/>
+            </a:fontRef>
+          </p:style>
+        </p:cxnSp>
+        <p:cxnSp>
+          <p:nvCxnSpPr>
+            <p:cNvPr id="85" name="Łącznik prosty 84">
+              <a:extLst>
+                <a:ext uri="{FF2B5EF4-FFF2-40B4-BE49-F238E27FC236}">
+                  <a16:creationId xmlns:a16="http://schemas.microsoft.com/office/drawing/2014/main" id="{FD782C1B-1D3C-48FB-2BA3-7A7F337EB65D}"/>
+                </a:ext>
+              </a:extLst>
+            </p:cNvPr>
+            <p:cNvCxnSpPr>
+              <a:cxnSpLocks/>
+            </p:cNvCxnSpPr>
+            <p:nvPr/>
+          </p:nvCxnSpPr>
+          <p:spPr>
+            <a:xfrm flipV="1">
+              <a:off x="6554337" y="1593056"/>
+              <a:ext cx="0" cy="595313"/>
+            </a:xfrm>
+            <a:prstGeom prst="line">
+              <a:avLst/>
+            </a:prstGeom>
+            <a:ln w="41275">
+              <a:solidFill>
+                <a:schemeClr val="bg1"/>
+              </a:solidFill>
+            </a:ln>
+          </p:spPr>
+          <p:style>
+            <a:lnRef idx="1">
+              <a:schemeClr val="accent1"/>
+            </a:lnRef>
+            <a:fillRef idx="0">
+              <a:schemeClr val="accent1"/>
+            </a:fillRef>
+            <a:effectRef idx="0">
+              <a:schemeClr val="accent1"/>
+            </a:effectRef>
+            <a:fontRef idx="minor">
+              <a:schemeClr val="tx1"/>
+            </a:fontRef>
+          </p:style>
+        </p:cxnSp>
+        <p:sp>
+          <p:nvSpPr>
+            <p:cNvPr id="93" name="pole tekstowe 92">
+              <a:extLst>
+                <a:ext uri="{FF2B5EF4-FFF2-40B4-BE49-F238E27FC236}">
+                  <a16:creationId xmlns:a16="http://schemas.microsoft.com/office/drawing/2014/main" id="{B837206A-8A24-E821-68CB-E8931990707D}"/>
+                </a:ext>
+              </a:extLst>
+            </p:cNvPr>
+            <p:cNvSpPr txBox="1"/>
+            <p:nvPr/>
+          </p:nvSpPr>
+          <p:spPr>
+            <a:xfrm rot="16200000">
+              <a:off x="1405982" y="3396328"/>
+              <a:ext cx="444706" cy="369332"/>
+            </a:xfrm>
+            <a:prstGeom prst="rect">
+              <a:avLst/>
+            </a:prstGeom>
+            <a:noFill/>
+          </p:spPr>
+          <p:txBody>
+            <a:bodyPr wrap="square" rtlCol="0">
+              <a:spAutoFit/>
+            </a:bodyPr>
+            <a:lstStyle/>
+            <a:p>
+              <a:r>
+                <a:rPr lang="pl-PL" dirty="0"/>
+                <a:t>1</a:t>
+              </a:r>
+              <a:endParaRPr lang="en-US" dirty="0"/>
+            </a:p>
+          </p:txBody>
+        </p:sp>
+        <p:sp>
+          <p:nvSpPr>
+            <p:cNvPr id="94" name="pole tekstowe 93">
+              <a:extLst>
+                <a:ext uri="{FF2B5EF4-FFF2-40B4-BE49-F238E27FC236}">
+                  <a16:creationId xmlns:a16="http://schemas.microsoft.com/office/drawing/2014/main" id="{E22C2451-4803-54CA-B832-E369B02FBD77}"/>
+                </a:ext>
+              </a:extLst>
+            </p:cNvPr>
+            <p:cNvSpPr txBox="1"/>
+            <p:nvPr/>
+          </p:nvSpPr>
+          <p:spPr>
+            <a:xfrm rot="16200000">
+              <a:off x="2046352" y="3396320"/>
+              <a:ext cx="444706" cy="369332"/>
+            </a:xfrm>
+            <a:prstGeom prst="rect">
+              <a:avLst/>
+            </a:prstGeom>
+            <a:noFill/>
+          </p:spPr>
+          <p:txBody>
+            <a:bodyPr wrap="square" rtlCol="0">
+              <a:spAutoFit/>
+            </a:bodyPr>
+            <a:lstStyle/>
+            <a:p>
+              <a:r>
+                <a:rPr lang="pl-PL" dirty="0"/>
+                <a:t>2</a:t>
+              </a:r>
+              <a:endParaRPr lang="en-US" dirty="0"/>
+            </a:p>
+          </p:txBody>
+        </p:sp>
+        <p:sp>
+          <p:nvSpPr>
+            <p:cNvPr id="95" name="pole tekstowe 94">
+              <a:extLst>
+                <a:ext uri="{FF2B5EF4-FFF2-40B4-BE49-F238E27FC236}">
+                  <a16:creationId xmlns:a16="http://schemas.microsoft.com/office/drawing/2014/main" id="{7DF629D2-108F-78D9-C9EE-F326FEFAEFE1}"/>
+                </a:ext>
+              </a:extLst>
+            </p:cNvPr>
+            <p:cNvSpPr txBox="1"/>
+            <p:nvPr/>
+          </p:nvSpPr>
+          <p:spPr>
+            <a:xfrm rot="16200000">
+              <a:off x="2664635" y="3396320"/>
+              <a:ext cx="444706" cy="369332"/>
+            </a:xfrm>
+            <a:prstGeom prst="rect">
+              <a:avLst/>
+            </a:prstGeom>
+            <a:noFill/>
+          </p:spPr>
+          <p:txBody>
+            <a:bodyPr wrap="square" rtlCol="0">
+              <a:spAutoFit/>
+            </a:bodyPr>
+            <a:lstStyle/>
+            <a:p>
+              <a:r>
+                <a:rPr lang="pl-PL" dirty="0"/>
+                <a:t>3</a:t>
+              </a:r>
+              <a:endParaRPr lang="en-US" dirty="0"/>
+            </a:p>
+          </p:txBody>
+        </p:sp>
+        <p:sp>
+          <p:nvSpPr>
+            <p:cNvPr id="96" name="pole tekstowe 95">
+              <a:extLst>
+                <a:ext uri="{FF2B5EF4-FFF2-40B4-BE49-F238E27FC236}">
+                  <a16:creationId xmlns:a16="http://schemas.microsoft.com/office/drawing/2014/main" id="{19C685A0-97CB-0E7A-B67F-E9D890779114}"/>
+                </a:ext>
+              </a:extLst>
+            </p:cNvPr>
+            <p:cNvSpPr txBox="1"/>
+            <p:nvPr/>
+          </p:nvSpPr>
+          <p:spPr>
+            <a:xfrm rot="16200000">
+              <a:off x="3293719" y="3396319"/>
+              <a:ext cx="444706" cy="369332"/>
+            </a:xfrm>
+            <a:prstGeom prst="rect">
+              <a:avLst/>
+            </a:prstGeom>
+            <a:noFill/>
+          </p:spPr>
+          <p:txBody>
+            <a:bodyPr wrap="square" rtlCol="0">
+              <a:spAutoFit/>
+            </a:bodyPr>
+            <a:lstStyle/>
+            <a:p>
+              <a:r>
+                <a:rPr lang="pl-PL" dirty="0"/>
+                <a:t>4</a:t>
+              </a:r>
+              <a:endParaRPr lang="en-US" dirty="0"/>
+            </a:p>
+          </p:txBody>
+        </p:sp>
+        <p:sp>
+          <p:nvSpPr>
+            <p:cNvPr id="97" name="pole tekstowe 96">
+              <a:extLst>
+                <a:ext uri="{FF2B5EF4-FFF2-40B4-BE49-F238E27FC236}">
+                  <a16:creationId xmlns:a16="http://schemas.microsoft.com/office/drawing/2014/main" id="{DA1E20F6-0FB8-2F2A-5729-65CB64201784}"/>
+                </a:ext>
+              </a:extLst>
+            </p:cNvPr>
+            <p:cNvSpPr txBox="1"/>
+            <p:nvPr/>
+          </p:nvSpPr>
+          <p:spPr>
+            <a:xfrm rot="16200000">
+              <a:off x="3922733" y="3396319"/>
+              <a:ext cx="444706" cy="369332"/>
+            </a:xfrm>
+            <a:prstGeom prst="rect">
+              <a:avLst/>
+            </a:prstGeom>
+            <a:noFill/>
+          </p:spPr>
+          <p:txBody>
+            <a:bodyPr wrap="square" rtlCol="0">
+              <a:spAutoFit/>
+            </a:bodyPr>
+            <a:lstStyle/>
+            <a:p>
+              <a:r>
+                <a:rPr lang="pl-PL" dirty="0"/>
+                <a:t>5</a:t>
+              </a:r>
+              <a:endParaRPr lang="en-US" dirty="0"/>
+            </a:p>
+          </p:txBody>
+        </p:sp>
+        <p:sp>
+          <p:nvSpPr>
+            <p:cNvPr id="98" name="pole tekstowe 97">
+              <a:extLst>
+                <a:ext uri="{FF2B5EF4-FFF2-40B4-BE49-F238E27FC236}">
+                  <a16:creationId xmlns:a16="http://schemas.microsoft.com/office/drawing/2014/main" id="{4C03A168-478C-EA59-8BF1-555FCB63C0B1}"/>
+                </a:ext>
+              </a:extLst>
+            </p:cNvPr>
+            <p:cNvSpPr txBox="1"/>
+            <p:nvPr/>
+          </p:nvSpPr>
+          <p:spPr>
+            <a:xfrm rot="16200000">
+              <a:off x="4551747" y="3396319"/>
+              <a:ext cx="444706" cy="369332"/>
+            </a:xfrm>
+            <a:prstGeom prst="rect">
+              <a:avLst/>
+            </a:prstGeom>
+            <a:noFill/>
+          </p:spPr>
+          <p:txBody>
+            <a:bodyPr wrap="square" rtlCol="0">
+              <a:spAutoFit/>
+            </a:bodyPr>
+            <a:lstStyle/>
+            <a:p>
+              <a:r>
+                <a:rPr lang="pl-PL" dirty="0"/>
+                <a:t>6</a:t>
+              </a:r>
+              <a:endParaRPr lang="en-US" dirty="0"/>
+            </a:p>
+          </p:txBody>
+        </p:sp>
+        <p:sp>
+          <p:nvSpPr>
+            <p:cNvPr id="99" name="pole tekstowe 98">
+              <a:extLst>
+                <a:ext uri="{FF2B5EF4-FFF2-40B4-BE49-F238E27FC236}">
+                  <a16:creationId xmlns:a16="http://schemas.microsoft.com/office/drawing/2014/main" id="{6B05E561-B5F5-E8EA-A6BA-CD277043A7E9}"/>
+                </a:ext>
+              </a:extLst>
+            </p:cNvPr>
+            <p:cNvSpPr txBox="1"/>
+            <p:nvPr/>
+          </p:nvSpPr>
+          <p:spPr>
+            <a:xfrm rot="16200000">
+              <a:off x="5181984" y="3396319"/>
+              <a:ext cx="444706" cy="369332"/>
+            </a:xfrm>
+            <a:prstGeom prst="rect">
+              <a:avLst/>
+            </a:prstGeom>
+            <a:noFill/>
+          </p:spPr>
+          <p:txBody>
+            <a:bodyPr wrap="square" rtlCol="0">
+              <a:spAutoFit/>
+            </a:bodyPr>
+            <a:lstStyle/>
+            <a:p>
+              <a:r>
+                <a:rPr lang="pl-PL" dirty="0"/>
+                <a:t>7</a:t>
+              </a:r>
+              <a:endParaRPr lang="en-US" dirty="0"/>
+            </a:p>
+          </p:txBody>
+        </p:sp>
+        <p:sp>
+          <p:nvSpPr>
+            <p:cNvPr id="100" name="pole tekstowe 99">
+              <a:extLst>
+                <a:ext uri="{FF2B5EF4-FFF2-40B4-BE49-F238E27FC236}">
+                  <a16:creationId xmlns:a16="http://schemas.microsoft.com/office/drawing/2014/main" id="{41E167E6-F8FB-B5F2-581B-505A64804276}"/>
+                </a:ext>
+              </a:extLst>
+            </p:cNvPr>
+            <p:cNvSpPr txBox="1"/>
+            <p:nvPr/>
+          </p:nvSpPr>
+          <p:spPr>
+            <a:xfrm rot="16200000">
+              <a:off x="5826296" y="3396319"/>
+              <a:ext cx="444706" cy="369332"/>
+            </a:xfrm>
+            <a:prstGeom prst="rect">
+              <a:avLst/>
+            </a:prstGeom>
+            <a:noFill/>
+          </p:spPr>
+          <p:txBody>
+            <a:bodyPr wrap="square" rtlCol="0">
+              <a:spAutoFit/>
+            </a:bodyPr>
+            <a:lstStyle/>
+            <a:p>
+              <a:r>
+                <a:rPr lang="pl-PL" dirty="0"/>
+                <a:t>8</a:t>
+              </a:r>
+              <a:endParaRPr lang="en-US" dirty="0"/>
+            </a:p>
+          </p:txBody>
+        </p:sp>
+        <p:sp>
+          <p:nvSpPr>
+            <p:cNvPr id="101" name="pole tekstowe 100">
+              <a:extLst>
+                <a:ext uri="{FF2B5EF4-FFF2-40B4-BE49-F238E27FC236}">
+                  <a16:creationId xmlns:a16="http://schemas.microsoft.com/office/drawing/2014/main" id="{690C2F4E-47A4-B2EF-F531-39B375174D2E}"/>
+                </a:ext>
+              </a:extLst>
+            </p:cNvPr>
+            <p:cNvSpPr txBox="1"/>
+            <p:nvPr/>
+          </p:nvSpPr>
+          <p:spPr>
+            <a:xfrm rot="16200000">
+              <a:off x="6444579" y="3396321"/>
+              <a:ext cx="444706" cy="369332"/>
+            </a:xfrm>
+            <a:prstGeom prst="rect">
+              <a:avLst/>
+            </a:prstGeom>
+            <a:noFill/>
+          </p:spPr>
+          <p:txBody>
+            <a:bodyPr wrap="square" rtlCol="0">
+              <a:spAutoFit/>
+            </a:bodyPr>
+            <a:lstStyle/>
+            <a:p>
+              <a:r>
+                <a:rPr lang="pl-PL" dirty="0"/>
+                <a:t>9</a:t>
+              </a:r>
+              <a:endParaRPr lang="en-US" dirty="0"/>
+            </a:p>
+          </p:txBody>
+        </p:sp>
+        <p:sp>
+          <p:nvSpPr>
+            <p:cNvPr id="102" name="pole tekstowe 101">
+              <a:extLst>
+                <a:ext uri="{FF2B5EF4-FFF2-40B4-BE49-F238E27FC236}">
+                  <a16:creationId xmlns:a16="http://schemas.microsoft.com/office/drawing/2014/main" id="{A983DBF6-EE7D-C271-9A18-056E6A5E0EE6}"/>
+                </a:ext>
+              </a:extLst>
+            </p:cNvPr>
+            <p:cNvSpPr txBox="1"/>
+            <p:nvPr/>
+          </p:nvSpPr>
+          <p:spPr>
+            <a:xfrm rot="16200000">
+              <a:off x="7087458" y="3396320"/>
+              <a:ext cx="444706" cy="369332"/>
+            </a:xfrm>
+            <a:prstGeom prst="rect">
+              <a:avLst/>
+            </a:prstGeom>
+            <a:noFill/>
+          </p:spPr>
+          <p:txBody>
+            <a:bodyPr wrap="square" rtlCol="0">
+              <a:spAutoFit/>
+            </a:bodyPr>
+            <a:lstStyle/>
+            <a:p>
+              <a:r>
+                <a:rPr lang="pl-PL" dirty="0"/>
+                <a:t>10</a:t>
+              </a:r>
+              <a:endParaRPr lang="en-US" dirty="0"/>
+            </a:p>
+          </p:txBody>
+        </p:sp>
+        <p:sp>
+          <p:nvSpPr>
+            <p:cNvPr id="103" name="pole tekstowe 102">
+              <a:extLst>
+                <a:ext uri="{FF2B5EF4-FFF2-40B4-BE49-F238E27FC236}">
+                  <a16:creationId xmlns:a16="http://schemas.microsoft.com/office/drawing/2014/main" id="{5E4CF772-69E0-9D75-8997-58283FC0055B}"/>
+                </a:ext>
+              </a:extLst>
+            </p:cNvPr>
+            <p:cNvSpPr txBox="1"/>
+            <p:nvPr/>
+          </p:nvSpPr>
+          <p:spPr>
+            <a:xfrm rot="16200000">
+              <a:off x="7707702" y="3398274"/>
+              <a:ext cx="444706" cy="369332"/>
+            </a:xfrm>
+            <a:prstGeom prst="rect">
+              <a:avLst/>
+            </a:prstGeom>
+            <a:noFill/>
+          </p:spPr>
+          <p:txBody>
+            <a:bodyPr wrap="square" rtlCol="0">
+              <a:spAutoFit/>
+            </a:bodyPr>
+            <a:lstStyle/>
+            <a:p>
+              <a:r>
+                <a:rPr lang="pl-PL" dirty="0"/>
+                <a:t>11</a:t>
+              </a:r>
+              <a:endParaRPr lang="en-US" dirty="0"/>
+            </a:p>
+          </p:txBody>
+        </p:sp>
+        <p:sp>
+          <p:nvSpPr>
+            <p:cNvPr id="105" name="pole tekstowe 104">
+              <a:extLst>
+                <a:ext uri="{FF2B5EF4-FFF2-40B4-BE49-F238E27FC236}">
+                  <a16:creationId xmlns:a16="http://schemas.microsoft.com/office/drawing/2014/main" id="{E33CFE5F-7BF1-3BE9-CE86-9F2D6342123B}"/>
+                </a:ext>
+              </a:extLst>
+            </p:cNvPr>
+            <p:cNvSpPr txBox="1"/>
+            <p:nvPr/>
+          </p:nvSpPr>
+          <p:spPr>
+            <a:xfrm rot="16200000">
+              <a:off x="8412575" y="3396319"/>
+              <a:ext cx="444706" cy="369332"/>
+            </a:xfrm>
+            <a:prstGeom prst="rect">
+              <a:avLst/>
+            </a:prstGeom>
+            <a:noFill/>
+          </p:spPr>
+          <p:txBody>
+            <a:bodyPr wrap="square" rtlCol="0">
+              <a:spAutoFit/>
+            </a:bodyPr>
+            <a:lstStyle/>
+            <a:p>
+              <a:r>
+                <a:rPr lang="pl-PL" dirty="0"/>
+                <a:t>12</a:t>
+              </a:r>
+              <a:endParaRPr lang="en-US" dirty="0"/>
+            </a:p>
+          </p:txBody>
+        </p:sp>
+        <p:sp>
+          <p:nvSpPr>
+            <p:cNvPr id="106" name="pole tekstowe 105">
+              <a:extLst>
+                <a:ext uri="{FF2B5EF4-FFF2-40B4-BE49-F238E27FC236}">
+                  <a16:creationId xmlns:a16="http://schemas.microsoft.com/office/drawing/2014/main" id="{DCD4A887-6ED6-8420-B1A6-7B8B4C726DA6}"/>
+                </a:ext>
+              </a:extLst>
+            </p:cNvPr>
+            <p:cNvSpPr txBox="1"/>
+            <p:nvPr/>
+          </p:nvSpPr>
+          <p:spPr>
+            <a:xfrm rot="16200000">
+              <a:off x="9045439" y="3394653"/>
+              <a:ext cx="444706" cy="369332"/>
+            </a:xfrm>
+            <a:prstGeom prst="rect">
+              <a:avLst/>
+            </a:prstGeom>
+            <a:noFill/>
+          </p:spPr>
+          <p:txBody>
+            <a:bodyPr wrap="square" rtlCol="0">
+              <a:spAutoFit/>
+            </a:bodyPr>
+            <a:lstStyle/>
+            <a:p>
+              <a:r>
+                <a:rPr lang="pl-PL" dirty="0"/>
+                <a:t>13</a:t>
+              </a:r>
+              <a:endParaRPr lang="en-US" dirty="0"/>
+            </a:p>
+          </p:txBody>
+        </p:sp>
+        <p:sp>
+          <p:nvSpPr>
+            <p:cNvPr id="107" name="pole tekstowe 106">
+              <a:extLst>
+                <a:ext uri="{FF2B5EF4-FFF2-40B4-BE49-F238E27FC236}">
+                  <a16:creationId xmlns:a16="http://schemas.microsoft.com/office/drawing/2014/main" id="{CA984C92-FF55-B755-9B76-AED541FCDD6A}"/>
+                </a:ext>
+              </a:extLst>
+            </p:cNvPr>
+            <p:cNvSpPr txBox="1"/>
+            <p:nvPr/>
+          </p:nvSpPr>
+          <p:spPr>
+            <a:xfrm rot="16200000">
+              <a:off x="9674453" y="3399216"/>
+              <a:ext cx="444706" cy="369332"/>
+            </a:xfrm>
+            <a:prstGeom prst="rect">
+              <a:avLst/>
+            </a:prstGeom>
+            <a:noFill/>
+          </p:spPr>
+          <p:txBody>
+            <a:bodyPr wrap="square" rtlCol="0">
+              <a:spAutoFit/>
+            </a:bodyPr>
+            <a:lstStyle/>
+            <a:p>
+              <a:r>
+                <a:rPr lang="pl-PL" dirty="0"/>
+                <a:t>14</a:t>
+              </a:r>
+              <a:endParaRPr lang="en-US" dirty="0"/>
+            </a:p>
+          </p:txBody>
+        </p:sp>
+        <p:sp>
+          <p:nvSpPr>
+            <p:cNvPr id="108" name="pole tekstowe 107">
+              <a:extLst>
+                <a:ext uri="{FF2B5EF4-FFF2-40B4-BE49-F238E27FC236}">
+                  <a16:creationId xmlns:a16="http://schemas.microsoft.com/office/drawing/2014/main" id="{CFB4C3AF-8DF7-6675-3041-73B9FED02C30}"/>
+                </a:ext>
+              </a:extLst>
+            </p:cNvPr>
+            <p:cNvSpPr txBox="1"/>
+            <p:nvPr/>
+          </p:nvSpPr>
+          <p:spPr>
+            <a:xfrm rot="16200000">
+              <a:off x="9674453" y="2420880"/>
+              <a:ext cx="444706" cy="369332"/>
+            </a:xfrm>
+            <a:prstGeom prst="rect">
+              <a:avLst/>
+            </a:prstGeom>
+            <a:noFill/>
+          </p:spPr>
+          <p:txBody>
+            <a:bodyPr wrap="square" rtlCol="0">
+              <a:spAutoFit/>
+            </a:bodyPr>
+            <a:lstStyle/>
+            <a:p>
+              <a:r>
+                <a:rPr lang="pl-PL" dirty="0"/>
+                <a:t>15</a:t>
+              </a:r>
+              <a:endParaRPr lang="en-US" dirty="0"/>
+            </a:p>
+          </p:txBody>
+        </p:sp>
+        <p:sp>
+          <p:nvSpPr>
+            <p:cNvPr id="109" name="pole tekstowe 108">
+              <a:extLst>
+                <a:ext uri="{FF2B5EF4-FFF2-40B4-BE49-F238E27FC236}">
+                  <a16:creationId xmlns:a16="http://schemas.microsoft.com/office/drawing/2014/main" id="{BCF18D7B-DC44-FD51-BD91-954F40DEC126}"/>
+                </a:ext>
+              </a:extLst>
+            </p:cNvPr>
+            <p:cNvSpPr txBox="1"/>
+            <p:nvPr/>
+          </p:nvSpPr>
+          <p:spPr>
+            <a:xfrm rot="16200000">
+              <a:off x="9041814" y="2420880"/>
+              <a:ext cx="444706" cy="369332"/>
+            </a:xfrm>
+            <a:prstGeom prst="rect">
+              <a:avLst/>
+            </a:prstGeom>
+            <a:noFill/>
+          </p:spPr>
+          <p:txBody>
+            <a:bodyPr wrap="square" rtlCol="0">
+              <a:spAutoFit/>
+            </a:bodyPr>
+            <a:lstStyle/>
+            <a:p>
+              <a:r>
+                <a:rPr lang="pl-PL" dirty="0"/>
+                <a:t>16</a:t>
+              </a:r>
+              <a:endParaRPr lang="en-US" dirty="0"/>
+            </a:p>
+          </p:txBody>
+        </p:sp>
+        <p:sp>
+          <p:nvSpPr>
+            <p:cNvPr id="110" name="pole tekstowe 109">
+              <a:extLst>
+                <a:ext uri="{FF2B5EF4-FFF2-40B4-BE49-F238E27FC236}">
+                  <a16:creationId xmlns:a16="http://schemas.microsoft.com/office/drawing/2014/main" id="{3F885D01-04BF-30D9-4FBE-159E87361AA1}"/>
+                </a:ext>
+              </a:extLst>
+            </p:cNvPr>
+            <p:cNvSpPr txBox="1"/>
+            <p:nvPr/>
+          </p:nvSpPr>
+          <p:spPr>
+            <a:xfrm rot="16200000">
+              <a:off x="8416186" y="2420880"/>
+              <a:ext cx="444706" cy="369332"/>
+            </a:xfrm>
+            <a:prstGeom prst="rect">
+              <a:avLst/>
+            </a:prstGeom>
+            <a:noFill/>
+          </p:spPr>
+          <p:txBody>
+            <a:bodyPr wrap="square" rtlCol="0">
+              <a:spAutoFit/>
+            </a:bodyPr>
+            <a:lstStyle/>
+            <a:p>
+              <a:r>
+                <a:rPr lang="pl-PL" dirty="0"/>
+                <a:t>17</a:t>
+              </a:r>
+              <a:endParaRPr lang="en-US" dirty="0"/>
+            </a:p>
+          </p:txBody>
+        </p:sp>
+        <p:sp>
+          <p:nvSpPr>
+            <p:cNvPr id="111" name="pole tekstowe 110">
+              <a:extLst>
+                <a:ext uri="{FF2B5EF4-FFF2-40B4-BE49-F238E27FC236}">
+                  <a16:creationId xmlns:a16="http://schemas.microsoft.com/office/drawing/2014/main" id="{4764FAC2-C204-6BBB-2480-2F2FCCCCA7E1}"/>
+                </a:ext>
+              </a:extLst>
+            </p:cNvPr>
+            <p:cNvSpPr txBox="1"/>
+            <p:nvPr/>
+          </p:nvSpPr>
+          <p:spPr>
+            <a:xfrm rot="16200000">
+              <a:off x="7731106" y="2408754"/>
+              <a:ext cx="444706" cy="369332"/>
+            </a:xfrm>
+            <a:prstGeom prst="rect">
+              <a:avLst/>
+            </a:prstGeom>
+            <a:noFill/>
+          </p:spPr>
+          <p:txBody>
+            <a:bodyPr wrap="square" rtlCol="0">
+              <a:spAutoFit/>
+            </a:bodyPr>
+            <a:lstStyle/>
+            <a:p>
+              <a:r>
+                <a:rPr lang="pl-PL" dirty="0"/>
+                <a:t>18</a:t>
+              </a:r>
+              <a:endParaRPr lang="en-US" dirty="0"/>
+            </a:p>
+          </p:txBody>
+        </p:sp>
+        <p:sp>
+          <p:nvSpPr>
+            <p:cNvPr id="112" name="pole tekstowe 111">
+              <a:extLst>
+                <a:ext uri="{FF2B5EF4-FFF2-40B4-BE49-F238E27FC236}">
+                  <a16:creationId xmlns:a16="http://schemas.microsoft.com/office/drawing/2014/main" id="{C7555AB2-772A-08B8-DF8A-1FAFCD33FDC0}"/>
+                </a:ext>
+              </a:extLst>
+            </p:cNvPr>
+            <p:cNvSpPr txBox="1"/>
+            <p:nvPr/>
+          </p:nvSpPr>
+          <p:spPr>
+            <a:xfrm rot="16200000">
+              <a:off x="7081946" y="2408754"/>
+              <a:ext cx="444706" cy="369332"/>
+            </a:xfrm>
+            <a:prstGeom prst="rect">
+              <a:avLst/>
+            </a:prstGeom>
+            <a:noFill/>
+          </p:spPr>
+          <p:txBody>
+            <a:bodyPr wrap="square" rtlCol="0">
+              <a:spAutoFit/>
+            </a:bodyPr>
+            <a:lstStyle/>
+            <a:p>
+              <a:r>
+                <a:rPr lang="pl-PL" dirty="0"/>
+                <a:t>19</a:t>
+              </a:r>
+              <a:endParaRPr lang="en-US" dirty="0"/>
+            </a:p>
+          </p:txBody>
+        </p:sp>
+        <p:sp>
+          <p:nvSpPr>
+            <p:cNvPr id="113" name="pole tekstowe 112">
+              <a:extLst>
+                <a:ext uri="{FF2B5EF4-FFF2-40B4-BE49-F238E27FC236}">
+                  <a16:creationId xmlns:a16="http://schemas.microsoft.com/office/drawing/2014/main" id="{B4BF6185-2704-9D9B-6ADA-70B29B85E1D2}"/>
+                </a:ext>
+              </a:extLst>
+            </p:cNvPr>
+            <p:cNvSpPr txBox="1"/>
+            <p:nvPr/>
+          </p:nvSpPr>
+          <p:spPr>
+            <a:xfrm rot="16200000">
+              <a:off x="6444209" y="2426659"/>
+              <a:ext cx="444706" cy="369332"/>
+            </a:xfrm>
+            <a:prstGeom prst="rect">
+              <a:avLst/>
+            </a:prstGeom>
+            <a:noFill/>
+          </p:spPr>
+          <p:txBody>
+            <a:bodyPr wrap="square" rtlCol="0">
+              <a:spAutoFit/>
+            </a:bodyPr>
+            <a:lstStyle/>
+            <a:p>
+              <a:r>
+                <a:rPr lang="pl-PL" dirty="0"/>
+                <a:t>20</a:t>
+              </a:r>
+              <a:endParaRPr lang="en-US" dirty="0"/>
+            </a:p>
+          </p:txBody>
+        </p:sp>
+        <p:sp>
+          <p:nvSpPr>
+            <p:cNvPr id="114" name="pole tekstowe 113">
+              <a:extLst>
+                <a:ext uri="{FF2B5EF4-FFF2-40B4-BE49-F238E27FC236}">
+                  <a16:creationId xmlns:a16="http://schemas.microsoft.com/office/drawing/2014/main" id="{C6AB9A5D-E7CF-3381-57A2-0BC94677A0B5}"/>
+                </a:ext>
+              </a:extLst>
+            </p:cNvPr>
+            <p:cNvSpPr txBox="1"/>
+            <p:nvPr/>
+          </p:nvSpPr>
+          <p:spPr>
+            <a:xfrm rot="16200000">
+              <a:off x="5799746" y="2420880"/>
+              <a:ext cx="444706" cy="369332"/>
+            </a:xfrm>
+            <a:prstGeom prst="rect">
+              <a:avLst/>
+            </a:prstGeom>
+            <a:noFill/>
+          </p:spPr>
+          <p:txBody>
+            <a:bodyPr wrap="square" rtlCol="0">
+              <a:spAutoFit/>
+            </a:bodyPr>
+            <a:lstStyle/>
+            <a:p>
+              <a:r>
+                <a:rPr lang="pl-PL" dirty="0"/>
+                <a:t>21</a:t>
+              </a:r>
+              <a:endParaRPr lang="en-US" dirty="0"/>
+            </a:p>
+          </p:txBody>
+        </p:sp>
+        <p:sp>
+          <p:nvSpPr>
+            <p:cNvPr id="115" name="pole tekstowe 114">
+              <a:extLst>
+                <a:ext uri="{FF2B5EF4-FFF2-40B4-BE49-F238E27FC236}">
+                  <a16:creationId xmlns:a16="http://schemas.microsoft.com/office/drawing/2014/main" id="{1407EC42-AA09-5E59-4A82-F4C72F816DEF}"/>
+                </a:ext>
+              </a:extLst>
+            </p:cNvPr>
+            <p:cNvSpPr txBox="1"/>
+            <p:nvPr/>
+          </p:nvSpPr>
+          <p:spPr>
+            <a:xfrm rot="16200000">
+              <a:off x="5155283" y="2420880"/>
+              <a:ext cx="444706" cy="369332"/>
+            </a:xfrm>
+            <a:prstGeom prst="rect">
+              <a:avLst/>
+            </a:prstGeom>
+            <a:noFill/>
+          </p:spPr>
+          <p:txBody>
+            <a:bodyPr wrap="square" rtlCol="0">
+              <a:spAutoFit/>
+            </a:bodyPr>
+            <a:lstStyle/>
+            <a:p>
+              <a:r>
+                <a:rPr lang="pl-PL" dirty="0"/>
+                <a:t>22</a:t>
+              </a:r>
+              <a:endParaRPr lang="en-US" dirty="0"/>
+            </a:p>
+          </p:txBody>
+        </p:sp>
+        <p:sp>
+          <p:nvSpPr>
+            <p:cNvPr id="116" name="pole tekstowe 115">
+              <a:extLst>
+                <a:ext uri="{FF2B5EF4-FFF2-40B4-BE49-F238E27FC236}">
+                  <a16:creationId xmlns:a16="http://schemas.microsoft.com/office/drawing/2014/main" id="{E3308A42-0884-F05A-1713-09BCEB29F186}"/>
+                </a:ext>
+              </a:extLst>
+            </p:cNvPr>
+            <p:cNvSpPr txBox="1"/>
+            <p:nvPr/>
+          </p:nvSpPr>
+          <p:spPr>
+            <a:xfrm rot="16200000">
+              <a:off x="4525458" y="2420880"/>
+              <a:ext cx="444706" cy="369332"/>
+            </a:xfrm>
+            <a:prstGeom prst="rect">
+              <a:avLst/>
+            </a:prstGeom>
+            <a:noFill/>
+          </p:spPr>
+          <p:txBody>
+            <a:bodyPr wrap="square" rtlCol="0">
+              <a:spAutoFit/>
+            </a:bodyPr>
+            <a:lstStyle/>
+            <a:p>
+              <a:r>
+                <a:rPr lang="pl-PL" dirty="0"/>
+                <a:t>23</a:t>
+              </a:r>
+              <a:endParaRPr lang="en-US" dirty="0"/>
+            </a:p>
+          </p:txBody>
+        </p:sp>
+        <p:sp>
+          <p:nvSpPr>
+            <p:cNvPr id="117" name="pole tekstowe 116">
+              <a:extLst>
+                <a:ext uri="{FF2B5EF4-FFF2-40B4-BE49-F238E27FC236}">
+                  <a16:creationId xmlns:a16="http://schemas.microsoft.com/office/drawing/2014/main" id="{07508DB7-3C6B-DEA3-0A9A-FD9CAC119741}"/>
+                </a:ext>
+              </a:extLst>
+            </p:cNvPr>
+            <p:cNvSpPr txBox="1"/>
+            <p:nvPr/>
+          </p:nvSpPr>
+          <p:spPr>
+            <a:xfrm rot="16200000">
+              <a:off x="3894598" y="2408754"/>
+              <a:ext cx="444706" cy="369332"/>
+            </a:xfrm>
+            <a:prstGeom prst="rect">
+              <a:avLst/>
+            </a:prstGeom>
+            <a:noFill/>
+          </p:spPr>
+          <p:txBody>
+            <a:bodyPr wrap="square" rtlCol="0">
+              <a:spAutoFit/>
+            </a:bodyPr>
+            <a:lstStyle/>
+            <a:p>
+              <a:r>
+                <a:rPr lang="pl-PL" dirty="0"/>
+                <a:t>24</a:t>
+              </a:r>
+              <a:endParaRPr lang="en-US" dirty="0"/>
+            </a:p>
+          </p:txBody>
+        </p:sp>
+        <p:sp>
+          <p:nvSpPr>
+            <p:cNvPr id="118" name="pole tekstowe 117">
+              <a:extLst>
+                <a:ext uri="{FF2B5EF4-FFF2-40B4-BE49-F238E27FC236}">
+                  <a16:creationId xmlns:a16="http://schemas.microsoft.com/office/drawing/2014/main" id="{7EA7E8C4-9AD3-7763-6620-20F2D19EE6E4}"/>
+                </a:ext>
+              </a:extLst>
+            </p:cNvPr>
+            <p:cNvSpPr txBox="1"/>
+            <p:nvPr/>
+          </p:nvSpPr>
+          <p:spPr>
+            <a:xfrm rot="16200000">
+              <a:off x="3264773" y="2408754"/>
+              <a:ext cx="444706" cy="369332"/>
+            </a:xfrm>
+            <a:prstGeom prst="rect">
+              <a:avLst/>
+            </a:prstGeom>
+            <a:noFill/>
+          </p:spPr>
+          <p:txBody>
+            <a:bodyPr wrap="square" rtlCol="0">
+              <a:spAutoFit/>
+            </a:bodyPr>
+            <a:lstStyle/>
+            <a:p>
+              <a:r>
+                <a:rPr lang="pl-PL" dirty="0"/>
+                <a:t>25</a:t>
+              </a:r>
+              <a:endParaRPr lang="en-US" dirty="0"/>
+            </a:p>
+          </p:txBody>
+        </p:sp>
+        <p:sp>
+          <p:nvSpPr>
+            <p:cNvPr id="119" name="pole tekstowe 118">
+              <a:extLst>
+                <a:ext uri="{FF2B5EF4-FFF2-40B4-BE49-F238E27FC236}">
+                  <a16:creationId xmlns:a16="http://schemas.microsoft.com/office/drawing/2014/main" id="{2C336170-E2EE-543F-23C7-A81C7E88C8BE}"/>
+                </a:ext>
+              </a:extLst>
+            </p:cNvPr>
+            <p:cNvSpPr txBox="1"/>
+            <p:nvPr/>
+          </p:nvSpPr>
+          <p:spPr>
+            <a:xfrm rot="16200000">
+              <a:off x="2634948" y="2420880"/>
+              <a:ext cx="444706" cy="369332"/>
+            </a:xfrm>
+            <a:prstGeom prst="rect">
+              <a:avLst/>
+            </a:prstGeom>
+            <a:noFill/>
+          </p:spPr>
+          <p:txBody>
+            <a:bodyPr wrap="square" rtlCol="0">
+              <a:spAutoFit/>
+            </a:bodyPr>
+            <a:lstStyle/>
+            <a:p>
+              <a:r>
+                <a:rPr lang="pl-PL" dirty="0"/>
+                <a:t>26</a:t>
+              </a:r>
+              <a:endParaRPr lang="en-US" dirty="0"/>
+            </a:p>
+          </p:txBody>
+        </p:sp>
+        <p:sp>
+          <p:nvSpPr>
+            <p:cNvPr id="120" name="pole tekstowe 119">
+              <a:extLst>
+                <a:ext uri="{FF2B5EF4-FFF2-40B4-BE49-F238E27FC236}">
+                  <a16:creationId xmlns:a16="http://schemas.microsoft.com/office/drawing/2014/main" id="{AEF25CD9-CE18-1AAB-1E6C-AA424DC87969}"/>
+                </a:ext>
+              </a:extLst>
+            </p:cNvPr>
+            <p:cNvSpPr txBox="1"/>
+            <p:nvPr/>
+          </p:nvSpPr>
+          <p:spPr>
+            <a:xfrm rot="16200000">
+              <a:off x="2018730" y="2420880"/>
+              <a:ext cx="444706" cy="369332"/>
+            </a:xfrm>
+            <a:prstGeom prst="rect">
+              <a:avLst/>
+            </a:prstGeom>
+            <a:noFill/>
+          </p:spPr>
+          <p:txBody>
+            <a:bodyPr wrap="square" rtlCol="0">
+              <a:spAutoFit/>
+            </a:bodyPr>
+            <a:lstStyle/>
+            <a:p>
+              <a:r>
+                <a:rPr lang="pl-PL" dirty="0"/>
+                <a:t>27</a:t>
+              </a:r>
+              <a:endParaRPr lang="en-US" dirty="0"/>
+            </a:p>
+          </p:txBody>
+        </p:sp>
+        <p:sp>
+          <p:nvSpPr>
+            <p:cNvPr id="121" name="pole tekstowe 120">
+              <a:extLst>
+                <a:ext uri="{FF2B5EF4-FFF2-40B4-BE49-F238E27FC236}">
+                  <a16:creationId xmlns:a16="http://schemas.microsoft.com/office/drawing/2014/main" id="{48DFD8AC-E403-E7E4-9FC1-23EEF29D7BE9}"/>
+                </a:ext>
+              </a:extLst>
+            </p:cNvPr>
+            <p:cNvSpPr txBox="1"/>
+            <p:nvPr/>
+          </p:nvSpPr>
+          <p:spPr>
+            <a:xfrm rot="16200000">
+              <a:off x="1435549" y="2420880"/>
+              <a:ext cx="444706" cy="369332"/>
+            </a:xfrm>
+            <a:prstGeom prst="rect">
+              <a:avLst/>
+            </a:prstGeom>
+            <a:noFill/>
+          </p:spPr>
+          <p:txBody>
+            <a:bodyPr wrap="square" rtlCol="0">
+              <a:spAutoFit/>
+            </a:bodyPr>
+            <a:lstStyle/>
+            <a:p>
+              <a:r>
+                <a:rPr lang="pl-PL" dirty="0"/>
+                <a:t>28</a:t>
+              </a:r>
+              <a:endParaRPr lang="en-US" dirty="0"/>
+            </a:p>
+          </p:txBody>
+        </p:sp>
+        <p:sp>
+          <p:nvSpPr>
+            <p:cNvPr id="122" name="pole tekstowe 121">
+              <a:extLst>
+                <a:ext uri="{FF2B5EF4-FFF2-40B4-BE49-F238E27FC236}">
+                  <a16:creationId xmlns:a16="http://schemas.microsoft.com/office/drawing/2014/main" id="{92479343-3B1F-B407-017B-BC6CFD58CF02}"/>
+                </a:ext>
+              </a:extLst>
+            </p:cNvPr>
+            <p:cNvSpPr txBox="1"/>
+            <p:nvPr/>
+          </p:nvSpPr>
+          <p:spPr>
+            <a:xfrm rot="10800000">
+              <a:off x="4187402" y="2827904"/>
+              <a:ext cx="2714690" cy="707886"/>
+            </a:xfrm>
+            <a:prstGeom prst="rect">
+              <a:avLst/>
+            </a:prstGeom>
+            <a:noFill/>
+          </p:spPr>
+          <p:txBody>
+            <a:bodyPr wrap="square" rtlCol="0">
+              <a:spAutoFit/>
+            </a:bodyPr>
+            <a:lstStyle/>
+            <a:p>
+              <a:r>
+                <a:rPr lang="pl-PL" sz="4000" b="1" dirty="0"/>
+                <a:t>MCP2017</a:t>
+              </a:r>
+              <a:endParaRPr lang="en-US" sz="2400" b="1" dirty="0"/>
+            </a:p>
+          </p:txBody>
+        </p:sp>
+      </p:grpSp>
+    </p:spTree>
+    <p:extLst>
+      <p:ext uri="{BB962C8B-B14F-4D97-AF65-F5344CB8AC3E}">
+        <p14:creationId xmlns:p14="http://schemas.microsoft.com/office/powerpoint/2010/main" val="106987810"/>
+      </p:ext>
+    </p:extLst>
+  </p:cSld>
+  <p:clrMapOvr>
+    <a:masterClrMapping/>
+  </p:clrMapOvr>
+</p:sld>
+</file>
+
 <file path=ppt/theme/theme1.xml><?xml version="1.0" encoding="utf-8"?>
 <a:theme xmlns:a="http://schemas.openxmlformats.org/drawingml/2006/main" name="Motyw pakietu Office">
   <a:themeElements>
